--- a/presidencia/entrega/LATAM_Bank_Factored_Hackathon_2026.pptx
+++ b/presidencia/entrega/LATAM_Bank_Factored_Hackathon_2026.pptx
@@ -825,7 +825,7 @@
     <c:plotArea>
       <c:layout/>
       <c:barChart>
-        <c:barDir val="bar"/>
+        <c:barDir val="col"/>
         <c:grouping val="clustered"/>
         <c:varyColors val="0"/>
         <c:ser>
@@ -837,7 +837,84 @@
               <c:strCache>
                 <c:ptCount val="1"/>
                 <c:pt idx="0">
-                  <c:v>Runs passing every check</c:v>
+                  <c:v>AI agent</c:v>
+                </c:pt>
+              </c:strCache>
+            </c:strRef>
+          </c:tx>
+          <c:spPr>
+            <a:solidFill>
+              <a:srgbClr val="0B6E4F"/>
+            </a:solidFill>
+            <a:effectLst/>
+          </c:spPr>
+          <c:invertIfNegative val="0"/>
+          <c:dLbls>
+            <c:numFmt formatCode="#,##0" sourceLinked="0"/>
+            <c:txPr>
+              <a:bodyPr/>
+              <a:lstStyle/>
+              <a:p>
+                <a:pPr>
+                  <a:defRPr b="0" i="0" strike="noStrike" sz="1300" u="none">
+                    <a:solidFill>
+                      <a:srgbClr val="0B1F2A"/>
+                    </a:solidFill>
+                    <a:latin typeface="Calibri"/>
+                  </a:defRPr>
+                </a:pPr>
+              </a:p>
+            </c:txPr>
+            <c:showLegendKey val="0"/>
+            <c:showVal val="1"/>
+            <c:showCatName val="0"/>
+            <c:showSerName val="0"/>
+            <c:showPercent val="0"/>
+            <c:showBubbleSize val="0"/>
+            <c:showLeaderLines val="0"/>
+          </c:dLbls>
+          <c:cat>
+            <c:multiLvlStrRef>
+              <c:f>Sheet1!$A$2:$A$3</c:f>
+              <c:multiLvlStrCache>
+                <c:ptCount val="2"/>
+                <c:lvl>
+                  <c:pt idx="0">
+                    <c:v>Dispute flow (30 cases)</c:v>
+                  </c:pt>
+                  <c:pt idx="1">
+                    <c:v>Policy, follow-up, multi-request (13)</c:v>
+                  </c:pt>
+                </c:lvl>
+              </c:multiLvlStrCache>
+            </c:multiLvlStrRef>
+          </c:cat>
+          <c:val>
+            <c:numRef>
+              <c:f>Sheet1!$B$2:$B$3</c:f>
+              <c:numCache>
+                <c:formatCode>General</c:formatCode>
+                <c:ptCount val="2"/>
+                <c:pt idx="0">
+                  <c:v>92</c:v>
+                </c:pt>
+                <c:pt idx="1">
+                  <c:v>82</c:v>
+                </c:pt>
+              </c:numCache>
+            </c:numRef>
+          </c:val>
+        </c:ser>
+        <c:ser>
+          <c:idx val="1"/>
+          <c:order val="1"/>
+          <c:tx>
+            <c:strRef>
+              <c:f>Sheet1!$C$1</c:f>
+              <c:strCache>
+                <c:ptCount val="1"/>
+                <c:pt idx="0">
+                  <c:v>Rules baseline</c:v>
                 </c:pt>
               </c:strCache>
             </c:strRef>
@@ -873,28 +950,6 @@
             <c:showBubbleSize val="0"/>
             <c:showLeaderLines val="0"/>
           </c:dLbls>
-          <c:dPt>
-            <c:idx val="0"/>
-            <c:invertIfNegative val="0"/>
-            <c:bubble3D val="0"/>
-            <c:spPr>
-              <a:solidFill>
-                <a:srgbClr val="C9D3D0"/>
-              </a:solidFill>
-              <a:effectLst/>
-            </c:spPr>
-          </c:dPt>
-          <c:dPt>
-            <c:idx val="1"/>
-            <c:invertIfNegative val="0"/>
-            <c:bubble3D val="0"/>
-            <c:spPr>
-              <a:solidFill>
-                <a:srgbClr val="0B6E4F"/>
-              </a:solidFill>
-              <a:effectLst/>
-            </c:spPr>
-          </c:dPt>
           <c:cat>
             <c:multiLvlStrRef>
               <c:f>Sheet1!$A$2:$A$3</c:f>
@@ -902,10 +957,10 @@
                 <c:ptCount val="2"/>
                 <c:lvl>
                   <c:pt idx="0">
-                    <c:v>Rules baseline</c:v>
+                    <c:v>Dispute flow (30 cases)</c:v>
                   </c:pt>
                   <c:pt idx="1">
-                    <c:v>AI agent</c:v>
+                    <c:v>Policy, follow-up, multi-request (13)</c:v>
                   </c:pt>
                 </c:lvl>
               </c:multiLvlStrCache>
@@ -913,15 +968,15 @@
           </c:cat>
           <c:val>
             <c:numRef>
-              <c:f>Sheet1!$B$2:$B$3</c:f>
+              <c:f>Sheet1!$C$2:$C$3</c:f>
               <c:numCache>
                 <c:formatCode>General</c:formatCode>
                 <c:ptCount val="2"/>
                 <c:pt idx="0">
-                  <c:v>91</c:v>
+                  <c:v>87</c:v>
                 </c:pt>
                 <c:pt idx="1">
-                  <c:v>80</c:v>
+                  <c:v>38</c:v>
                 </c:pt>
               </c:numCache>
             </c:numRef>
@@ -951,7 +1006,7 @@
           <c:showBubbleSize val="0"/>
           <c:showLeaderLines val="0"/>
         </c:dLbls>
-        <c:gapWidth val="50"/>
+        <c:gapWidth val="60"/>
         <c:overlap val="0"/>
         <c:axId val="2094734554"/>
         <c:axId val="2094734552"/>
@@ -963,8 +1018,50 @@
           <c:orientation val="minMax"/>
         </c:scaling>
         <c:delete val="0"/>
+        <c:axPos val="b"/>
+        <c:numFmt formatCode="General" sourceLinked="1"/>
+        <c:majorTickMark val="out"/>
+        <c:minorTickMark val="none"/>
+        <c:tickLblPos val="low"/>
+        <c:spPr>
+          <a:ln w="12700" cap="flat">
+            <a:solidFill>
+              <a:srgbClr val="888888"/>
+            </a:solidFill>
+            <a:prstDash val="solid"/>
+            <a:round/>
+          </a:ln>
+        </c:spPr>
+        <c:txPr>
+          <a:bodyPr/>
+          <a:lstStyle/>
+          <a:p>
+            <a:pPr>
+              <a:defRPr sz="1200" b="0" i="0" u="none" strike="noStrike">
+                <a:solidFill>
+                  <a:srgbClr val="0B1F2A"/>
+                </a:solidFill>
+                <a:latin typeface="Calibri"/>
+              </a:defRPr>
+            </a:pPr>
+            <a:endParaRPr lang="en-US"/>
+          </a:p>
+        </c:txPr>
+        <c:crossAx val="2094734552"/>
+        <c:crosses val="autoZero"/>
+        <c:auto val="1"/>
+        <c:lblAlgn val="ctr"/>
+        <c:noMultiLvlLbl val="1"/>
+      </c:catAx>
+      <c:valAx>
+        <c:axId val="2094734552"/>
+        <c:scaling>
+          <c:orientation val="minMax"/>
+          <c:max val="110"/>
+        </c:scaling>
+        <c:delete val="1"/>
         <c:axPos val="l"/>
-        <c:numFmt formatCode="General" sourceLinked="1"/>
+        <c:numFmt formatCode="General" sourceLinked="0"/>
         <c:majorTickMark val="out"/>
         <c:minorTickMark val="none"/>
         <c:tickLblPos val="nextTo"/>
@@ -982,48 +1079,6 @@
           <a:lstStyle/>
           <a:p>
             <a:pPr>
-              <a:defRPr sz="1300" b="0" i="0" u="none" strike="noStrike">
-                <a:solidFill>
-                  <a:srgbClr val="0B1F2A"/>
-                </a:solidFill>
-                <a:latin typeface="Calibri"/>
-              </a:defRPr>
-            </a:pPr>
-            <a:endParaRPr lang="en-US"/>
-          </a:p>
-        </c:txPr>
-        <c:crossAx val="2094734552"/>
-        <c:crosses val="autoZero"/>
-        <c:auto val="1"/>
-        <c:lblAlgn val="ctr"/>
-        <c:noMultiLvlLbl val="1"/>
-      </c:catAx>
-      <c:valAx>
-        <c:axId val="2094734552"/>
-        <c:scaling>
-          <c:orientation val="minMax"/>
-          <c:max val="110"/>
-        </c:scaling>
-        <c:delete val="1"/>
-        <c:axPos val="b"/>
-        <c:numFmt formatCode="General" sourceLinked="0"/>
-        <c:majorTickMark val="out"/>
-        <c:minorTickMark val="none"/>
-        <c:tickLblPos val="low"/>
-        <c:spPr>
-          <a:ln w="12700" cap="flat">
-            <a:solidFill>
-              <a:srgbClr val="888888"/>
-            </a:solidFill>
-            <a:prstDash val="solid"/>
-            <a:round/>
-          </a:ln>
-        </c:spPr>
-        <c:txPr>
-          <a:bodyPr/>
-          <a:lstStyle/>
-          <a:p>
-            <a:pPr>
               <a:defRPr sz="1200" b="0" i="0" u="none" strike="noStrike">
                 <a:solidFill>
                   <a:srgbClr val="000000"/>
@@ -1046,6 +1101,26 @@
         <a:effectLst/>
       </c:spPr>
     </c:plotArea>
+    <c:legend>
+      <c:legendPos val="t"/>
+      <c:overlay val="0"/>
+      <c:txPr>
+        <a:bodyPr/>
+        <a:lstStyle/>
+        <a:p>
+          <a:pPr>
+            <a:defRPr sz="1200">
+              <a:solidFill>
+                <a:srgbClr val="0B1F2A"/>
+              </a:solidFill>
+              <a:latin typeface="Calibri"/>
+              <a:cs typeface="Calibri"/>
+            </a:defRPr>
+          </a:pPr>
+          <a:endParaRPr lang="en-US"/>
+        </a:p>
+      </c:txPr>
+    </c:legend>
     <c:plotVisOnly val="1"/>
     <c:dispBlanksAs val="span"/>
   </c:chart>
@@ -6320,7 +6395,7 @@
                 <a:ea typeface="Calibri" pitchFamily="34" charset="-122"/>
                 <a:cs typeface="Calibri" pitchFamily="34" charset="-120"/>
               </a:rPr>
-              <a:t>Zero unsafe outcomes in 96 runs, and an honest baseline</a:t>
+              <a:t>On a fresh held-out set, the agent beats the rules baseline</a:t>
             </a:r>
             <a:endParaRPr lang="en-US" sz="3200" dirty="0"/>
           </a:p>
@@ -6386,7 +6461,7 @@
                 <a:ea typeface="Calibri" pitchFamily="34" charset="-122"/>
                 <a:cs typeface="Calibri" pitchFamily="34" charset="-120"/>
               </a:rPr>
-              <a:t>0 / 96</a:t>
+              <a:t>89%</a:t>
             </a:r>
             <a:endParaRPr lang="en-US" sz="4400" dirty="0"/>
           </a:p>
@@ -6425,7 +6500,7 @@
                 <a:ea typeface="Calibri" pitchFamily="34" charset="-122"/>
                 <a:cs typeface="Calibri" pitchFamily="34" charset="-120"/>
               </a:rPr>
-              <a:t>unsafe outcomes. Bounds the risk at 4%, does not prove zero</a:t>
+              <a:t>of 129 runs pass every check. 43 new cases, frozen before building</a:t>
             </a:r>
             <a:endParaRPr lang="en-US" sz="1400" dirty="0"/>
           </a:p>
@@ -6491,7 +6566,7 @@
                 <a:ea typeface="Calibri" pitchFamily="34" charset="-122"/>
                 <a:cs typeface="Calibri" pitchFamily="34" charset="-120"/>
               </a:rPr>
-              <a:t>81%</a:t>
+              <a:t>82%</a:t>
             </a:r>
             <a:endParaRPr lang="en-US" sz="4400" dirty="0"/>
           </a:p>
@@ -6530,7 +6605,7 @@
                 <a:ea typeface="Calibri" pitchFamily="34" charset="-122"/>
                 <a:cs typeface="Calibri" pitchFamily="34" charset="-120"/>
               </a:rPr>
-              <a:t>safe automated resolution on resolvable cases (29 of 36)</a:t>
+              <a:t>safe automated resolution on resolvable cases. Rules: 62%</a:t>
             </a:r>
             <a:endParaRPr lang="en-US" sz="1400" dirty="0"/>
           </a:p>
@@ -6596,7 +6671,7 @@
                 <a:ea typeface="Calibri" pitchFamily="34" charset="-122"/>
                 <a:cs typeface="Calibri" pitchFamily="34" charset="-120"/>
               </a:rPr>
-              <a:t>1.4 s</a:t>
+              <a:t>0 / 18</a:t>
             </a:r>
             <a:endParaRPr lang="en-US" sz="4400" dirty="0"/>
           </a:p>
@@ -6635,7 +6710,7 @@
                 <a:ea typeface="Calibri" pitchFamily="34" charset="-122"/>
                 <a:cs typeface="Calibri" pitchFamily="34" charset="-120"/>
               </a:rPr>
-              <a:t>median agent turn. p95 4.6 s</a:t>
+              <a:t>missed handoffs to a human</a:t>
             </a:r>
             <a:endParaRPr lang="en-US" sz="1400" dirty="0"/>
           </a:p>
@@ -6695,13 +6770,13 @@
             <a:r>
               <a:rPr lang="en-US" sz="4400" b="1" dirty="0">
                 <a:solidFill>
-                  <a:srgbClr val="0B6E4F"/>
-                </a:solidFill>
-                <a:latin typeface="Calibri" pitchFamily="34" charset="0"/>
-                <a:ea typeface="Calibri" pitchFamily="34" charset="-122"/>
-                <a:cs typeface="Calibri" pitchFamily="34" charset="-120"/>
-              </a:rPr>
-              <a:t>$0.002</a:t>
+                  <a:srgbClr val="B5483A"/>
+                </a:solidFill>
+                <a:latin typeface="Calibri" pitchFamily="34" charset="0"/>
+                <a:ea typeface="Calibri" pitchFamily="34" charset="-122"/>
+                <a:cs typeface="Calibri" pitchFamily="34" charset="-120"/>
+              </a:rPr>
+              <a:t>1 / 129</a:t>
             </a:r>
             <a:endParaRPr lang="en-US" sz="4400" dirty="0"/>
           </a:p>
@@ -6740,7 +6815,7 @@
                 <a:ea typeface="Calibri" pitchFamily="34" charset="-122"/>
                 <a:cs typeface="Calibri" pitchFamily="34" charset="-120"/>
               </a:rPr>
-              <a:t>model cost per attempted case</a:t>
+              <a:t>real unsafe outcome (echoed typed card digits). 3 more flags: fixture artifact</a:t>
             </a:r>
             <a:endParaRPr lang="en-US" sz="1400" dirty="0"/>
           </a:p>
@@ -6753,8 +6828,8 @@
           <p:nvPr/>
         </p:nvGraphicFramePr>
         <p:xfrm>
-          <a:off x="457200" y="3520440"/>
-          <a:ext cx="5120640" cy="2697480"/>
+          <a:off x="457200" y="3474720"/>
+          <a:ext cx="6035040" cy="2788920"/>
         </p:xfrm>
         <a:graphic xmlns:a="http://schemas.openxmlformats.org/drawingml/2006/main">
           <a:graphicData uri="http://schemas.openxmlformats.org/drawingml/2006/chart">
@@ -6770,8 +6845,8 @@
         </p:nvSpPr>
         <p:spPr>
           <a:xfrm>
-            <a:off x="5943600" y="3611880"/>
-            <a:ext cx="5669280" cy="914400"/>
+            <a:off x="6858000" y="3566160"/>
+            <a:ext cx="4754880" cy="960120"/>
           </a:xfrm>
           <a:prstGeom prst="rect">
             <a:avLst/>
@@ -6795,7 +6870,7 @@
                 <a:ea typeface="Calibri" pitchFamily="34" charset="-122"/>
                 <a:cs typeface="Calibri" pitchFamily="34" charset="-120"/>
               </a:rPr>
-              <a:t>Rules follow policy as well as the agent. The agent adds language, conversation and coverage. Four defects found, fixed in the tool layer.</a:t>
+              <a:t>Rules tie on the core flow. The agent wins where rules cannot go. On an older set and version, rules led 91 to 80, with 0 of 96 unsafe.</a:t>
             </a:r>
             <a:endParaRPr lang="en-US" sz="1450" dirty="0"/>
           </a:p>
@@ -6809,8 +6884,8 @@
         </p:nvSpPr>
         <p:spPr>
           <a:xfrm>
-            <a:off x="5943600" y="4709160"/>
-            <a:ext cx="457200" cy="457200"/>
+            <a:off x="6858000" y="4617720"/>
+            <a:ext cx="402336" cy="402336"/>
           </a:xfrm>
           <a:prstGeom prst="ellipse">
             <a:avLst/>
@@ -6842,8 +6917,8 @@
         </p:blipFill>
         <p:spPr>
           <a:xfrm>
-            <a:off x="6062472" y="4828032"/>
-            <a:ext cx="219456" cy="219456"/>
+            <a:off x="6962607" y="4722327"/>
+            <a:ext cx="193121" cy="193121"/>
           </a:xfrm>
           <a:prstGeom prst="rect">
             <a:avLst/>
@@ -6858,8 +6933,8 @@
         </p:nvSpPr>
         <p:spPr>
           <a:xfrm>
-            <a:off x="6492240" y="4736592"/>
-            <a:ext cx="1325880" cy="457200"/>
+            <a:off x="7360920" y="4636008"/>
+            <a:ext cx="1874520" cy="384048"/>
           </a:xfrm>
           <a:prstGeom prst="rect">
             <a:avLst/>
@@ -6897,8 +6972,8 @@
         </p:nvSpPr>
         <p:spPr>
           <a:xfrm>
-            <a:off x="7863840" y="4709160"/>
-            <a:ext cx="457200" cy="457200"/>
+            <a:off x="9326880" y="4617720"/>
+            <a:ext cx="402336" cy="402336"/>
           </a:xfrm>
           <a:prstGeom prst="ellipse">
             <a:avLst/>
@@ -6930,8 +7005,8 @@
         </p:blipFill>
         <p:spPr>
           <a:xfrm>
-            <a:off x="7982712" y="4828032"/>
-            <a:ext cx="219456" cy="219456"/>
+            <a:off x="9431487" y="4722327"/>
+            <a:ext cx="193121" cy="193121"/>
           </a:xfrm>
           <a:prstGeom prst="rect">
             <a:avLst/>
@@ -6946,8 +7021,8 @@
         </p:nvSpPr>
         <p:spPr>
           <a:xfrm>
-            <a:off x="8412480" y="4736592"/>
-            <a:ext cx="1325880" cy="457200"/>
+            <a:off x="9829800" y="4636008"/>
+            <a:ext cx="1874520" cy="384048"/>
           </a:xfrm>
           <a:prstGeom prst="rect">
             <a:avLst/>
@@ -6985,8 +7060,8 @@
         </p:nvSpPr>
         <p:spPr>
           <a:xfrm>
-            <a:off x="9784080" y="4709160"/>
-            <a:ext cx="457200" cy="457200"/>
+            <a:off x="6858000" y="5166360"/>
+            <a:ext cx="402336" cy="402336"/>
           </a:xfrm>
           <a:prstGeom prst="ellipse">
             <a:avLst/>
@@ -7018,8 +7093,8 @@
         </p:blipFill>
         <p:spPr>
           <a:xfrm>
-            <a:off x="9902952" y="4828032"/>
-            <a:ext cx="219456" cy="219456"/>
+            <a:off x="6962607" y="5270967"/>
+            <a:ext cx="193121" cy="193121"/>
           </a:xfrm>
           <a:prstGeom prst="rect">
             <a:avLst/>
@@ -7034,8 +7109,8 @@
         </p:nvSpPr>
         <p:spPr>
           <a:xfrm>
-            <a:off x="10332720" y="4736592"/>
-            <a:ext cx="1325880" cy="457200"/>
+            <a:off x="7360920" y="5184648"/>
+            <a:ext cx="1874520" cy="384048"/>
           </a:xfrm>
           <a:prstGeom prst="rect">
             <a:avLst/>
@@ -7073,8 +7148,8 @@
         </p:nvSpPr>
         <p:spPr>
           <a:xfrm>
-            <a:off x="5943600" y="5458968"/>
-            <a:ext cx="457200" cy="457200"/>
+            <a:off x="9326880" y="5166360"/>
+            <a:ext cx="402336" cy="402336"/>
           </a:xfrm>
           <a:prstGeom prst="ellipse">
             <a:avLst/>
@@ -7106,8 +7181,8 @@
         </p:blipFill>
         <p:spPr>
           <a:xfrm>
-            <a:off x="6062472" y="5577840"/>
-            <a:ext cx="219456" cy="219456"/>
+            <a:off x="9431487" y="5270967"/>
+            <a:ext cx="193121" cy="193121"/>
           </a:xfrm>
           <a:prstGeom prst="rect">
             <a:avLst/>
@@ -7122,8 +7197,8 @@
         </p:nvSpPr>
         <p:spPr>
           <a:xfrm>
-            <a:off x="6492240" y="5486400"/>
-            <a:ext cx="1325880" cy="457200"/>
+            <a:off x="9829800" y="5184648"/>
+            <a:ext cx="1874520" cy="384048"/>
           </a:xfrm>
           <a:prstGeom prst="rect">
             <a:avLst/>
@@ -7161,8 +7236,8 @@
         </p:nvSpPr>
         <p:spPr>
           <a:xfrm>
-            <a:off x="7863840" y="5458968"/>
-            <a:ext cx="457200" cy="457200"/>
+            <a:off x="6858000" y="5715000"/>
+            <a:ext cx="402336" cy="402336"/>
           </a:xfrm>
           <a:prstGeom prst="ellipse">
             <a:avLst/>
@@ -7194,8 +7269,8 @@
         </p:blipFill>
         <p:spPr>
           <a:xfrm>
-            <a:off x="7982712" y="5577840"/>
-            <a:ext cx="219456" cy="219456"/>
+            <a:off x="6962607" y="5819607"/>
+            <a:ext cx="193121" cy="193121"/>
           </a:xfrm>
           <a:prstGeom prst="rect">
             <a:avLst/>
@@ -7210,8 +7285,8 @@
         </p:nvSpPr>
         <p:spPr>
           <a:xfrm>
-            <a:off x="8412480" y="5486400"/>
-            <a:ext cx="1325880" cy="457200"/>
+            <a:off x="7360920" y="5733288"/>
+            <a:ext cx="1874520" cy="384048"/>
           </a:xfrm>
           <a:prstGeom prst="rect">
             <a:avLst/>
@@ -7249,8 +7324,8 @@
         </p:nvSpPr>
         <p:spPr>
           <a:xfrm>
-            <a:off x="9784080" y="5458968"/>
-            <a:ext cx="457200" cy="457200"/>
+            <a:off x="9326880" y="5715000"/>
+            <a:ext cx="402336" cy="402336"/>
           </a:xfrm>
           <a:prstGeom prst="ellipse">
             <a:avLst/>
@@ -7282,8 +7357,8 @@
         </p:blipFill>
         <p:spPr>
           <a:xfrm>
-            <a:off x="9902952" y="5577840"/>
-            <a:ext cx="219456" cy="219456"/>
+            <a:off x="9431487" y="5819607"/>
+            <a:ext cx="193121" cy="193121"/>
           </a:xfrm>
           <a:prstGeom prst="rect">
             <a:avLst/>
@@ -7298,8 +7373,8 @@
         </p:nvSpPr>
         <p:spPr>
           <a:xfrm>
-            <a:off x="10332720" y="5486400"/>
-            <a:ext cx="1325880" cy="457200"/>
+            <a:off x="9829800" y="5733288"/>
+            <a:ext cx="1874520" cy="384048"/>
           </a:xfrm>
           <a:prstGeom prst="rect">
             <a:avLst/>

--- a/presidencia/entrega/LATAM_Bank_Factored_Hackathon_2026.pptx
+++ b/presidencia/entrega/LATAM_Bank_Factored_Hackathon_2026.pptx
@@ -124,7 +124,7 @@
           <a:lstStyle/>
           <a:p>
             <a:pPr>
-              <a:defRPr sz="1400" b="0" i="0" u="none" strike="noStrike">
+              <a:defRPr sz="1300" b="0" i="0" u="none" strike="noStrike">
                 <a:solidFill>
                   <a:srgbClr val="0B1F2A"/>
                 </a:solidFill>
@@ -132,13 +132,13 @@
               </a:defRPr>
             </a:pPr>
             <a:r>
-              <a:rPr sz="1400" b="0" i="0" u="none" strike="noStrike">
+              <a:rPr sz="1300" b="0" i="0" u="none" strike="noStrike">
                 <a:solidFill>
                   <a:srgbClr val="0B1F2A"/>
                 </a:solidFill>
                 <a:latin typeface="Calibri"/>
               </a:rPr>
-              <a:t>67,095 complaints by subcategory</a:t>
+              <a:t>Test runs passing every check (%), fresh held-out set</a:t>
             </a:r>
           </a:p>
         </c:rich>
@@ -150,7 +150,7 @@
     <c:plotArea>
       <c:layout/>
       <c:barChart>
-        <c:barDir val="bar"/>
+        <c:barDir val="col"/>
         <c:grouping val="clustered"/>
         <c:varyColors val="0"/>
         <c:ser>
@@ -162,7 +162,84 @@
               <c:strCache>
                 <c:ptCount val="1"/>
                 <c:pt idx="0">
-                  <c:v>Complaints</c:v>
+                  <c:v>LATAM Bank assistant</c:v>
+                </c:pt>
+              </c:strCache>
+            </c:strRef>
+          </c:tx>
+          <c:spPr>
+            <a:solidFill>
+              <a:srgbClr val="0B6E4F"/>
+            </a:solidFill>
+            <a:effectLst/>
+          </c:spPr>
+          <c:invertIfNegative val="0"/>
+          <c:dLbls>
+            <c:numFmt formatCode="#,##0" sourceLinked="0"/>
+            <c:txPr>
+              <a:bodyPr/>
+              <a:lstStyle/>
+              <a:p>
+                <a:pPr>
+                  <a:defRPr b="0" i="0" strike="noStrike" sz="1400" u="none">
+                    <a:solidFill>
+                      <a:srgbClr val="0B1F2A"/>
+                    </a:solidFill>
+                    <a:latin typeface="Calibri"/>
+                  </a:defRPr>
+                </a:pPr>
+              </a:p>
+            </c:txPr>
+            <c:showLegendKey val="0"/>
+            <c:showVal val="1"/>
+            <c:showCatName val="0"/>
+            <c:showSerName val="0"/>
+            <c:showPercent val="0"/>
+            <c:showBubbleSize val="0"/>
+            <c:showLeaderLines val="0"/>
+          </c:dLbls>
+          <c:cat>
+            <c:multiLvlStrRef>
+              <c:f>Sheet1!$A$2:$A$3</c:f>
+              <c:multiLvlStrCache>
+                <c:ptCount val="2"/>
+                <c:lvl>
+                  <c:pt idx="0">
+                    <c:v>Dispute flow</c:v>
+                  </c:pt>
+                  <c:pt idx="1">
+                    <c:v>Policy, follow-up, multi-request</c:v>
+                  </c:pt>
+                </c:lvl>
+              </c:multiLvlStrCache>
+            </c:multiLvlStrRef>
+          </c:cat>
+          <c:val>
+            <c:numRef>
+              <c:f>Sheet1!$B$2:$B$3</c:f>
+              <c:numCache>
+                <c:formatCode>General</c:formatCode>
+                <c:ptCount val="2"/>
+                <c:pt idx="0">
+                  <c:v>92</c:v>
+                </c:pt>
+                <c:pt idx="1">
+                  <c:v>82</c:v>
+                </c:pt>
+              </c:numCache>
+            </c:numRef>
+          </c:val>
+        </c:ser>
+        <c:ser>
+          <c:idx val="1"/>
+          <c:order val="1"/>
+          <c:tx>
+            <c:strRef>
+              <c:f>Sheet1!$C$1</c:f>
+              <c:strCache>
+                <c:ptCount val="1"/>
+                <c:pt idx="0">
+                  <c:v>Rules engine</c:v>
                 </c:pt>
               </c:strCache>
             </c:strRef>
@@ -181,320 +258,7 @@
               <a:lstStyle/>
               <a:p>
                 <a:pPr>
-                  <a:defRPr b="0" i="0" strike="noStrike" sz="1200" u="none">
-                    <a:solidFill>
-                      <a:srgbClr val="0B1F2A"/>
-                    </a:solidFill>
-                    <a:latin typeface="Calibri"/>
-                  </a:defRPr>
-                </a:pPr>
-              </a:p>
-            </c:txPr>
-            <c:showLegendKey val="0"/>
-            <c:showVal val="1"/>
-            <c:showCatName val="0"/>
-            <c:showSerName val="0"/>
-            <c:showPercent val="0"/>
-            <c:showBubbleSize val="0"/>
-            <c:showLeaderLines val="0"/>
-          </c:dLbls>
-          <c:dPt>
-            <c:idx val="0"/>
-            <c:invertIfNegative val="0"/>
-            <c:bubble3D val="0"/>
-            <c:spPr>
-              <a:solidFill>
-                <a:srgbClr val="C9D3D0"/>
-              </a:solidFill>
-              <a:effectLst/>
-            </c:spPr>
-          </c:dPt>
-          <c:dPt>
-            <c:idx val="1"/>
-            <c:invertIfNegative val="0"/>
-            <c:bubble3D val="0"/>
-            <c:spPr>
-              <a:solidFill>
-                <a:srgbClr val="C9D3D0"/>
-              </a:solidFill>
-              <a:effectLst/>
-            </c:spPr>
-          </c:dPt>
-          <c:dPt>
-            <c:idx val="2"/>
-            <c:invertIfNegative val="0"/>
-            <c:bubble3D val="0"/>
-            <c:spPr>
-              <a:solidFill>
-                <a:srgbClr val="C9D3D0"/>
-              </a:solidFill>
-              <a:effectLst/>
-            </c:spPr>
-          </c:dPt>
-          <c:dPt>
-            <c:idx val="3"/>
-            <c:invertIfNegative val="0"/>
-            <c:bubble3D val="0"/>
-            <c:spPr>
-              <a:solidFill>
-                <a:srgbClr val="C9D3D0"/>
-              </a:solidFill>
-              <a:effectLst/>
-            </c:spPr>
-          </c:dPt>
-          <c:dPt>
-            <c:idx val="4"/>
-            <c:invertIfNegative val="0"/>
-            <c:bubble3D val="0"/>
-            <c:spPr>
-              <a:solidFill>
-                <a:srgbClr val="C9D3D0"/>
-              </a:solidFill>
-              <a:effectLst/>
-            </c:spPr>
-          </c:dPt>
-          <c:dPt>
-            <c:idx val="5"/>
-            <c:invertIfNegative val="0"/>
-            <c:bubble3D val="0"/>
-            <c:spPr>
-              <a:solidFill>
-                <a:srgbClr val="0B6E4F"/>
-              </a:solidFill>
-              <a:effectLst/>
-            </c:spPr>
-          </c:dPt>
-          <c:cat>
-            <c:multiLvlStrRef>
-              <c:f>Sheet1!$A$2:$A$7</c:f>
-              <c:multiLvlStrCache>
-                <c:ptCount val="6"/>
-                <c:lvl>
-                  <c:pt idx="0">
-                    <c:v>No subcategory</c:v>
-                  </c:pt>
-                  <c:pt idx="1">
-                    <c:v>Service quality</c:v>
-                  </c:pt>
-                  <c:pt idx="2">
-                    <c:v>Branch service</c:v>
-                  </c:pt>
-                  <c:pt idx="3">
-                    <c:v>App problem</c:v>
-                  </c:pt>
-                  <c:pt idx="4">
-                    <c:v>Wrong charge</c:v>
-                  </c:pt>
-                  <c:pt idx="5">
-                    <c:v>Unrecognized charge</c:v>
-                  </c:pt>
-                </c:lvl>
-              </c:multiLvlStrCache>
-            </c:multiLvlStrRef>
-          </c:cat>
-          <c:val>
-            <c:numRef>
-              <c:f>Sheet1!$B$2:$B$7</c:f>
-              <c:numCache>
-                <c:formatCode>General</c:formatCode>
-                <c:ptCount val="6"/>
-                <c:pt idx="0">
-                  <c:v>6698</c:v>
-                </c:pt>
-                <c:pt idx="1">
-                  <c:v>11886</c:v>
-                </c:pt>
-                <c:pt idx="2">
-                  <c:v>11892</c:v>
-                </c:pt>
-                <c:pt idx="3">
-                  <c:v>12128</c:v>
-                </c:pt>
-                <c:pt idx="4">
-                  <c:v>12194</c:v>
-                </c:pt>
-                <c:pt idx="5">
-                  <c:v>12297</c:v>
-                </c:pt>
-              </c:numCache>
-            </c:numRef>
-          </c:val>
-        </c:ser>
-        <c:dLbls>
-          <c:numFmt formatCode="#,##0" sourceLinked="0"/>
-          <c:txPr>
-            <a:bodyPr/>
-            <a:lstStyle/>
-            <a:p>
-              <a:pPr>
-                <a:defRPr b="0" i="0" strike="noStrike" sz="1200" u="none">
-                  <a:solidFill>
-                    <a:srgbClr val="0B1F2A"/>
-                  </a:solidFill>
-                  <a:latin typeface="Calibri"/>
-                </a:defRPr>
-              </a:pPr>
-            </a:p>
-          </c:txPr>
-          <c:showLegendKey val="0"/>
-          <c:showVal val="1"/>
-          <c:showCatName val="0"/>
-          <c:showSerName val="0"/>
-          <c:showPercent val="0"/>
-          <c:showBubbleSize val="0"/>
-          <c:showLeaderLines val="0"/>
-        </c:dLbls>
-        <c:gapWidth val="45"/>
-        <c:overlap val="0"/>
-        <c:axId val="2094734554"/>
-        <c:axId val="2094734552"/>
-        <c:axId val="2094734556"/>
-      </c:barChart>
-      <c:catAx>
-        <c:axId val="2094734554"/>
-        <c:scaling>
-          <c:orientation val="minMax"/>
-        </c:scaling>
-        <c:delete val="0"/>
-        <c:axPos val="l"/>
-        <c:numFmt formatCode="General" sourceLinked="1"/>
-        <c:majorTickMark val="out"/>
-        <c:minorTickMark val="none"/>
-        <c:tickLblPos val="nextTo"/>
-        <c:spPr>
-          <a:ln w="12700" cap="flat">
-            <a:solidFill>
-              <a:srgbClr val="888888"/>
-            </a:solidFill>
-            <a:prstDash val="solid"/>
-            <a:round/>
-          </a:ln>
-        </c:spPr>
-        <c:txPr>
-          <a:bodyPr/>
-          <a:lstStyle/>
-          <a:p>
-            <a:pPr>
-              <a:defRPr sz="1300" b="0" i="0" u="none" strike="noStrike">
-                <a:solidFill>
-                  <a:srgbClr val="0B1F2A"/>
-                </a:solidFill>
-                <a:latin typeface="Calibri"/>
-              </a:defRPr>
-            </a:pPr>
-            <a:endParaRPr lang="en-US"/>
-          </a:p>
-        </c:txPr>
-        <c:crossAx val="2094734552"/>
-        <c:crosses val="autoZero"/>
-        <c:auto val="1"/>
-        <c:lblAlgn val="ctr"/>
-        <c:noMultiLvlLbl val="1"/>
-      </c:catAx>
-      <c:valAx>
-        <c:axId val="2094734552"/>
-        <c:scaling>
-          <c:orientation val="minMax"/>
-        </c:scaling>
-        <c:delete val="1"/>
-        <c:axPos val="b"/>
-        <c:numFmt formatCode="General" sourceLinked="0"/>
-        <c:majorTickMark val="out"/>
-        <c:minorTickMark val="none"/>
-        <c:tickLblPos val="low"/>
-        <c:spPr>
-          <a:ln w="12700" cap="flat">
-            <a:solidFill>
-              <a:srgbClr val="888888"/>
-            </a:solidFill>
-            <a:prstDash val="solid"/>
-            <a:round/>
-          </a:ln>
-        </c:spPr>
-        <c:txPr>
-          <a:bodyPr/>
-          <a:lstStyle/>
-          <a:p>
-            <a:pPr>
-              <a:defRPr sz="1200" b="0" i="0" u="none" strike="noStrike">
-                <a:solidFill>
-                  <a:srgbClr val="000000"/>
-                </a:solidFill>
-                <a:latin typeface="Arial"/>
-              </a:defRPr>
-            </a:pPr>
-            <a:endParaRPr lang="en-US"/>
-          </a:p>
-        </c:txPr>
-        <c:crossAx val="2094734554"/>
-        <c:crosses val="autoZero"/>
-        <c:crossBetween val="between"/>
-      </c:valAx>
-      <c:spPr>
-        <a:noFill/>
-        <a:ln>
-          <a:noFill/>
-        </a:ln>
-        <a:effectLst/>
-      </c:spPr>
-    </c:plotArea>
-    <c:plotVisOnly val="1"/>
-    <c:dispBlanksAs val="span"/>
-  </c:chart>
-  <c:spPr>
-    <a:noFill/>
-    <a:ln>
-      <a:noFill/>
-    </a:ln>
-    <a:effectLst/>
-  </c:spPr>
-  <c:externalData r:id="rId1">
-    <c:autoUpdate val="0"/>
-  </c:externalData>
-</c:chartSpace>
-</file>
-
-<file path=ppt/charts/chart2.xml><?xml version="1.0" encoding="utf-8"?>
-<c:chartSpace xmlns:c="http://schemas.openxmlformats.org/drawingml/2006/chart" xmlns:a="http://schemas.openxmlformats.org/drawingml/2006/main" xmlns:r="http://schemas.openxmlformats.org/officeDocument/2006/relationships">
-  <c:date1904 val="0"/>
-  <c:roundedCorners val="1"/>
-  <c:chart>
-    <c:autoTitleDeleted val="1"/>
-    <c:plotArea>
-      <c:layout/>
-      <c:barChart>
-        <c:barDir val="col"/>
-        <c:grouping val="clustered"/>
-        <c:varyColors val="0"/>
-        <c:ser>
-          <c:idx val="0"/>
-          <c:order val="0"/>
-          <c:tx>
-            <c:strRef>
-              <c:f>Sheet1!$B$1</c:f>
-              <c:strCache>
-                <c:ptCount val="1"/>
-                <c:pt idx="0">
-                  <c:v>Learned component</c:v>
-                </c:pt>
-              </c:strCache>
-            </c:strRef>
-          </c:tx>
-          <c:spPr>
-            <a:solidFill>
-              <a:srgbClr val="0B6E4F"/>
-            </a:solidFill>
-            <a:effectLst/>
-          </c:spPr>
-          <c:invertIfNegative val="0"/>
-          <c:dLbls>
-            <c:numFmt formatCode="0.00" sourceLinked="0"/>
-            <c:txPr>
-              <a:bodyPr/>
-              <a:lstStyle/>
-              <a:p>
-                <a:pPr>
-                  <a:defRPr b="0" i="0" strike="noStrike" sz="1300" u="none">
+                  <a:defRPr b="0" i="0" strike="noStrike" sz="1400" u="none">
                     <a:solidFill>
                       <a:srgbClr val="0B1F2A"/>
                     </a:solidFill>
@@ -513,18 +277,15 @@
           </c:dLbls>
           <c:cat>
             <c:multiLvlStrRef>
-              <c:f>Sheet1!$A$2:$A$4</c:f>
+              <c:f>Sheet1!$A$2:$A$3</c:f>
               <c:multiLvlStrCache>
-                <c:ptCount val="3"/>
+                <c:ptCount val="2"/>
                 <c:lvl>
                   <c:pt idx="0">
-                    <c:v>Policy retrieval (accuracy)</c:v>
+                    <c:v>Dispute flow</c:v>
                   </c:pt>
                   <c:pt idx="1">
-                    <c:v>Contact reason (macro-F1)</c:v>
-                  </c:pt>
-                  <c:pt idx="2">
-                    <c:v>SLA risk (AUC)</c:v>
+                    <c:v>Policy, follow-up, multi-request</c:v>
                   </c:pt>
                 </c:lvl>
               </c:multiLvlStrCache>
@@ -532,114 +293,28 @@
           </c:cat>
           <c:val>
             <c:numRef>
-              <c:f>Sheet1!$B$2:$B$4</c:f>
+              <c:f>Sheet1!$C$2:$C$3</c:f>
               <c:numCache>
                 <c:formatCode>General</c:formatCode>
-                <c:ptCount val="3"/>
+                <c:ptCount val="2"/>
                 <c:pt idx="0">
-                  <c:v>0.9</c:v>
+                  <c:v>87</c:v>
                 </c:pt>
                 <c:pt idx="1">
-                  <c:v>0.4</c:v>
-                </c:pt>
-                <c:pt idx="2">
-                  <c:v>0.5</c:v>
-                </c:pt>
-              </c:numCache>
-            </c:numRef>
-          </c:val>
-        </c:ser>
-        <c:ser>
-          <c:idx val="1"/>
-          <c:order val="1"/>
-          <c:tx>
-            <c:strRef>
-              <c:f>Sheet1!$C$1</c:f>
-              <c:strCache>
-                <c:ptCount val="1"/>
-                <c:pt idx="0">
-                  <c:v>Baseline</c:v>
-                </c:pt>
-              </c:strCache>
-            </c:strRef>
-          </c:tx>
-          <c:spPr>
-            <a:solidFill>
-              <a:srgbClr val="C9D3D0"/>
-            </a:solidFill>
-            <a:effectLst/>
-          </c:spPr>
-          <c:invertIfNegative val="0"/>
-          <c:dLbls>
-            <c:numFmt formatCode="0.00" sourceLinked="0"/>
-            <c:txPr>
-              <a:bodyPr/>
-              <a:lstStyle/>
-              <a:p>
-                <a:pPr>
-                  <a:defRPr b="0" i="0" strike="noStrike" sz="1300" u="none">
-                    <a:solidFill>
-                      <a:srgbClr val="0B1F2A"/>
-                    </a:solidFill>
-                    <a:latin typeface="Calibri"/>
-                  </a:defRPr>
-                </a:pPr>
-              </a:p>
-            </c:txPr>
-            <c:showLegendKey val="0"/>
-            <c:showVal val="1"/>
-            <c:showCatName val="0"/>
-            <c:showSerName val="0"/>
-            <c:showPercent val="0"/>
-            <c:showBubbleSize val="0"/>
-            <c:showLeaderLines val="0"/>
-          </c:dLbls>
-          <c:cat>
-            <c:multiLvlStrRef>
-              <c:f>Sheet1!$A$2:$A$4</c:f>
-              <c:multiLvlStrCache>
-                <c:ptCount val="3"/>
-                <c:lvl>
-                  <c:pt idx="0">
-                    <c:v>Policy retrieval (accuracy)</c:v>
-                  </c:pt>
-                  <c:pt idx="1">
-                    <c:v>Contact reason (macro-F1)</c:v>
-                  </c:pt>
-                  <c:pt idx="2">
-                    <c:v>SLA risk (AUC)</c:v>
-                  </c:pt>
-                </c:lvl>
-              </c:multiLvlStrCache>
-            </c:multiLvlStrRef>
-          </c:cat>
-          <c:val>
-            <c:numRef>
-              <c:f>Sheet1!$C$2:$C$4</c:f>
-              <c:numCache>
-                <c:formatCode>General</c:formatCode>
-                <c:ptCount val="3"/>
-                <c:pt idx="0">
-                  <c:v>0.52</c:v>
-                </c:pt>
-                <c:pt idx="1">
-                  <c:v>0.34</c:v>
-                </c:pt>
-                <c:pt idx="2">
-                  <c:v>0.5</c:v>
+                  <c:v>38</c:v>
                 </c:pt>
               </c:numCache>
             </c:numRef>
           </c:val>
         </c:ser>
         <c:dLbls>
-          <c:numFmt formatCode="0.00" sourceLinked="0"/>
+          <c:numFmt formatCode="#,##0" sourceLinked="0"/>
           <c:txPr>
             <a:bodyPr/>
             <a:lstStyle/>
             <a:p>
               <a:pPr>
-                <a:defRPr b="0" i="0" strike="noStrike" sz="1300" u="none">
+                <a:defRPr b="0" i="0" strike="noStrike" sz="1400" u="none">
                   <a:solidFill>
                     <a:srgbClr val="0B1F2A"/>
                   </a:solidFill>
@@ -707,356 +382,6 @@
         <c:axId val="2094734552"/>
         <c:scaling>
           <c:orientation val="minMax"/>
-          <c:max val="1"/>
-        </c:scaling>
-        <c:delete val="1"/>
-        <c:axPos val="l"/>
-        <c:numFmt formatCode="General" sourceLinked="0"/>
-        <c:majorTickMark val="out"/>
-        <c:minorTickMark val="none"/>
-        <c:tickLblPos val="nextTo"/>
-        <c:spPr>
-          <a:ln w="12700" cap="flat">
-            <a:solidFill>
-              <a:srgbClr val="888888"/>
-            </a:solidFill>
-            <a:prstDash val="solid"/>
-            <a:round/>
-          </a:ln>
-        </c:spPr>
-        <c:txPr>
-          <a:bodyPr/>
-          <a:lstStyle/>
-          <a:p>
-            <a:pPr>
-              <a:defRPr sz="1200" b="0" i="0" u="none" strike="noStrike">
-                <a:solidFill>
-                  <a:srgbClr val="000000"/>
-                </a:solidFill>
-                <a:latin typeface="Arial"/>
-              </a:defRPr>
-            </a:pPr>
-            <a:endParaRPr lang="en-US"/>
-          </a:p>
-        </c:txPr>
-        <c:crossAx val="2094734554"/>
-        <c:crosses val="autoZero"/>
-        <c:crossBetween val="between"/>
-      </c:valAx>
-      <c:spPr>
-        <a:noFill/>
-        <a:ln>
-          <a:noFill/>
-        </a:ln>
-        <a:effectLst/>
-      </c:spPr>
-    </c:plotArea>
-    <c:legend>
-      <c:legendPos val="t"/>
-      <c:overlay val="0"/>
-      <c:txPr>
-        <a:bodyPr/>
-        <a:lstStyle/>
-        <a:p>
-          <a:pPr>
-            <a:defRPr sz="1300">
-              <a:solidFill>
-                <a:srgbClr val="0B1F2A"/>
-              </a:solidFill>
-              <a:latin typeface="Calibri"/>
-              <a:cs typeface="Calibri"/>
-            </a:defRPr>
-          </a:pPr>
-          <a:endParaRPr lang="en-US"/>
-        </a:p>
-      </c:txPr>
-    </c:legend>
-    <c:plotVisOnly val="1"/>
-    <c:dispBlanksAs val="span"/>
-  </c:chart>
-  <c:spPr>
-    <a:noFill/>
-    <a:ln>
-      <a:noFill/>
-    </a:ln>
-    <a:effectLst/>
-  </c:spPr>
-  <c:externalData r:id="rId1">
-    <c:autoUpdate val="0"/>
-  </c:externalData>
-</c:chartSpace>
-</file>
-
-<file path=ppt/charts/chart3.xml><?xml version="1.0" encoding="utf-8"?>
-<c:chartSpace xmlns:c="http://schemas.openxmlformats.org/drawingml/2006/chart" xmlns:a="http://schemas.openxmlformats.org/drawingml/2006/main" xmlns:r="http://schemas.openxmlformats.org/officeDocument/2006/relationships">
-  <c:date1904 val="0"/>
-  <c:roundedCorners val="1"/>
-  <c:chart>
-    <c:title>
-      <c:tx>
-        <c:rich>
-          <a:bodyPr/>
-          <a:lstStyle/>
-          <a:p>
-            <a:pPr>
-              <a:defRPr sz="1300" b="0" i="0" u="none" strike="noStrike">
-                <a:solidFill>
-                  <a:srgbClr val="0B1F2A"/>
-                </a:solidFill>
-                <a:latin typeface="Calibri"/>
-              </a:defRPr>
-            </a:pPr>
-            <a:r>
-              <a:rPr sz="1300" b="0" i="0" u="none" strike="noStrike">
-                <a:solidFill>
-                  <a:srgbClr val="0B1F2A"/>
-                </a:solidFill>
-                <a:latin typeface="Calibri"/>
-              </a:rPr>
-              <a:t>Runs passing every check (%)</a:t>
-            </a:r>
-          </a:p>
-        </c:rich>
-      </c:tx>
-      <c:layout/>
-      <c:overlay val="0"/>
-    </c:title>
-    <c:autoTitleDeleted val="0"/>
-    <c:plotArea>
-      <c:layout/>
-      <c:barChart>
-        <c:barDir val="col"/>
-        <c:grouping val="clustered"/>
-        <c:varyColors val="0"/>
-        <c:ser>
-          <c:idx val="0"/>
-          <c:order val="0"/>
-          <c:tx>
-            <c:strRef>
-              <c:f>Sheet1!$B$1</c:f>
-              <c:strCache>
-                <c:ptCount val="1"/>
-                <c:pt idx="0">
-                  <c:v>AI agent</c:v>
-                </c:pt>
-              </c:strCache>
-            </c:strRef>
-          </c:tx>
-          <c:spPr>
-            <a:solidFill>
-              <a:srgbClr val="0B6E4F"/>
-            </a:solidFill>
-            <a:effectLst/>
-          </c:spPr>
-          <c:invertIfNegative val="0"/>
-          <c:dLbls>
-            <c:numFmt formatCode="#,##0" sourceLinked="0"/>
-            <c:txPr>
-              <a:bodyPr/>
-              <a:lstStyle/>
-              <a:p>
-                <a:pPr>
-                  <a:defRPr b="0" i="0" strike="noStrike" sz="1300" u="none">
-                    <a:solidFill>
-                      <a:srgbClr val="0B1F2A"/>
-                    </a:solidFill>
-                    <a:latin typeface="Calibri"/>
-                  </a:defRPr>
-                </a:pPr>
-              </a:p>
-            </c:txPr>
-            <c:showLegendKey val="0"/>
-            <c:showVal val="1"/>
-            <c:showCatName val="0"/>
-            <c:showSerName val="0"/>
-            <c:showPercent val="0"/>
-            <c:showBubbleSize val="0"/>
-            <c:showLeaderLines val="0"/>
-          </c:dLbls>
-          <c:cat>
-            <c:multiLvlStrRef>
-              <c:f>Sheet1!$A$2:$A$3</c:f>
-              <c:multiLvlStrCache>
-                <c:ptCount val="2"/>
-                <c:lvl>
-                  <c:pt idx="0">
-                    <c:v>Dispute flow (30 cases)</c:v>
-                  </c:pt>
-                  <c:pt idx="1">
-                    <c:v>Policy, follow-up, multi-request (13)</c:v>
-                  </c:pt>
-                </c:lvl>
-              </c:multiLvlStrCache>
-            </c:multiLvlStrRef>
-          </c:cat>
-          <c:val>
-            <c:numRef>
-              <c:f>Sheet1!$B$2:$B$3</c:f>
-              <c:numCache>
-                <c:formatCode>General</c:formatCode>
-                <c:ptCount val="2"/>
-                <c:pt idx="0">
-                  <c:v>92</c:v>
-                </c:pt>
-                <c:pt idx="1">
-                  <c:v>82</c:v>
-                </c:pt>
-              </c:numCache>
-            </c:numRef>
-          </c:val>
-        </c:ser>
-        <c:ser>
-          <c:idx val="1"/>
-          <c:order val="1"/>
-          <c:tx>
-            <c:strRef>
-              <c:f>Sheet1!$C$1</c:f>
-              <c:strCache>
-                <c:ptCount val="1"/>
-                <c:pt idx="0">
-                  <c:v>Rules baseline</c:v>
-                </c:pt>
-              </c:strCache>
-            </c:strRef>
-          </c:tx>
-          <c:spPr>
-            <a:solidFill>
-              <a:srgbClr val="C9D3D0"/>
-            </a:solidFill>
-            <a:effectLst/>
-          </c:spPr>
-          <c:invertIfNegative val="0"/>
-          <c:dLbls>
-            <c:numFmt formatCode="#,##0" sourceLinked="0"/>
-            <c:txPr>
-              <a:bodyPr/>
-              <a:lstStyle/>
-              <a:p>
-                <a:pPr>
-                  <a:defRPr b="0" i="0" strike="noStrike" sz="1300" u="none">
-                    <a:solidFill>
-                      <a:srgbClr val="0B1F2A"/>
-                    </a:solidFill>
-                    <a:latin typeface="Calibri"/>
-                  </a:defRPr>
-                </a:pPr>
-              </a:p>
-            </c:txPr>
-            <c:showLegendKey val="0"/>
-            <c:showVal val="1"/>
-            <c:showCatName val="0"/>
-            <c:showSerName val="0"/>
-            <c:showPercent val="0"/>
-            <c:showBubbleSize val="0"/>
-            <c:showLeaderLines val="0"/>
-          </c:dLbls>
-          <c:cat>
-            <c:multiLvlStrRef>
-              <c:f>Sheet1!$A$2:$A$3</c:f>
-              <c:multiLvlStrCache>
-                <c:ptCount val="2"/>
-                <c:lvl>
-                  <c:pt idx="0">
-                    <c:v>Dispute flow (30 cases)</c:v>
-                  </c:pt>
-                  <c:pt idx="1">
-                    <c:v>Policy, follow-up, multi-request (13)</c:v>
-                  </c:pt>
-                </c:lvl>
-              </c:multiLvlStrCache>
-            </c:multiLvlStrRef>
-          </c:cat>
-          <c:val>
-            <c:numRef>
-              <c:f>Sheet1!$C$2:$C$3</c:f>
-              <c:numCache>
-                <c:formatCode>General</c:formatCode>
-                <c:ptCount val="2"/>
-                <c:pt idx="0">
-                  <c:v>87</c:v>
-                </c:pt>
-                <c:pt idx="1">
-                  <c:v>38</c:v>
-                </c:pt>
-              </c:numCache>
-            </c:numRef>
-          </c:val>
-        </c:ser>
-        <c:dLbls>
-          <c:numFmt formatCode="#,##0" sourceLinked="0"/>
-          <c:txPr>
-            <a:bodyPr/>
-            <a:lstStyle/>
-            <a:p>
-              <a:pPr>
-                <a:defRPr b="0" i="0" strike="noStrike" sz="1300" u="none">
-                  <a:solidFill>
-                    <a:srgbClr val="0B1F2A"/>
-                  </a:solidFill>
-                  <a:latin typeface="Calibri"/>
-                </a:defRPr>
-              </a:pPr>
-            </a:p>
-          </c:txPr>
-          <c:showLegendKey val="0"/>
-          <c:showVal val="1"/>
-          <c:showCatName val="0"/>
-          <c:showSerName val="0"/>
-          <c:showPercent val="0"/>
-          <c:showBubbleSize val="0"/>
-          <c:showLeaderLines val="0"/>
-        </c:dLbls>
-        <c:gapWidth val="60"/>
-        <c:overlap val="0"/>
-        <c:axId val="2094734554"/>
-        <c:axId val="2094734552"/>
-        <c:axId val="2094734556"/>
-      </c:barChart>
-      <c:catAx>
-        <c:axId val="2094734554"/>
-        <c:scaling>
-          <c:orientation val="minMax"/>
-        </c:scaling>
-        <c:delete val="0"/>
-        <c:axPos val="b"/>
-        <c:numFmt formatCode="General" sourceLinked="1"/>
-        <c:majorTickMark val="out"/>
-        <c:minorTickMark val="none"/>
-        <c:tickLblPos val="low"/>
-        <c:spPr>
-          <a:ln w="12700" cap="flat">
-            <a:solidFill>
-              <a:srgbClr val="888888"/>
-            </a:solidFill>
-            <a:prstDash val="solid"/>
-            <a:round/>
-          </a:ln>
-        </c:spPr>
-        <c:txPr>
-          <a:bodyPr/>
-          <a:lstStyle/>
-          <a:p>
-            <a:pPr>
-              <a:defRPr sz="1200" b="0" i="0" u="none" strike="noStrike">
-                <a:solidFill>
-                  <a:srgbClr val="0B1F2A"/>
-                </a:solidFill>
-                <a:latin typeface="Calibri"/>
-              </a:defRPr>
-            </a:pPr>
-            <a:endParaRPr lang="en-US"/>
-          </a:p>
-        </c:txPr>
-        <c:crossAx val="2094734552"/>
-        <c:crosses val="autoZero"/>
-        <c:auto val="1"/>
-        <c:lblAlgn val="ctr"/>
-        <c:noMultiLvlLbl val="1"/>
-      </c:catAx>
-      <c:valAx>
-        <c:axId val="2094734552"/>
-        <c:scaling>
-          <c:orientation val="minMax"/>
           <c:max val="110"/>
         </c:scaling>
         <c:delete val="1"/>
@@ -1109,7 +434,7 @@
         <a:lstStyle/>
         <a:p>
           <a:pPr>
-            <a:defRPr sz="1200">
+            <a:defRPr sz="1300">
               <a:solidFill>
                 <a:srgbClr val="0B1F2A"/>
               </a:solidFill>
@@ -2353,8 +1678,8 @@
         </p:nvSpPr>
         <p:spPr>
           <a:xfrm>
-            <a:off x="640080" y="1234440"/>
-            <a:ext cx="6035040" cy="1005840"/>
+            <a:off x="640080" y="1371600"/>
+            <a:ext cx="6126480" cy="731520"/>
           </a:xfrm>
           <a:prstGeom prst="rect">
             <a:avLst/>
@@ -2370,7 +1695,7 @@
               <a:buNone/>
             </a:pPr>
             <a:r>
-              <a:rPr lang="en-US" sz="6000" b="1" dirty="0">
+              <a:rPr lang="en-US" sz="3800" dirty="0">
                 <a:solidFill>
                   <a:srgbClr val="FFFFFF"/>
                 </a:solidFill>
@@ -2378,9 +1703,9 @@
                 <a:ea typeface="Calibri" pitchFamily="34" charset="-122"/>
                 <a:cs typeface="Calibri" pitchFamily="34" charset="-120"/>
               </a:rPr>
-              <a:t>LATAM Bank</a:t>
-            </a:r>
-            <a:endParaRPr lang="en-US" sz="6000" dirty="0"/>
+              <a:t>We didn't build a chatbot.</a:t>
+            </a:r>
+            <a:endParaRPr lang="en-US" sz="3800" dirty="0"/>
           </a:p>
         </p:txBody>
       </p:sp>
@@ -2392,8 +1717,8 @@
         </p:nvSpPr>
         <p:spPr>
           <a:xfrm>
-            <a:off x="640080" y="2331720"/>
-            <a:ext cx="5852160" cy="914400"/>
+            <a:off x="640080" y="2103120"/>
+            <a:ext cx="6126480" cy="1097280"/>
           </a:xfrm>
           <a:prstGeom prst="rect">
             <a:avLst/>
@@ -2409,7 +1734,46 @@
               <a:buNone/>
             </a:pPr>
             <a:r>
-              <a:rPr lang="en-US" sz="2600" dirty="0">
+              <a:rPr lang="en-US" sz="6400" b="1" dirty="0">
+                <a:solidFill>
+                  <a:srgbClr val="9FE0C4"/>
+                </a:solidFill>
+                <a:latin typeface="Calibri" pitchFamily="34" charset="0"/>
+                <a:ea typeface="Calibri" pitchFamily="34" charset="-122"/>
+                <a:cs typeface="Calibri" pitchFamily="34" charset="-120"/>
+              </a:rPr>
+              <a:t>We built a bank.</a:t>
+            </a:r>
+            <a:endParaRPr lang="en-US" sz="6400" dirty="0"/>
+          </a:p>
+        </p:txBody>
+      </p:sp>
+      <p:sp>
+        <p:nvSpPr>
+          <p:cNvPr id="4" name="Text 2"/>
+          <p:cNvSpPr txBox="1"/>
+          <p:nvPr/>
+        </p:nvSpPr>
+        <p:spPr>
+          <a:xfrm>
+            <a:off x="640080" y="3611880"/>
+            <a:ext cx="5760720" cy="822960"/>
+          </a:xfrm>
+          <a:prstGeom prst="rect">
+            <a:avLst/>
+          </a:prstGeom>
+          <a:noFill/>
+          <a:ln/>
+        </p:spPr>
+        <p:txBody>
+          <a:bodyPr wrap="square" lIns="0" tIns="0" rIns="0" bIns="0" rtlCol="0" anchor="t"/>
+          <a:lstStyle/>
+          <a:p>
+            <a:pPr indent="0" marL="0">
+              <a:buNone/>
+            </a:pPr>
+            <a:r>
+              <a:rPr lang="en-US" sz="2200" dirty="0">
                 <a:solidFill>
                   <a:srgbClr val="FFFFFF"/>
                 </a:solidFill>
@@ -2417,48 +1781,9 @@
                 <a:ea typeface="Calibri" pitchFamily="34" charset="-122"/>
                 <a:cs typeface="Calibri" pitchFamily="34" charset="-120"/>
               </a:rPr>
-              <a:t>AI-first intake of unrecognized card charges</a:t>
-            </a:r>
-            <a:endParaRPr lang="en-US" sz="2600" dirty="0"/>
-          </a:p>
-        </p:txBody>
-      </p:sp>
-      <p:sp>
-        <p:nvSpPr>
-          <p:cNvPr id="4" name="Text 2"/>
-          <p:cNvSpPr txBox="1"/>
-          <p:nvPr/>
-        </p:nvSpPr>
-        <p:spPr>
-          <a:xfrm>
-            <a:off x="640080" y="3520440"/>
-            <a:ext cx="5852160" cy="457200"/>
-          </a:xfrm>
-          <a:prstGeom prst="rect">
-            <a:avLst/>
-          </a:prstGeom>
-          <a:noFill/>
-          <a:ln/>
-        </p:spPr>
-        <p:txBody>
-          <a:bodyPr wrap="square" lIns="0" tIns="0" rIns="0" bIns="0" rtlCol="0" anchor="t"/>
-          <a:lstStyle/>
-          <a:p>
-            <a:pPr indent="0" marL="0">
-              <a:buNone/>
-            </a:pPr>
-            <a:r>
-              <a:rPr lang="en-US" sz="1900" i="1" dirty="0">
-                <a:solidFill>
-                  <a:srgbClr val="9FE0C4"/>
-                </a:solidFill>
-                <a:latin typeface="Calibri" pitchFamily="34" charset="0"/>
-                <a:ea typeface="Calibri" pitchFamily="34" charset="-122"/>
-                <a:cs typeface="Calibri" pitchFamily="34" charset="-120"/>
-              </a:rPr>
-              <a:t>The model understands and writes. Code decides.</a:t>
-            </a:r>
-            <a:endParaRPr lang="en-US" sz="1900" dirty="0"/>
+              <a:t>LATAM Bank keeps its word to every customer, by design.</a:t>
+            </a:r>
+            <a:endParaRPr lang="en-US" sz="2200" dirty="0"/>
           </a:p>
         </p:txBody>
       </p:sp>
@@ -2470,7 +1795,7 @@
         </p:nvSpPr>
         <p:spPr>
           <a:xfrm>
-            <a:off x="640080" y="4343400"/>
+            <a:off x="640080" y="4617720"/>
             <a:ext cx="420624" cy="420624"/>
           </a:xfrm>
           <a:prstGeom prst="ellipse">
@@ -2503,7 +1828,7 @@
         </p:blipFill>
         <p:spPr>
           <a:xfrm>
-            <a:off x="749442" y="4452762"/>
+            <a:off x="749442" y="4727082"/>
             <a:ext cx="201900" cy="201900"/>
           </a:xfrm>
           <a:prstGeom prst="rect">
@@ -2519,8 +1844,8 @@
         </p:nvSpPr>
         <p:spPr>
           <a:xfrm>
-            <a:off x="1207008" y="4416552"/>
-            <a:ext cx="4572000" cy="320040"/>
+            <a:off x="1207008" y="4690872"/>
+            <a:ext cx="5120640" cy="320040"/>
           </a:xfrm>
           <a:prstGeom prst="rect">
             <a:avLst/>
@@ -2544,7 +1869,7 @@
                 <a:ea typeface="Calibri" pitchFamily="34" charset="-122"/>
                 <a:cs typeface="Calibri" pitchFamily="34" charset="-120"/>
               </a:rPr>
-              <a:t>Spanish + Portuguese</a:t>
+              <a:t>Five promises, enforced in code</a:t>
             </a:r>
             <a:endParaRPr lang="en-US" sz="1600" dirty="0"/>
           </a:p>
@@ -2558,7 +1883,7 @@
         </p:nvSpPr>
         <p:spPr>
           <a:xfrm>
-            <a:off x="640080" y="4892040"/>
+            <a:off x="640080" y="5148072"/>
             <a:ext cx="420624" cy="420624"/>
           </a:xfrm>
           <a:prstGeom prst="ellipse">
@@ -2591,7 +1916,7 @@
         </p:blipFill>
         <p:spPr>
           <a:xfrm>
-            <a:off x="749442" y="5001402"/>
+            <a:off x="749442" y="5257434"/>
             <a:ext cx="201900" cy="201900"/>
           </a:xfrm>
           <a:prstGeom prst="rect">
@@ -2607,8 +1932,8 @@
         </p:nvSpPr>
         <p:spPr>
           <a:xfrm>
-            <a:off x="1207008" y="4965192"/>
-            <a:ext cx="4572000" cy="320040"/>
+            <a:off x="1207008" y="5221224"/>
+            <a:ext cx="5120640" cy="320040"/>
           </a:xfrm>
           <a:prstGeom prst="rect">
             <a:avLst/>
@@ -2632,7 +1957,7 @@
                 <a:ea typeface="Calibri" pitchFamily="34" charset="-122"/>
                 <a:cs typeface="Calibri" pitchFamily="34" charset="-120"/>
               </a:rPr>
-              <a:t>Human one click away</a:t>
+              <a:t>Run like a bank: owners, debate, audit</a:t>
             </a:r>
             <a:endParaRPr lang="en-US" sz="1600" dirty="0"/>
           </a:p>
@@ -2646,7 +1971,7 @@
         </p:nvSpPr>
         <p:spPr>
           <a:xfrm>
-            <a:off x="640080" y="5440680"/>
+            <a:off x="640080" y="5678424"/>
             <a:ext cx="420624" cy="420624"/>
           </a:xfrm>
           <a:prstGeom prst="ellipse">
@@ -2679,7 +2004,7 @@
         </p:blipFill>
         <p:spPr>
           <a:xfrm>
-            <a:off x="749442" y="5550042"/>
+            <a:off x="749442" y="5787786"/>
             <a:ext cx="201900" cy="201900"/>
           </a:xfrm>
           <a:prstGeom prst="rect">
@@ -2695,8 +2020,8 @@
         </p:nvSpPr>
         <p:spPr>
           <a:xfrm>
-            <a:off x="1207008" y="5513832"/>
-            <a:ext cx="4572000" cy="320040"/>
+            <a:off x="1207008" y="5751576"/>
+            <a:ext cx="5120640" cy="320040"/>
           </a:xfrm>
           <a:prstGeom prst="rect">
             <a:avLst/>
@@ -2720,7 +2045,7 @@
                 <a:ea typeface="Calibri" pitchFamily="34" charset="-122"/>
                 <a:cs typeface="Calibri" pitchFamily="34" charset="-120"/>
               </a:rPr>
-              <a:t>Live on Google Cloud</a:t>
+              <a:t>Live today, in Spanish and Portuguese</a:t>
             </a:r>
             <a:endParaRPr lang="en-US" sz="1600" dirty="0"/>
           </a:p>
@@ -2728,46 +2053,7 @@
       </p:sp>
       <p:sp>
         <p:nvSpPr>
-          <p:cNvPr id="14" name="Text 9"/>
-          <p:cNvSpPr txBox="1"/>
-          <p:nvPr/>
-        </p:nvSpPr>
-        <p:spPr>
-          <a:xfrm>
-            <a:off x="640080" y="6144768"/>
-            <a:ext cx="5943600" cy="320040"/>
-          </a:xfrm>
-          <a:prstGeom prst="rect">
-            <a:avLst/>
-          </a:prstGeom>
-          <a:noFill/>
-          <a:ln/>
-        </p:spPr>
-        <p:txBody>
-          <a:bodyPr wrap="square" lIns="0" tIns="0" rIns="0" bIns="0" rtlCol="0" anchor="t"/>
-          <a:lstStyle/>
-          <a:p>
-            <a:pPr indent="0" marL="0">
-              <a:buNone/>
-            </a:pPr>
-            <a:r>
-              <a:rPr lang="en-US" sz="1400" dirty="0">
-                <a:solidFill>
-                  <a:srgbClr val="8FA3AD"/>
-                </a:solidFill>
-                <a:latin typeface="Calibri" pitchFamily="34" charset="0"/>
-                <a:ea typeface="Calibri" pitchFamily="34" charset="-122"/>
-                <a:cs typeface="Calibri" pitchFamily="34" charset="-120"/>
-              </a:rPr>
-              <a:t>latam-bank-hackaton-2026.web.app</a:t>
-            </a:r>
-            <a:endParaRPr lang="en-US" sz="1400" dirty="0"/>
-          </a:p>
-        </p:txBody>
-      </p:sp>
-      <p:sp>
-        <p:nvSpPr>
-          <p:cNvPr id="15" name="Shape 10"/>
+          <p:cNvPr id="14" name="Shape 9"/>
           <p:cNvSpPr/>
           <p:nvPr/>
         </p:nvSpPr>
@@ -2801,7 +2087,7 @@
       </p:sp>
       <p:sp>
         <p:nvSpPr>
-          <p:cNvPr id="16" name="Shape 11"/>
+          <p:cNvPr id="15" name="Shape 10"/>
           <p:cNvSpPr/>
           <p:nvPr/>
         </p:nvSpPr>
@@ -2826,7 +2112,7 @@
       </p:sp>
       <p:pic>
         <p:nvPicPr>
-          <p:cNvPr id="17" name="Image 3" descr="preencoded.png">    </p:cNvPr>
+          <p:cNvPr id="16" name="Image 3" descr="preencoded.png">    </p:cNvPr>
           <p:cNvPicPr>
             <a:picLocks noChangeAspect="1"/>
           </p:cNvPicPr>
@@ -2850,7 +2136,7 @@
       </p:pic>
       <p:sp>
         <p:nvSpPr>
-          <p:cNvPr id="18" name="Text 12"/>
+          <p:cNvPr id="17" name="Text 11"/>
           <p:cNvSpPr txBox="1"/>
           <p:nvPr/>
         </p:nvSpPr>
@@ -2889,7 +2175,7 @@
       </p:sp>
       <p:sp>
         <p:nvSpPr>
-          <p:cNvPr id="19" name="Text 13"/>
+          <p:cNvPr id="18" name="Text 12"/>
           <p:cNvSpPr txBox="1"/>
           <p:nvPr/>
         </p:nvSpPr>
@@ -2928,7 +2214,7 @@
       </p:sp>
       <p:sp>
         <p:nvSpPr>
-          <p:cNvPr id="20" name="Shape 14"/>
+          <p:cNvPr id="19" name="Shape 13"/>
           <p:cNvSpPr/>
           <p:nvPr/>
         </p:nvSpPr>
@@ -2955,7 +2241,7 @@
       </p:sp>
       <p:sp>
         <p:nvSpPr>
-          <p:cNvPr id="21" name="Text 15"/>
+          <p:cNvPr id="20" name="Text 14"/>
           <p:cNvSpPr txBox="1"/>
           <p:nvPr/>
         </p:nvSpPr>
@@ -2994,7 +2280,7 @@
       </p:sp>
       <p:sp>
         <p:nvSpPr>
-          <p:cNvPr id="22" name="Shape 16"/>
+          <p:cNvPr id="21" name="Shape 15"/>
           <p:cNvSpPr/>
           <p:nvPr/>
         </p:nvSpPr>
@@ -3021,7 +2307,7 @@
       </p:sp>
       <p:sp>
         <p:nvSpPr>
-          <p:cNvPr id="23" name="Text 17"/>
+          <p:cNvPr id="22" name="Text 16"/>
           <p:cNvSpPr txBox="1"/>
           <p:nvPr/>
         </p:nvSpPr>
@@ -3060,7 +2346,7 @@
       </p:sp>
       <p:sp>
         <p:nvSpPr>
-          <p:cNvPr id="24" name="Shape 18"/>
+          <p:cNvPr id="23" name="Shape 17"/>
           <p:cNvSpPr/>
           <p:nvPr/>
         </p:nvSpPr>
@@ -3087,7 +2373,7 @@
       </p:sp>
       <p:sp>
         <p:nvSpPr>
-          <p:cNvPr id="25" name="Text 19"/>
+          <p:cNvPr id="24" name="Text 18"/>
           <p:cNvSpPr txBox="1"/>
           <p:nvPr/>
         </p:nvSpPr>
@@ -3126,7 +2412,7 @@
       </p:sp>
       <p:sp>
         <p:nvSpPr>
-          <p:cNvPr id="26" name="Text 20"/>
+          <p:cNvPr id="25" name="Text 19"/>
           <p:cNvSpPr txBox="1"/>
           <p:nvPr/>
         </p:nvSpPr>
@@ -3165,7 +2451,7 @@
       </p:sp>
       <p:sp>
         <p:nvSpPr>
-          <p:cNvPr id="27" name="Shape 21"/>
+          <p:cNvPr id="26" name="Shape 20"/>
           <p:cNvSpPr/>
           <p:nvPr/>
         </p:nvSpPr>
@@ -3192,7 +2478,7 @@
       </p:sp>
       <p:sp>
         <p:nvSpPr>
-          <p:cNvPr id="28" name="Text 22"/>
+          <p:cNvPr id="27" name="Text 21"/>
           <p:cNvSpPr txBox="1"/>
           <p:nvPr/>
         </p:nvSpPr>
@@ -3231,7 +2517,7 @@
       </p:sp>
       <p:sp>
         <p:nvSpPr>
-          <p:cNvPr id="29" name="Shape 23"/>
+          <p:cNvPr id="28" name="Shape 22"/>
           <p:cNvSpPr/>
           <p:nvPr/>
         </p:nvSpPr>
@@ -3258,7 +2544,7 @@
       </p:sp>
       <p:sp>
         <p:nvSpPr>
-          <p:cNvPr id="30" name="Text 24"/>
+          <p:cNvPr id="29" name="Text 23"/>
           <p:cNvSpPr txBox="1"/>
           <p:nvPr/>
         </p:nvSpPr>
@@ -3297,7 +2583,7 @@
       </p:sp>
       <p:sp>
         <p:nvSpPr>
-          <p:cNvPr id="31" name="Shape 25"/>
+          <p:cNvPr id="30" name="Shape 24"/>
           <p:cNvSpPr/>
           <p:nvPr/>
         </p:nvSpPr>
@@ -3322,7 +2608,7 @@
       </p:sp>
       <p:pic>
         <p:nvPicPr>
-          <p:cNvPr id="32" name="Image 4" descr="preencoded.png">    </p:cNvPr>
+          <p:cNvPr id="31" name="Image 4" descr="preencoded.png">    </p:cNvPr>
           <p:cNvPicPr>
             <a:picLocks noChangeAspect="1"/>
           </p:cNvPicPr>
@@ -3346,7 +2632,7 @@
       </p:pic>
       <p:sp>
         <p:nvSpPr>
-          <p:cNvPr id="33" name="Text 26"/>
+          <p:cNvPr id="32" name="Text 25"/>
           <p:cNvSpPr txBox="1"/>
           <p:nvPr/>
         </p:nvSpPr>
@@ -3441,42 +2727,339 @@
                 <a:ea typeface="Calibri" pitchFamily="34" charset="-122"/>
                 <a:cs typeface="Calibri" pitchFamily="34" charset="-120"/>
               </a:rPr>
-              <a:t>The top complaint waits 37 hours for a first answer</a:t>
+              <a:t>The promise banks break every day</a:t>
             </a:r>
             <a:endParaRPr lang="en-US" sz="3200" dirty="0"/>
           </a:p>
         </p:txBody>
       </p:sp>
-      <p:graphicFrame>
-        <p:nvGraphicFramePr>
-          <p:cNvPr id="3" name="Chart 0" descr=""/>
-          <p:cNvGraphicFramePr/>
-          <p:nvPr/>
-        </p:nvGraphicFramePr>
-        <p:xfrm>
-          <a:off x="457200" y="1417320"/>
-          <a:ext cx="6309360" cy="4480560"/>
-        </p:xfrm>
-        <a:graphic xmlns:a="http://schemas.openxmlformats.org/drawingml/2006/main">
-          <a:graphicData uri="http://schemas.openxmlformats.org/drawingml/2006/chart">
-            <c:chart xmlns:c="http://schemas.openxmlformats.org/drawingml/2006/chart" r:id="rId1"/>
-          </a:graphicData>
-        </a:graphic>
-      </p:graphicFrame>
-      <p:sp>
-        <p:nvSpPr>
-          <p:cNvPr id="4" name="Shape 1"/>
+      <p:sp>
+        <p:nvSpPr>
+          <p:cNvPr id="3" name="Shape 1"/>
           <p:cNvSpPr/>
           <p:nvPr/>
         </p:nvSpPr>
         <p:spPr>
           <a:xfrm>
-            <a:off x="7178040" y="1417320"/>
-            <a:ext cx="2148840" cy="2057400"/>
+            <a:off x="548640" y="1371600"/>
+            <a:ext cx="4937760" cy="3017520"/>
           </a:xfrm>
           <a:prstGeom prst="roundRect">
             <a:avLst>
-              <a:gd name="adj" fmla="val 5333"/>
+              <a:gd name="adj" fmla="val 4242"/>
+            </a:avLst>
+          </a:prstGeom>
+          <a:solidFill>
+            <a:srgbClr val="F8ECEA"/>
+          </a:solidFill>
+          <a:ln w="12700">
+            <a:solidFill>
+              <a:srgbClr val="F8ECEA"/>
+            </a:solidFill>
+            <a:prstDash val="solid"/>
+          </a:ln>
+        </p:spPr>
+      </p:sp>
+      <p:sp>
+        <p:nvSpPr>
+          <p:cNvPr id="4" name="Text 2"/>
+          <p:cNvSpPr txBox="1"/>
+          <p:nvPr/>
+        </p:nvSpPr>
+        <p:spPr>
+          <a:xfrm>
+            <a:off x="868680" y="1572768"/>
+            <a:ext cx="3657600" cy="274320"/>
+          </a:xfrm>
+          <a:prstGeom prst="rect">
+            <a:avLst/>
+          </a:prstGeom>
+          <a:noFill/>
+          <a:ln/>
+        </p:spPr>
+        <p:txBody>
+          <a:bodyPr wrap="square" lIns="0" tIns="0" rIns="0" bIns="0" rtlCol="0" anchor="t"/>
+          <a:lstStyle/>
+          <a:p>
+            <a:pPr indent="0" marL="0">
+              <a:buNone/>
+            </a:pPr>
+            <a:r>
+              <a:rPr lang="en-US" sz="1300" b="1" spc="300" kern="0" dirty="0">
+                <a:solidFill>
+                  <a:srgbClr val="B5483A"/>
+                </a:solidFill>
+                <a:latin typeface="Calibri" pitchFamily="34" charset="0"/>
+                <a:ea typeface="Calibri" pitchFamily="34" charset="-122"/>
+                <a:cs typeface="Calibri" pitchFamily="34" charset="-120"/>
+              </a:rPr>
+              <a:t>TODAY</a:t>
+            </a:r>
+            <a:endParaRPr lang="en-US" sz="1300" dirty="0"/>
+          </a:p>
+        </p:txBody>
+      </p:sp>
+      <p:sp>
+        <p:nvSpPr>
+          <p:cNvPr id="5" name="Text 3"/>
+          <p:cNvSpPr txBox="1"/>
+          <p:nvPr/>
+        </p:nvSpPr>
+        <p:spPr>
+          <a:xfrm>
+            <a:off x="868680" y="1920240"/>
+            <a:ext cx="4389120" cy="1188720"/>
+          </a:xfrm>
+          <a:prstGeom prst="rect">
+            <a:avLst/>
+          </a:prstGeom>
+          <a:noFill/>
+          <a:ln/>
+        </p:spPr>
+        <p:txBody>
+          <a:bodyPr wrap="square" lIns="0" tIns="0" rIns="0" bIns="0" rtlCol="0" anchor="t"/>
+          <a:lstStyle/>
+          <a:p>
+            <a:pPr indent="0" marL="0">
+              <a:buNone/>
+            </a:pPr>
+            <a:r>
+              <a:rPr lang="en-US" sz="8000" b="1" dirty="0">
+                <a:solidFill>
+                  <a:srgbClr val="B5483A"/>
+                </a:solidFill>
+                <a:latin typeface="Calibri" pitchFamily="34" charset="0"/>
+                <a:ea typeface="Calibri" pitchFamily="34" charset="-122"/>
+                <a:cs typeface="Calibri" pitchFamily="34" charset="-120"/>
+              </a:rPr>
+              <a:t>37 hours</a:t>
+            </a:r>
+            <a:endParaRPr lang="en-US" sz="8000" dirty="0"/>
+          </a:p>
+        </p:txBody>
+      </p:sp>
+      <p:sp>
+        <p:nvSpPr>
+          <p:cNvPr id="6" name="Text 4"/>
+          <p:cNvSpPr txBox="1"/>
+          <p:nvPr/>
+        </p:nvSpPr>
+        <p:spPr>
+          <a:xfrm>
+            <a:off x="868680" y="3291840"/>
+            <a:ext cx="4297680" cy="822960"/>
+          </a:xfrm>
+          <a:prstGeom prst="rect">
+            <a:avLst/>
+          </a:prstGeom>
+          <a:noFill/>
+          <a:ln/>
+        </p:spPr>
+        <p:txBody>
+          <a:bodyPr wrap="square" lIns="0" tIns="0" rIns="0" bIns="0" rtlCol="0" anchor="t"/>
+          <a:lstStyle/>
+          <a:p>
+            <a:pPr indent="0" marL="0">
+              <a:buNone/>
+            </a:pPr>
+            <a:r>
+              <a:rPr lang="en-US" sz="1600" dirty="0">
+                <a:solidFill>
+                  <a:srgbClr val="0B1F2A"/>
+                </a:solidFill>
+                <a:latin typeface="Calibri" pitchFamily="34" charset="0"/>
+                <a:ea typeface="Calibri" pitchFamily="34" charset="-122"/>
+                <a:cs typeface="Calibri" pitchFamily="34" charset="-120"/>
+              </a:rPr>
+              <a:t>for a first answer after a customer reports a charge they never made</a:t>
+            </a:r>
+            <a:endParaRPr lang="en-US" sz="1600" dirty="0"/>
+          </a:p>
+        </p:txBody>
+      </p:sp>
+      <p:sp>
+        <p:nvSpPr>
+          <p:cNvPr id="7" name="Shape 5"/>
+          <p:cNvSpPr/>
+          <p:nvPr/>
+        </p:nvSpPr>
+        <p:spPr>
+          <a:xfrm>
+            <a:off x="5669280" y="2606040"/>
+            <a:ext cx="822960" cy="548640"/>
+          </a:xfrm>
+          <a:prstGeom prst="rightArrow">
+            <a:avLst/>
+          </a:prstGeom>
+          <a:solidFill>
+            <a:srgbClr val="C9D3D0"/>
+          </a:solidFill>
+          <a:ln w="12700">
+            <a:solidFill>
+              <a:srgbClr val="C9D3D0"/>
+            </a:solidFill>
+            <a:prstDash val="solid"/>
+          </a:ln>
+        </p:spPr>
+      </p:sp>
+      <p:sp>
+        <p:nvSpPr>
+          <p:cNvPr id="8" name="Shape 6"/>
+          <p:cNvSpPr/>
+          <p:nvPr/>
+        </p:nvSpPr>
+        <p:spPr>
+          <a:xfrm>
+            <a:off x="6675120" y="1371600"/>
+            <a:ext cx="4937760" cy="3017520"/>
+          </a:xfrm>
+          <a:prstGeom prst="roundRect">
+            <a:avLst>
+              <a:gd name="adj" fmla="val 4242"/>
+            </a:avLst>
+          </a:prstGeom>
+          <a:solidFill>
+            <a:srgbClr val="DCEFE7"/>
+          </a:solidFill>
+          <a:ln w="12700">
+            <a:solidFill>
+              <a:srgbClr val="DCEFE7"/>
+            </a:solidFill>
+            <a:prstDash val="solid"/>
+          </a:ln>
+        </p:spPr>
+      </p:sp>
+      <p:sp>
+        <p:nvSpPr>
+          <p:cNvPr id="9" name="Text 7"/>
+          <p:cNvSpPr txBox="1"/>
+          <p:nvPr/>
+        </p:nvSpPr>
+        <p:spPr>
+          <a:xfrm>
+            <a:off x="6995160" y="1572768"/>
+            <a:ext cx="4114800" cy="274320"/>
+          </a:xfrm>
+          <a:prstGeom prst="rect">
+            <a:avLst/>
+          </a:prstGeom>
+          <a:noFill/>
+          <a:ln/>
+        </p:spPr>
+        <p:txBody>
+          <a:bodyPr wrap="square" lIns="0" tIns="0" rIns="0" bIns="0" rtlCol="0" anchor="t"/>
+          <a:lstStyle/>
+          <a:p>
+            <a:pPr indent="0" marL="0">
+              <a:buNone/>
+            </a:pPr>
+            <a:r>
+              <a:rPr lang="en-US" sz="1300" b="1" spc="300" kern="0" dirty="0">
+                <a:solidFill>
+                  <a:srgbClr val="0B6E4F"/>
+                </a:solidFill>
+                <a:latin typeface="Calibri" pitchFamily="34" charset="0"/>
+                <a:ea typeface="Calibri" pitchFamily="34" charset="-122"/>
+                <a:cs typeface="Calibri" pitchFamily="34" charset="-120"/>
+              </a:rPr>
+              <a:t>WITH LATAM BANK</a:t>
+            </a:r>
+            <a:endParaRPr lang="en-US" sz="1300" dirty="0"/>
+          </a:p>
+        </p:txBody>
+      </p:sp>
+      <p:sp>
+        <p:nvSpPr>
+          <p:cNvPr id="10" name="Text 8"/>
+          <p:cNvSpPr txBox="1"/>
+          <p:nvPr/>
+        </p:nvSpPr>
+        <p:spPr>
+          <a:xfrm>
+            <a:off x="6995160" y="1920240"/>
+            <a:ext cx="4389120" cy="1188720"/>
+          </a:xfrm>
+          <a:prstGeom prst="rect">
+            <a:avLst/>
+          </a:prstGeom>
+          <a:noFill/>
+          <a:ln/>
+        </p:spPr>
+        <p:txBody>
+          <a:bodyPr wrap="square" lIns="0" tIns="0" rIns="0" bIns="0" rtlCol="0" anchor="t"/>
+          <a:lstStyle/>
+          <a:p>
+            <a:pPr indent="0" marL="0">
+              <a:buNone/>
+            </a:pPr>
+            <a:r>
+              <a:rPr lang="en-US" sz="8000" b="1" dirty="0">
+                <a:solidFill>
+                  <a:srgbClr val="0B6E4F"/>
+                </a:solidFill>
+                <a:latin typeface="Calibri" pitchFamily="34" charset="0"/>
+                <a:ea typeface="Calibri" pitchFamily="34" charset="-122"/>
+                <a:cs typeface="Calibri" pitchFamily="34" charset="-120"/>
+              </a:rPr>
+              <a:t>Seconds</a:t>
+            </a:r>
+            <a:endParaRPr lang="en-US" sz="8000" dirty="0"/>
+          </a:p>
+        </p:txBody>
+      </p:sp>
+      <p:sp>
+        <p:nvSpPr>
+          <p:cNvPr id="11" name="Text 9"/>
+          <p:cNvSpPr txBox="1"/>
+          <p:nvPr/>
+        </p:nvSpPr>
+        <p:spPr>
+          <a:xfrm>
+            <a:off x="6995160" y="3291840"/>
+            <a:ext cx="4297680" cy="822960"/>
+          </a:xfrm>
+          <a:prstGeom prst="rect">
+            <a:avLst/>
+          </a:prstGeom>
+          <a:noFill/>
+          <a:ln/>
+        </p:spPr>
+        <p:txBody>
+          <a:bodyPr wrap="square" lIns="0" tIns="0" rIns="0" bIns="0" rtlCol="0" anchor="t"/>
+          <a:lstStyle/>
+          <a:p>
+            <a:pPr indent="0" marL="0">
+              <a:buNone/>
+            </a:pPr>
+            <a:r>
+              <a:rPr lang="en-US" sz="1600" dirty="0">
+                <a:solidFill>
+                  <a:srgbClr val="0B1F2A"/>
+                </a:solidFill>
+                <a:latin typeface="Calibri" pitchFamily="34" charset="0"/>
+                <a:ea typeface="Calibri" pitchFamily="34" charset="-122"/>
+                <a:cs typeface="Calibri" pitchFamily="34" charset="-120"/>
+              </a:rPr>
+              <a:t>Lía finds the charge and proposes the claim. 95% of answers in under 5 seconds, measured offline</a:t>
+            </a:r>
+            <a:endParaRPr lang="en-US" sz="1600" dirty="0"/>
+          </a:p>
+        </p:txBody>
+      </p:sp>
+      <p:sp>
+        <p:nvSpPr>
+          <p:cNvPr id="12" name="Shape 10"/>
+          <p:cNvSpPr/>
+          <p:nvPr/>
+        </p:nvSpPr>
+        <p:spPr>
+          <a:xfrm>
+            <a:off x="548640" y="4617720"/>
+            <a:ext cx="3566160" cy="1554480"/>
+          </a:xfrm>
+          <a:prstGeom prst="roundRect">
+            <a:avLst>
+              <a:gd name="adj" fmla="val 7059"/>
             </a:avLst>
           </a:prstGeom>
           <a:solidFill>
@@ -3492,14 +3075,14 @@
       </p:sp>
       <p:sp>
         <p:nvSpPr>
-          <p:cNvPr id="5" name="Text 2"/>
-          <p:cNvSpPr txBox="1"/>
-          <p:nvPr/>
-        </p:nvSpPr>
-        <p:spPr>
-          <a:xfrm>
-            <a:off x="7406640" y="1581912"/>
-            <a:ext cx="1691640" cy="868680"/>
+          <p:cNvPr id="13" name="Text 11"/>
+          <p:cNvSpPr txBox="1"/>
+          <p:nvPr/>
+        </p:nvSpPr>
+        <p:spPr>
+          <a:xfrm>
+            <a:off x="777240" y="4754880"/>
+            <a:ext cx="3108960" cy="822960"/>
           </a:xfrm>
           <a:prstGeom prst="rect">
             <a:avLst/>
@@ -3515,30 +3098,30 @@
               <a:buNone/>
             </a:pPr>
             <a:r>
-              <a:rPr lang="en-US" sz="4400" b="1" dirty="0">
-                <a:solidFill>
-                  <a:srgbClr val="0B6E4F"/>
-                </a:solidFill>
-                <a:latin typeface="Calibri" pitchFamily="34" charset="0"/>
-                <a:ea typeface="Calibri" pitchFamily="34" charset="-122"/>
-                <a:cs typeface="Calibri" pitchFamily="34" charset="-120"/>
-              </a:rPr>
-              <a:t>18.3%</a:t>
-            </a:r>
-            <a:endParaRPr lang="en-US" sz="4400" dirty="0"/>
-          </a:p>
-        </p:txBody>
-      </p:sp>
-      <p:sp>
-        <p:nvSpPr>
-          <p:cNvPr id="6" name="Text 3"/>
-          <p:cNvSpPr txBox="1"/>
-          <p:nvPr/>
-        </p:nvSpPr>
-        <p:spPr>
-          <a:xfrm>
-            <a:off x="7406640" y="2468880"/>
-            <a:ext cx="1691640" cy="914400"/>
+              <a:rPr lang="en-US" sz="3000" b="1" dirty="0">
+                <a:solidFill>
+                  <a:srgbClr val="0B1F2A"/>
+                </a:solidFill>
+                <a:latin typeface="Calibri" pitchFamily="34" charset="0"/>
+                <a:ea typeface="Calibri" pitchFamily="34" charset="-122"/>
+                <a:cs typeface="Calibri" pitchFamily="34" charset="-120"/>
+              </a:rPr>
+              <a:t>#1 complaint</a:t>
+            </a:r>
+            <a:endParaRPr lang="en-US" sz="3000" dirty="0"/>
+          </a:p>
+        </p:txBody>
+      </p:sp>
+      <p:sp>
+        <p:nvSpPr>
+          <p:cNvPr id="14" name="Text 12"/>
+          <p:cNvSpPr txBox="1"/>
+          <p:nvPr/>
+        </p:nvSpPr>
+        <p:spPr>
+          <a:xfrm>
+            <a:off x="777240" y="5577840"/>
+            <a:ext cx="3108960" cy="548640"/>
           </a:xfrm>
           <a:prstGeom prst="rect">
             <a:avLst/>
@@ -3554,7 +3137,7 @@
               <a:buNone/>
             </a:pPr>
             <a:r>
-              <a:rPr lang="en-US" sz="1400" dirty="0">
+              <a:rPr lang="en-US" sz="1350" dirty="0">
                 <a:solidFill>
                   <a:srgbClr val="5B6770"/>
                 </a:solidFill>
@@ -3562,26 +3145,26 @@
                 <a:ea typeface="Calibri" pitchFamily="34" charset="-122"/>
                 <a:cs typeface="Calibri" pitchFamily="34" charset="-120"/>
               </a:rPr>
-              <a:t>of complaints are unrecognized charges</a:t>
-            </a:r>
-            <a:endParaRPr lang="en-US" sz="1400" dirty="0"/>
-          </a:p>
-        </p:txBody>
-      </p:sp>
-      <p:sp>
-        <p:nvSpPr>
-          <p:cNvPr id="7" name="Shape 4"/>
+              <a:t>Unrecognized charges: 12,297 of 67,095 complaints</a:t>
+            </a:r>
+            <a:endParaRPr lang="en-US" sz="1350" dirty="0"/>
+          </a:p>
+        </p:txBody>
+      </p:sp>
+      <p:sp>
+        <p:nvSpPr>
+          <p:cNvPr id="15" name="Shape 13"/>
           <p:cNvSpPr/>
           <p:nvPr/>
         </p:nvSpPr>
         <p:spPr>
           <a:xfrm>
-            <a:off x="9509760" y="1417320"/>
-            <a:ext cx="2148840" cy="2057400"/>
+            <a:off x="4315968" y="4617720"/>
+            <a:ext cx="3566160" cy="1554480"/>
           </a:xfrm>
           <a:prstGeom prst="roundRect">
             <a:avLst>
-              <a:gd name="adj" fmla="val 5333"/>
+              <a:gd name="adj" fmla="val 7059"/>
             </a:avLst>
           </a:prstGeom>
           <a:solidFill>
@@ -3597,14 +3180,14 @@
       </p:sp>
       <p:sp>
         <p:nvSpPr>
-          <p:cNvPr id="8" name="Text 5"/>
-          <p:cNvSpPr txBox="1"/>
-          <p:nvPr/>
-        </p:nvSpPr>
-        <p:spPr>
-          <a:xfrm>
-            <a:off x="9738360" y="1581912"/>
-            <a:ext cx="1691640" cy="868680"/>
+          <p:cNvPr id="16" name="Text 14"/>
+          <p:cNvSpPr txBox="1"/>
+          <p:nvPr/>
+        </p:nvSpPr>
+        <p:spPr>
+          <a:xfrm>
+            <a:off x="4544568" y="4754880"/>
+            <a:ext cx="3108960" cy="822960"/>
           </a:xfrm>
           <a:prstGeom prst="rect">
             <a:avLst/>
@@ -3620,30 +3203,30 @@
               <a:buNone/>
             </a:pPr>
             <a:r>
-              <a:rPr lang="en-US" sz="4400" b="1" dirty="0">
-                <a:solidFill>
-                  <a:srgbClr val="0B6E4F"/>
-                </a:solidFill>
-                <a:latin typeface="Calibri" pitchFamily="34" charset="0"/>
-                <a:ea typeface="Calibri" pitchFamily="34" charset="-122"/>
-                <a:cs typeface="Calibri" pitchFamily="34" charset="-120"/>
-              </a:rPr>
-              <a:t>37 h</a:t>
-            </a:r>
-            <a:endParaRPr lang="en-US" sz="4400" dirty="0"/>
-          </a:p>
-        </p:txBody>
-      </p:sp>
-      <p:sp>
-        <p:nvSpPr>
-          <p:cNvPr id="9" name="Text 6"/>
-          <p:cNvSpPr txBox="1"/>
-          <p:nvPr/>
-        </p:nvSpPr>
-        <p:spPr>
-          <a:xfrm>
-            <a:off x="9738360" y="2468880"/>
-            <a:ext cx="1691640" cy="914400"/>
+              <a:rPr lang="en-US" sz="3000" b="1" dirty="0">
+                <a:solidFill>
+                  <a:srgbClr val="B5483A"/>
+                </a:solidFill>
+                <a:latin typeface="Calibri" pitchFamily="34" charset="0"/>
+                <a:ea typeface="Calibri" pitchFamily="34" charset="-122"/>
+                <a:cs typeface="Calibri" pitchFamily="34" charset="-120"/>
+              </a:rPr>
+              <a:t>3 in 4</a:t>
+            </a:r>
+            <a:endParaRPr lang="en-US" sz="3000" dirty="0"/>
+          </a:p>
+        </p:txBody>
+      </p:sp>
+      <p:sp>
+        <p:nvSpPr>
+          <p:cNvPr id="17" name="Text 15"/>
+          <p:cNvSpPr txBox="1"/>
+          <p:nvPr/>
+        </p:nvSpPr>
+        <p:spPr>
+          <a:xfrm>
+            <a:off x="4544568" y="5577840"/>
+            <a:ext cx="3108960" cy="548640"/>
           </a:xfrm>
           <a:prstGeom prst="rect">
             <a:avLst/>
@@ -3659,7 +3242,7 @@
               <a:buNone/>
             </a:pPr>
             <a:r>
-              <a:rPr lang="en-US" sz="1400" dirty="0">
+              <a:rPr lang="en-US" sz="1350" dirty="0">
                 <a:solidFill>
                   <a:srgbClr val="5B6770"/>
                 </a:solidFill>
@@ -3667,26 +3250,26 @@
                 <a:ea typeface="Calibri" pitchFamily="34" charset="-122"/>
                 <a:cs typeface="Calibri" pitchFamily="34" charset="-120"/>
               </a:rPr>
-              <a:t>median first response</a:t>
-            </a:r>
-            <a:endParaRPr lang="en-US" sz="1400" dirty="0"/>
-          </a:p>
-        </p:txBody>
-      </p:sp>
-      <p:sp>
-        <p:nvSpPr>
-          <p:cNvPr id="10" name="Shape 7"/>
+              <a:t>of those complaints are still open</a:t>
+            </a:r>
+            <a:endParaRPr lang="en-US" sz="1350" dirty="0"/>
+          </a:p>
+        </p:txBody>
+      </p:sp>
+      <p:sp>
+        <p:nvSpPr>
+          <p:cNvPr id="18" name="Shape 16"/>
           <p:cNvSpPr/>
           <p:nvPr/>
         </p:nvSpPr>
         <p:spPr>
           <a:xfrm>
-            <a:off x="7178040" y="3657600"/>
-            <a:ext cx="2148840" cy="2057400"/>
+            <a:off x="8083296" y="4617720"/>
+            <a:ext cx="3529584" cy="1554480"/>
           </a:xfrm>
           <a:prstGeom prst="roundRect">
             <a:avLst>
-              <a:gd name="adj" fmla="val 5333"/>
+              <a:gd name="adj" fmla="val 7059"/>
             </a:avLst>
           </a:prstGeom>
           <a:solidFill>
@@ -3702,14 +3285,14 @@
       </p:sp>
       <p:sp>
         <p:nvSpPr>
-          <p:cNvPr id="11" name="Text 8"/>
-          <p:cNvSpPr txBox="1"/>
-          <p:nvPr/>
-        </p:nvSpPr>
-        <p:spPr>
-          <a:xfrm>
-            <a:off x="7406640" y="3822192"/>
-            <a:ext cx="1691640" cy="868680"/>
+          <p:cNvPr id="19" name="Text 17"/>
+          <p:cNvSpPr txBox="1"/>
+          <p:nvPr/>
+        </p:nvSpPr>
+        <p:spPr>
+          <a:xfrm>
+            <a:off x="8311896" y="4754880"/>
+            <a:ext cx="3072384" cy="822960"/>
           </a:xfrm>
           <a:prstGeom prst="rect">
             <a:avLst/>
@@ -3725,30 +3308,30 @@
               <a:buNone/>
             </a:pPr>
             <a:r>
-              <a:rPr lang="en-US" sz="4400" b="1" dirty="0">
-                <a:solidFill>
-                  <a:srgbClr val="0B6E4F"/>
-                </a:solidFill>
-                <a:latin typeface="Calibri" pitchFamily="34" charset="0"/>
-                <a:ea typeface="Calibri" pitchFamily="34" charset="-122"/>
-                <a:cs typeface="Calibri" pitchFamily="34" charset="-120"/>
-              </a:rPr>
-              <a:t>24.5%</a:t>
-            </a:r>
-            <a:endParaRPr lang="en-US" sz="4400" dirty="0"/>
-          </a:p>
-        </p:txBody>
-      </p:sp>
-      <p:sp>
-        <p:nvSpPr>
-          <p:cNvPr id="12" name="Text 9"/>
-          <p:cNvSpPr txBox="1"/>
-          <p:nvPr/>
-        </p:nvSpPr>
-        <p:spPr>
-          <a:xfrm>
-            <a:off x="7406640" y="4709160"/>
-            <a:ext cx="1691640" cy="914400"/>
+              <a:rPr lang="en-US" sz="3000" b="1" dirty="0">
+                <a:solidFill>
+                  <a:srgbClr val="0B1F2A"/>
+                </a:solidFill>
+                <a:latin typeface="Calibri" pitchFamily="34" charset="0"/>
+                <a:ea typeface="Calibri" pitchFamily="34" charset="-122"/>
+                <a:cs typeface="Calibri" pitchFamily="34" charset="-120"/>
+              </a:rPr>
+              <a:t>Minutes</a:t>
+            </a:r>
+            <a:endParaRPr lang="en-US" sz="3000" dirty="0"/>
+          </a:p>
+        </p:txBody>
+      </p:sp>
+      <p:sp>
+        <p:nvSpPr>
+          <p:cNvPr id="20" name="Text 18"/>
+          <p:cNvSpPr txBox="1"/>
+          <p:nvPr/>
+        </p:nvSpPr>
+        <p:spPr>
+          <a:xfrm>
+            <a:off x="8311896" y="5577840"/>
+            <a:ext cx="3072384" cy="548640"/>
           </a:xfrm>
           <a:prstGeom prst="rect">
             <a:avLst/>
@@ -3764,7 +3347,7 @@
               <a:buNone/>
             </a:pPr>
             <a:r>
-              <a:rPr lang="en-US" sz="1400" dirty="0">
+              <a:rPr lang="en-US" sz="1350" dirty="0">
                 <a:solidFill>
                   <a:srgbClr val="5B6770"/>
                 </a:solidFill>
@@ -3772,159 +3355,15 @@
                 <a:ea typeface="Calibri" pitchFamily="34" charset="-122"/>
                 <a:cs typeface="Calibri" pitchFamily="34" charset="-120"/>
               </a:rPr>
-              <a:t>closed or resolved</a:t>
-            </a:r>
-            <a:endParaRPr lang="en-US" sz="1400" dirty="0"/>
-          </a:p>
-        </p:txBody>
-      </p:sp>
-      <p:sp>
-        <p:nvSpPr>
-          <p:cNvPr id="13" name="Shape 10"/>
-          <p:cNvSpPr/>
-          <p:nvPr/>
-        </p:nvSpPr>
-        <p:spPr>
-          <a:xfrm>
-            <a:off x="9509760" y="3657600"/>
-            <a:ext cx="2148840" cy="2057400"/>
-          </a:xfrm>
-          <a:prstGeom prst="roundRect">
-            <a:avLst>
-              <a:gd name="adj" fmla="val 5333"/>
-            </a:avLst>
-          </a:prstGeom>
-          <a:solidFill>
-            <a:srgbClr val="F1F5F4"/>
-          </a:solidFill>
-          <a:ln w="12700">
-            <a:solidFill>
-              <a:srgbClr val="F1F5F4"/>
-            </a:solidFill>
-            <a:prstDash val="solid"/>
-          </a:ln>
-        </p:spPr>
-      </p:sp>
-      <p:sp>
-        <p:nvSpPr>
-          <p:cNvPr id="14" name="Text 11"/>
-          <p:cNvSpPr txBox="1"/>
-          <p:nvPr/>
-        </p:nvSpPr>
-        <p:spPr>
-          <a:xfrm>
-            <a:off x="9738360" y="3822192"/>
-            <a:ext cx="1691640" cy="868680"/>
-          </a:xfrm>
-          <a:prstGeom prst="rect">
-            <a:avLst/>
-          </a:prstGeom>
-          <a:noFill/>
-          <a:ln/>
-        </p:spPr>
-        <p:txBody>
-          <a:bodyPr wrap="square" lIns="0" tIns="0" rIns="0" bIns="0" rtlCol="0" anchor="t"/>
-          <a:lstStyle/>
-          <a:p>
-            <a:pPr indent="0" marL="0">
-              <a:buNone/>
-            </a:pPr>
-            <a:r>
-              <a:rPr lang="en-US" sz="4400" b="1" dirty="0">
-                <a:solidFill>
-                  <a:srgbClr val="B5483A"/>
-                </a:solidFill>
-                <a:latin typeface="Calibri" pitchFamily="34" charset="0"/>
-                <a:ea typeface="Calibri" pitchFamily="34" charset="-122"/>
-                <a:cs typeface="Calibri" pitchFamily="34" charset="-120"/>
-              </a:rPr>
-              <a:t>20.4%</a:t>
-            </a:r>
-            <a:endParaRPr lang="en-US" sz="4400" dirty="0"/>
-          </a:p>
-        </p:txBody>
-      </p:sp>
-      <p:sp>
-        <p:nvSpPr>
-          <p:cNvPr id="15" name="Text 12"/>
-          <p:cNvSpPr txBox="1"/>
-          <p:nvPr/>
-        </p:nvSpPr>
-        <p:spPr>
-          <a:xfrm>
-            <a:off x="9738360" y="4709160"/>
-            <a:ext cx="1691640" cy="914400"/>
-          </a:xfrm>
-          <a:prstGeom prst="rect">
-            <a:avLst/>
-          </a:prstGeom>
-          <a:noFill/>
-          <a:ln/>
-        </p:spPr>
-        <p:txBody>
-          <a:bodyPr wrap="square" lIns="0" tIns="0" rIns="0" bIns="0" rtlCol="0" anchor="t"/>
-          <a:lstStyle/>
-          <a:p>
-            <a:pPr indent="0" marL="0">
-              <a:buNone/>
-            </a:pPr>
-            <a:r>
-              <a:rPr lang="en-US" sz="1400" dirty="0">
-                <a:solidFill>
-                  <a:srgbClr val="5B6770"/>
-                </a:solidFill>
-                <a:latin typeface="Calibri" pitchFamily="34" charset="0"/>
-                <a:ea typeface="Calibri" pitchFamily="34" charset="-122"/>
-                <a:cs typeface="Calibri" pitchFamily="34" charset="-120"/>
-              </a:rPr>
-              <a:t>breach the SLA</a:t>
-            </a:r>
-            <a:endParaRPr lang="en-US" sz="1400" dirty="0"/>
-          </a:p>
-        </p:txBody>
-      </p:sp>
-      <p:sp>
-        <p:nvSpPr>
-          <p:cNvPr id="16" name="Text 13"/>
-          <p:cNvSpPr txBox="1"/>
-          <p:nvPr/>
-        </p:nvSpPr>
-        <p:spPr>
-          <a:xfrm>
-            <a:off x="548640" y="5943600"/>
-            <a:ext cx="11064240" cy="365760"/>
-          </a:xfrm>
-          <a:prstGeom prst="rect">
-            <a:avLst/>
-          </a:prstGeom>
-          <a:noFill/>
-          <a:ln/>
-        </p:spPr>
-        <p:txBody>
-          <a:bodyPr wrap="square" lIns="0" tIns="0" rIns="0" bIns="0" rtlCol="0" anchor="t"/>
-          <a:lstStyle/>
-          <a:p>
-            <a:pPr indent="0" marL="0">
-              <a:buNone/>
-            </a:pPr>
-            <a:r>
-              <a:rPr lang="en-US" sz="1300" dirty="0">
-                <a:solidFill>
-                  <a:srgbClr val="5B6770"/>
-                </a:solidFill>
-                <a:latin typeface="Calibri" pitchFamily="34" charset="0"/>
-                <a:ea typeface="Calibri" pitchFamily="34" charset="-122"/>
-                <a:cs typeface="Calibri" pitchFamily="34" charset="-120"/>
-              </a:rPr>
-              <a:t>Fraud is contained in minutes, not days. One focused workflow: dispute intake. Source: 686,296 contacts from 148,443 customers.</a:t>
-            </a:r>
-            <a:endParaRPr lang="en-US" sz="1300" dirty="0"/>
-          </a:p>
-        </p:txBody>
-      </p:sp>
-      <p:sp>
-        <p:nvSpPr>
-          <p:cNvPr id="17" name="Text 14"/>
+              <a:t>is how fast fraud moves. Trust is lost in hours</a:t>
+            </a:r>
+            <a:endParaRPr lang="en-US" sz="1350" dirty="0"/>
+          </a:p>
+        </p:txBody>
+      </p:sp>
+      <p:sp>
+        <p:nvSpPr>
+          <p:cNvPr id="21" name="Text 19"/>
           <p:cNvSpPr txBox="1"/>
           <p:nvPr/>
         </p:nvSpPr>
@@ -3963,7 +3402,7 @@
       </p:sp>
       <p:sp>
         <p:nvSpPr>
-          <p:cNvPr id="18" name="Text 15"/>
+          <p:cNvPr id="22" name="Text 20"/>
           <p:cNvSpPr txBox="1"/>
           <p:nvPr/>
         </p:nvSpPr>
@@ -4058,7 +3497,7 @@
                 <a:ea typeface="Calibri" pitchFamily="34" charset="-122"/>
                 <a:cs typeface="Calibri" pitchFamily="34" charset="-120"/>
               </a:rPr>
-              <a:t>The model talks. Policy as code acts</a:t>
+              <a:t>We ran it like a bank: owners, debate, a record</a:t>
             </a:r>
             <a:endParaRPr lang="en-US" sz="3200" dirty="0"/>
           </a:p>
@@ -4072,8 +3511,165 @@
         </p:nvSpPr>
         <p:spPr>
           <a:xfrm>
-            <a:off x="1188720" y="1417320"/>
-            <a:ext cx="1005840" cy="1005840"/>
+            <a:off x="3246120" y="1325880"/>
+            <a:ext cx="914400" cy="914400"/>
+          </a:xfrm>
+          <a:prstGeom prst="ellipse">
+            <a:avLst/>
+          </a:prstGeom>
+          <a:solidFill>
+            <a:srgbClr val="0B1F2A"/>
+          </a:solidFill>
+          <a:ln w="12700">
+            <a:solidFill>
+              <a:srgbClr val="0B1F2A"/>
+            </a:solidFill>
+            <a:prstDash val="solid"/>
+          </a:ln>
+        </p:spPr>
+      </p:sp>
+      <p:pic>
+        <p:nvPicPr>
+          <p:cNvPr id="4" name="Image 0" descr="preencoded.png">    </p:cNvPr>
+          <p:cNvPicPr>
+            <a:picLocks noChangeAspect="1"/>
+          </p:cNvPicPr>
+          <p:nvPr/>
+        </p:nvPicPr>
+        <p:blipFill>
+          <a:blip r:embed="rId1"/>
+          <a:stretch>
+            <a:fillRect/>
+          </a:stretch>
+        </p:blipFill>
+        <p:spPr>
+          <a:xfrm>
+            <a:off x="3483864" y="1563624"/>
+            <a:ext cx="438912" cy="438912"/>
+          </a:xfrm>
+          <a:prstGeom prst="rect">
+            <a:avLst/>
+          </a:prstGeom>
+        </p:spPr>
+      </p:pic>
+      <p:sp>
+        <p:nvSpPr>
+          <p:cNvPr id="5" name="Text 2"/>
+          <p:cNvSpPr txBox="1"/>
+          <p:nvPr/>
+        </p:nvSpPr>
+        <p:spPr>
+          <a:xfrm>
+            <a:off x="2560320" y="2286000"/>
+            <a:ext cx="2286000" cy="320040"/>
+          </a:xfrm>
+          <a:prstGeom prst="rect">
+            <a:avLst/>
+          </a:prstGeom>
+          <a:noFill/>
+          <a:ln/>
+        </p:spPr>
+        <p:txBody>
+          <a:bodyPr wrap="square" lIns="0" tIns="0" rIns="0" bIns="0" rtlCol="0" anchor="t"/>
+          <a:lstStyle/>
+          <a:p>
+            <a:pPr algn="ctr" indent="0" marL="0">
+              <a:buNone/>
+            </a:pPr>
+            <a:r>
+              <a:rPr lang="en-US" sz="1600" b="1" dirty="0">
+                <a:solidFill>
+                  <a:srgbClr val="0B1F2A"/>
+                </a:solidFill>
+                <a:latin typeface="Calibri" pitchFamily="34" charset="0"/>
+                <a:ea typeface="Calibri" pitchFamily="34" charset="-122"/>
+                <a:cs typeface="Calibri" pitchFamily="34" charset="-120"/>
+              </a:rPr>
+              <a:t>Presidency</a:t>
+            </a:r>
+            <a:endParaRPr lang="en-US" sz="1600" dirty="0"/>
+          </a:p>
+        </p:txBody>
+      </p:sp>
+      <p:sp>
+        <p:nvSpPr>
+          <p:cNvPr id="6" name="Shape 3"/>
+          <p:cNvSpPr/>
+          <p:nvPr/>
+        </p:nvSpPr>
+        <p:spPr>
+          <a:xfrm>
+            <a:off x="3703320" y="2651760"/>
+            <a:ext cx="0" cy="320040"/>
+          </a:xfrm>
+          <a:prstGeom prst="line">
+            <a:avLst/>
+          </a:prstGeom>
+          <a:noFill/>
+          <a:ln w="19050">
+            <a:solidFill>
+              <a:srgbClr val="C9D3D0"/>
+            </a:solidFill>
+            <a:prstDash val="solid"/>
+          </a:ln>
+        </p:spPr>
+      </p:sp>
+      <p:sp>
+        <p:nvSpPr>
+          <p:cNvPr id="7" name="Shape 4"/>
+          <p:cNvSpPr/>
+          <p:nvPr/>
+        </p:nvSpPr>
+        <p:spPr>
+          <a:xfrm>
+            <a:off x="1097280" y="2971800"/>
+            <a:ext cx="5212080" cy="0"/>
+          </a:xfrm>
+          <a:prstGeom prst="line">
+            <a:avLst/>
+          </a:prstGeom>
+          <a:noFill/>
+          <a:ln w="19050">
+            <a:solidFill>
+              <a:srgbClr val="C9D3D0"/>
+            </a:solidFill>
+            <a:prstDash val="solid"/>
+          </a:ln>
+        </p:spPr>
+      </p:sp>
+      <p:sp>
+        <p:nvSpPr>
+          <p:cNvPr id="8" name="Shape 5"/>
+          <p:cNvSpPr/>
+          <p:nvPr/>
+        </p:nvSpPr>
+        <p:spPr>
+          <a:xfrm>
+            <a:off x="1097280" y="2971800"/>
+            <a:ext cx="0" cy="228600"/>
+          </a:xfrm>
+          <a:prstGeom prst="line">
+            <a:avLst/>
+          </a:prstGeom>
+          <a:noFill/>
+          <a:ln w="19050">
+            <a:solidFill>
+              <a:srgbClr val="C9D3D0"/>
+            </a:solidFill>
+            <a:prstDash val="solid"/>
+          </a:ln>
+        </p:spPr>
+      </p:sp>
+      <p:sp>
+        <p:nvSpPr>
+          <p:cNvPr id="9" name="Shape 6"/>
+          <p:cNvSpPr/>
+          <p:nvPr/>
+        </p:nvSpPr>
+        <p:spPr>
+          <a:xfrm>
+            <a:off x="685800" y="3200400"/>
+            <a:ext cx="822960" cy="822960"/>
           </a:xfrm>
           <a:prstGeom prst="ellipse">
             <a:avLst/>
@@ -4091,22 +3687,22 @@
       </p:sp>
       <p:pic>
         <p:nvPicPr>
-          <p:cNvPr id="4" name="Image 0" descr="preencoded.png">    </p:cNvPr>
+          <p:cNvPr id="10" name="Image 1" descr="preencoded.png">    </p:cNvPr>
           <p:cNvPicPr>
             <a:picLocks noChangeAspect="1"/>
           </p:cNvPicPr>
           <p:nvPr/>
         </p:nvPicPr>
         <p:blipFill>
-          <a:blip r:embed="rId1"/>
+          <a:blip r:embed="rId2"/>
           <a:stretch>
             <a:fillRect/>
           </a:stretch>
         </p:blipFill>
         <p:spPr>
           <a:xfrm>
-            <a:off x="1450238" y="1678838"/>
-            <a:ext cx="482803" cy="482803"/>
+            <a:off x="899770" y="3414370"/>
+            <a:ext cx="395021" cy="395021"/>
           </a:xfrm>
           <a:prstGeom prst="rect">
             <a:avLst/>
@@ -4115,14 +3711,14 @@
       </p:pic>
       <p:sp>
         <p:nvSpPr>
-          <p:cNvPr id="5" name="Text 2"/>
-          <p:cNvSpPr txBox="1"/>
-          <p:nvPr/>
-        </p:nvSpPr>
-        <p:spPr>
-          <a:xfrm>
-            <a:off x="685800" y="2560320"/>
-            <a:ext cx="2011680" cy="320040"/>
+          <p:cNvPr id="11" name="Text 7"/>
+          <p:cNvSpPr txBox="1"/>
+          <p:nvPr/>
+        </p:nvSpPr>
+        <p:spPr>
+          <a:xfrm>
+            <a:off x="411480" y="4114800"/>
+            <a:ext cx="1371600" cy="274320"/>
           </a:xfrm>
           <a:prstGeom prst="rect">
             <a:avLst/>
@@ -4138,7 +3734,7 @@
               <a:buNone/>
             </a:pPr>
             <a:r>
-              <a:rPr lang="en-US" sz="1700" b="1" dirty="0">
+              <a:rPr lang="en-US" sz="1350" b="1" dirty="0">
                 <a:solidFill>
                   <a:srgbClr val="0B1F2A"/>
                 </a:solidFill>
@@ -4146,69 +3742,28 @@
                 <a:ea typeface="Calibri" pitchFamily="34" charset="-122"/>
                 <a:cs typeface="Calibri" pitchFamily="34" charset="-120"/>
               </a:rPr>
-              <a:t>Customer</a:t>
-            </a:r>
-            <a:endParaRPr lang="en-US" sz="1700" dirty="0"/>
-          </a:p>
-        </p:txBody>
-      </p:sp>
-      <p:sp>
-        <p:nvSpPr>
-          <p:cNvPr id="6" name="Text 3"/>
-          <p:cNvSpPr txBox="1"/>
-          <p:nvPr/>
-        </p:nvSpPr>
-        <p:spPr>
-          <a:xfrm>
-            <a:off x="685800" y="2907792"/>
-            <a:ext cx="2011680" cy="548640"/>
-          </a:xfrm>
-          <a:prstGeom prst="rect">
-            <a:avLst/>
-          </a:prstGeom>
-          <a:noFill/>
-          <a:ln/>
-        </p:spPr>
-        <p:txBody>
-          <a:bodyPr wrap="square" lIns="0" tIns="0" rIns="0" bIns="0" rtlCol="0" anchor="t"/>
-          <a:lstStyle/>
-          <a:p>
-            <a:pPr algn="ctr" indent="0" marL="0">
-              <a:buNone/>
-            </a:pPr>
-            <a:r>
-              <a:rPr lang="en-US" sz="1250" dirty="0">
-                <a:solidFill>
-                  <a:srgbClr val="5B6770"/>
-                </a:solidFill>
-                <a:latin typeface="Calibri" pitchFamily="34" charset="0"/>
-                <a:ea typeface="Calibri" pitchFamily="34" charset="-122"/>
-                <a:cs typeface="Calibri" pitchFamily="34" charset="-120"/>
-              </a:rPr>
-              <a:t>Banking web and chat</a:t>
-            </a:r>
-            <a:endParaRPr lang="en-US" sz="1250" dirty="0"/>
-          </a:p>
-        </p:txBody>
-      </p:sp>
-      <p:sp>
-        <p:nvSpPr>
-          <p:cNvPr id="7" name="Shape 4"/>
+              <a:t>Customers</a:t>
+            </a:r>
+            <a:endParaRPr lang="en-US" sz="1350" dirty="0"/>
+          </a:p>
+        </p:txBody>
+      </p:sp>
+      <p:sp>
+        <p:nvSpPr>
+          <p:cNvPr id="12" name="Shape 8"/>
           <p:cNvSpPr/>
           <p:nvPr/>
         </p:nvSpPr>
         <p:spPr>
           <a:xfrm>
-            <a:off x="2468880" y="1783080"/>
-            <a:ext cx="457200" cy="274320"/>
-          </a:xfrm>
-          <a:prstGeom prst="rightArrow">
-            <a:avLst/>
-          </a:prstGeom>
-          <a:solidFill>
-            <a:srgbClr val="C9D3D0"/>
-          </a:solidFill>
-          <a:ln w="12700">
+            <a:off x="2400300" y="2971800"/>
+            <a:ext cx="0" cy="228600"/>
+          </a:xfrm>
+          <a:prstGeom prst="line">
+            <a:avLst/>
+          </a:prstGeom>
+          <a:noFill/>
+          <a:ln w="19050">
             <a:solidFill>
               <a:srgbClr val="C9D3D0"/>
             </a:solidFill>
@@ -4218,14 +3773,14 @@
       </p:sp>
       <p:sp>
         <p:nvSpPr>
-          <p:cNvPr id="8" name="Shape 5"/>
+          <p:cNvPr id="13" name="Shape 9"/>
           <p:cNvSpPr/>
           <p:nvPr/>
         </p:nvSpPr>
         <p:spPr>
           <a:xfrm>
-            <a:off x="3401568" y="1417320"/>
-            <a:ext cx="1005840" cy="1005840"/>
+            <a:off x="1988820" y="3200400"/>
+            <a:ext cx="822960" cy="822960"/>
           </a:xfrm>
           <a:prstGeom prst="ellipse">
             <a:avLst/>
@@ -4243,22 +3798,22 @@
       </p:sp>
       <p:pic>
         <p:nvPicPr>
-          <p:cNvPr id="9" name="Image 1" descr="preencoded.png">    </p:cNvPr>
+          <p:cNvPr id="14" name="Image 2" descr="preencoded.png">    </p:cNvPr>
           <p:cNvPicPr>
             <a:picLocks noChangeAspect="1"/>
           </p:cNvPicPr>
           <p:nvPr/>
         </p:nvPicPr>
         <p:blipFill>
-          <a:blip r:embed="rId2"/>
+          <a:blip r:embed="rId3"/>
           <a:stretch>
             <a:fillRect/>
           </a:stretch>
         </p:blipFill>
         <p:spPr>
           <a:xfrm>
-            <a:off x="3663086" y="1678838"/>
-            <a:ext cx="482803" cy="482803"/>
+            <a:off x="2202790" y="3414370"/>
+            <a:ext cx="395021" cy="395021"/>
           </a:xfrm>
           <a:prstGeom prst="rect">
             <a:avLst/>
@@ -4267,14 +3822,14 @@
       </p:pic>
       <p:sp>
         <p:nvSpPr>
-          <p:cNvPr id="10" name="Text 6"/>
-          <p:cNvSpPr txBox="1"/>
-          <p:nvPr/>
-        </p:nvSpPr>
-        <p:spPr>
-          <a:xfrm>
-            <a:off x="2898648" y="2560320"/>
-            <a:ext cx="2011680" cy="320040"/>
+          <p:cNvPr id="15" name="Text 10"/>
+          <p:cNvSpPr txBox="1"/>
+          <p:nvPr/>
+        </p:nvSpPr>
+        <p:spPr>
+          <a:xfrm>
+            <a:off x="1714500" y="4114800"/>
+            <a:ext cx="1371600" cy="274320"/>
           </a:xfrm>
           <a:prstGeom prst="rect">
             <a:avLst/>
@@ -4290,7 +3845,7 @@
               <a:buNone/>
             </a:pPr>
             <a:r>
-              <a:rPr lang="en-US" sz="1700" b="1" dirty="0">
+              <a:rPr lang="en-US" sz="1350" b="1" dirty="0">
                 <a:solidFill>
                   <a:srgbClr val="0B1F2A"/>
                 </a:solidFill>
@@ -4298,69 +3853,28 @@
                 <a:ea typeface="Calibri" pitchFamily="34" charset="-122"/>
                 <a:cs typeface="Calibri" pitchFamily="34" charset="-120"/>
               </a:rPr>
-              <a:t>Channel</a:t>
-            </a:r>
-            <a:endParaRPr lang="en-US" sz="1700" dirty="0"/>
-          </a:p>
-        </p:txBody>
-      </p:sp>
-      <p:sp>
-        <p:nvSpPr>
-          <p:cNvPr id="11" name="Text 7"/>
-          <p:cNvSpPr txBox="1"/>
-          <p:nvPr/>
-        </p:nvSpPr>
-        <p:spPr>
-          <a:xfrm>
-            <a:off x="2898648" y="2907792"/>
-            <a:ext cx="2011680" cy="548640"/>
-          </a:xfrm>
-          <a:prstGeom prst="rect">
-            <a:avLst/>
-          </a:prstGeom>
-          <a:noFill/>
-          <a:ln/>
-        </p:spPr>
-        <p:txBody>
-          <a:bodyPr wrap="square" lIns="0" tIns="0" rIns="0" bIns="0" rtlCol="0" anchor="t"/>
-          <a:lstStyle/>
-          <a:p>
-            <a:pPr algn="ctr" indent="0" marL="0">
-              <a:buNone/>
-            </a:pPr>
-            <a:r>
-              <a:rPr lang="en-US" sz="1250" dirty="0">
-                <a:solidFill>
-                  <a:srgbClr val="5B6770"/>
-                </a:solidFill>
-                <a:latin typeface="Calibri" pitchFamily="34" charset="0"/>
-                <a:ea typeface="Calibri" pitchFamily="34" charset="-122"/>
-                <a:cs typeface="Calibri" pitchFamily="34" charset="-120"/>
-              </a:rPr>
-              <a:t>Session, on-screen approval, output filter</a:t>
-            </a:r>
-            <a:endParaRPr lang="en-US" sz="1250" dirty="0"/>
-          </a:p>
-        </p:txBody>
-      </p:sp>
-      <p:sp>
-        <p:nvSpPr>
-          <p:cNvPr id="12" name="Shape 8"/>
+              <a:t>AI</a:t>
+            </a:r>
+            <a:endParaRPr lang="en-US" sz="1350" dirty="0"/>
+          </a:p>
+        </p:txBody>
+      </p:sp>
+      <p:sp>
+        <p:nvSpPr>
+          <p:cNvPr id="16" name="Shape 11"/>
           <p:cNvSpPr/>
           <p:nvPr/>
         </p:nvSpPr>
         <p:spPr>
           <a:xfrm>
-            <a:off x="4681728" y="1783080"/>
-            <a:ext cx="457200" cy="274320"/>
-          </a:xfrm>
-          <a:prstGeom prst="rightArrow">
-            <a:avLst/>
-          </a:prstGeom>
-          <a:solidFill>
-            <a:srgbClr val="C9D3D0"/>
-          </a:solidFill>
-          <a:ln w="12700">
+            <a:off x="3703320" y="2971800"/>
+            <a:ext cx="0" cy="228600"/>
+          </a:xfrm>
+          <a:prstGeom prst="line">
+            <a:avLst/>
+          </a:prstGeom>
+          <a:noFill/>
+          <a:ln w="19050">
             <a:solidFill>
               <a:srgbClr val="C9D3D0"/>
             </a:solidFill>
@@ -4370,14 +3884,14 @@
       </p:sp>
       <p:sp>
         <p:nvSpPr>
-          <p:cNvPr id="13" name="Shape 9"/>
+          <p:cNvPr id="17" name="Shape 12"/>
           <p:cNvSpPr/>
           <p:nvPr/>
         </p:nvSpPr>
         <p:spPr>
           <a:xfrm>
-            <a:off x="5614416" y="1417320"/>
-            <a:ext cx="1005840" cy="1005840"/>
+            <a:off x="3291840" y="3200400"/>
+            <a:ext cx="822960" cy="822960"/>
           </a:xfrm>
           <a:prstGeom prst="ellipse">
             <a:avLst/>
@@ -4395,22 +3909,22 @@
       </p:sp>
       <p:pic>
         <p:nvPicPr>
-          <p:cNvPr id="14" name="Image 2" descr="preencoded.png">    </p:cNvPr>
+          <p:cNvPr id="18" name="Image 3" descr="preencoded.png">    </p:cNvPr>
           <p:cNvPicPr>
             <a:picLocks noChangeAspect="1"/>
           </p:cNvPicPr>
           <p:nvPr/>
         </p:nvPicPr>
         <p:blipFill>
-          <a:blip r:embed="rId3"/>
+          <a:blip r:embed="rId4"/>
           <a:stretch>
             <a:fillRect/>
           </a:stretch>
         </p:blipFill>
         <p:spPr>
           <a:xfrm>
-            <a:off x="5875934" y="1678838"/>
-            <a:ext cx="482803" cy="482803"/>
+            <a:off x="3505810" y="3414370"/>
+            <a:ext cx="395021" cy="395021"/>
           </a:xfrm>
           <a:prstGeom prst="rect">
             <a:avLst/>
@@ -4419,14 +3933,14 @@
       </p:pic>
       <p:sp>
         <p:nvSpPr>
-          <p:cNvPr id="15" name="Text 10"/>
-          <p:cNvSpPr txBox="1"/>
-          <p:nvPr/>
-        </p:nvSpPr>
-        <p:spPr>
-          <a:xfrm>
-            <a:off x="5111496" y="2560320"/>
-            <a:ext cx="2011680" cy="320040"/>
+          <p:cNvPr id="19" name="Text 13"/>
+          <p:cNvSpPr txBox="1"/>
+          <p:nvPr/>
+        </p:nvSpPr>
+        <p:spPr>
+          <a:xfrm>
+            <a:off x="3017520" y="4114800"/>
+            <a:ext cx="1371600" cy="274320"/>
           </a:xfrm>
           <a:prstGeom prst="rect">
             <a:avLst/>
@@ -4442,7 +3956,7 @@
               <a:buNone/>
             </a:pPr>
             <a:r>
-              <a:rPr lang="en-US" sz="1700" b="1" dirty="0">
+              <a:rPr lang="en-US" sz="1350" b="1" dirty="0">
                 <a:solidFill>
                   <a:srgbClr val="0B1F2A"/>
                 </a:solidFill>
@@ -4450,69 +3964,28 @@
                 <a:ea typeface="Calibri" pitchFamily="34" charset="-122"/>
                 <a:cs typeface="Calibri" pitchFamily="34" charset="-120"/>
               </a:rPr>
-              <a:t>Agent</a:t>
-            </a:r>
-            <a:endParaRPr lang="en-US" sz="1700" dirty="0"/>
-          </a:p>
-        </p:txBody>
-      </p:sp>
-      <p:sp>
-        <p:nvSpPr>
-          <p:cNvPr id="16" name="Text 11"/>
-          <p:cNvSpPr txBox="1"/>
-          <p:nvPr/>
-        </p:nvSpPr>
-        <p:spPr>
-          <a:xfrm>
-            <a:off x="5111496" y="2907792"/>
-            <a:ext cx="2011680" cy="548640"/>
-          </a:xfrm>
-          <a:prstGeom prst="rect">
-            <a:avLst/>
-          </a:prstGeom>
-          <a:noFill/>
-          <a:ln/>
-        </p:spPr>
-        <p:txBody>
-          <a:bodyPr wrap="square" lIns="0" tIns="0" rIns="0" bIns="0" rtlCol="0" anchor="t"/>
-          <a:lstStyle/>
-          <a:p>
-            <a:pPr algn="ctr" indent="0" marL="0">
-              <a:buNone/>
-            </a:pPr>
-            <a:r>
-              <a:rPr lang="en-US" sz="1250" dirty="0">
-                <a:solidFill>
-                  <a:srgbClr val="5B6770"/>
-                </a:solidFill>
-                <a:latin typeface="Calibri" pitchFamily="34" charset="0"/>
-                <a:ea typeface="Calibri" pitchFamily="34" charset="-122"/>
-                <a:cs typeface="Calibri" pitchFamily="34" charset="-120"/>
-              </a:rPr>
-              <a:t>Gemini + 8 typed tools</a:t>
-            </a:r>
-            <a:endParaRPr lang="en-US" sz="1250" dirty="0"/>
-          </a:p>
-        </p:txBody>
-      </p:sp>
-      <p:sp>
-        <p:nvSpPr>
-          <p:cNvPr id="17" name="Shape 12"/>
+              <a:t>Data</a:t>
+            </a:r>
+            <a:endParaRPr lang="en-US" sz="1350" dirty="0"/>
+          </a:p>
+        </p:txBody>
+      </p:sp>
+      <p:sp>
+        <p:nvSpPr>
+          <p:cNvPr id="20" name="Shape 14"/>
           <p:cNvSpPr/>
           <p:nvPr/>
         </p:nvSpPr>
         <p:spPr>
           <a:xfrm>
-            <a:off x="6894576" y="1783080"/>
-            <a:ext cx="457200" cy="274320"/>
-          </a:xfrm>
-          <a:prstGeom prst="rightArrow">
-            <a:avLst/>
-          </a:prstGeom>
-          <a:solidFill>
-            <a:srgbClr val="C9D3D0"/>
-          </a:solidFill>
-          <a:ln w="12700">
+            <a:off x="5006340" y="2971800"/>
+            <a:ext cx="0" cy="228600"/>
+          </a:xfrm>
+          <a:prstGeom prst="line">
+            <a:avLst/>
+          </a:prstGeom>
+          <a:noFill/>
+          <a:ln w="19050">
             <a:solidFill>
               <a:srgbClr val="C9D3D0"/>
             </a:solidFill>
@@ -4522,14 +3995,213 @@
       </p:sp>
       <p:sp>
         <p:nvSpPr>
-          <p:cNvPr id="18" name="Shape 13"/>
+          <p:cNvPr id="21" name="Shape 15"/>
           <p:cNvSpPr/>
           <p:nvPr/>
         </p:nvSpPr>
         <p:spPr>
           <a:xfrm>
-            <a:off x="7827264" y="1417320"/>
-            <a:ext cx="1005840" cy="1005840"/>
+            <a:off x="4594860" y="3200400"/>
+            <a:ext cx="822960" cy="822960"/>
+          </a:xfrm>
+          <a:prstGeom prst="ellipse">
+            <a:avLst/>
+          </a:prstGeom>
+          <a:solidFill>
+            <a:srgbClr val="0B6E4F"/>
+          </a:solidFill>
+          <a:ln w="12700">
+            <a:solidFill>
+              <a:srgbClr val="0B6E4F"/>
+            </a:solidFill>
+            <a:prstDash val="solid"/>
+          </a:ln>
+        </p:spPr>
+      </p:sp>
+      <p:pic>
+        <p:nvPicPr>
+          <p:cNvPr id="22" name="Image 4" descr="preencoded.png">    </p:cNvPr>
+          <p:cNvPicPr>
+            <a:picLocks noChangeAspect="1"/>
+          </p:cNvPicPr>
+          <p:nvPr/>
+        </p:nvPicPr>
+        <p:blipFill>
+          <a:blip r:embed="rId5"/>
+          <a:stretch>
+            <a:fillRect/>
+          </a:stretch>
+        </p:blipFill>
+        <p:spPr>
+          <a:xfrm>
+            <a:off x="4808830" y="3414370"/>
+            <a:ext cx="395021" cy="395021"/>
+          </a:xfrm>
+          <a:prstGeom prst="rect">
+            <a:avLst/>
+          </a:prstGeom>
+        </p:spPr>
+      </p:pic>
+      <p:sp>
+        <p:nvSpPr>
+          <p:cNvPr id="23" name="Text 16"/>
+          <p:cNvSpPr txBox="1"/>
+          <p:nvPr/>
+        </p:nvSpPr>
+        <p:spPr>
+          <a:xfrm>
+            <a:off x="4320540" y="4114800"/>
+            <a:ext cx="1371600" cy="274320"/>
+          </a:xfrm>
+          <a:prstGeom prst="rect">
+            <a:avLst/>
+          </a:prstGeom>
+          <a:noFill/>
+          <a:ln/>
+        </p:spPr>
+        <p:txBody>
+          <a:bodyPr wrap="square" lIns="0" tIns="0" rIns="0" bIns="0" rtlCol="0" anchor="t"/>
+          <a:lstStyle/>
+          <a:p>
+            <a:pPr algn="ctr" indent="0" marL="0">
+              <a:buNone/>
+            </a:pPr>
+            <a:r>
+              <a:rPr lang="en-US" sz="1350" b="1" dirty="0">
+                <a:solidFill>
+                  <a:srgbClr val="0B1F2A"/>
+                </a:solidFill>
+                <a:latin typeface="Calibri" pitchFamily="34" charset="0"/>
+                <a:ea typeface="Calibri" pitchFamily="34" charset="-122"/>
+                <a:cs typeface="Calibri" pitchFamily="34" charset="-120"/>
+              </a:rPr>
+              <a:t>Technology</a:t>
+            </a:r>
+            <a:endParaRPr lang="en-US" sz="1350" dirty="0"/>
+          </a:p>
+        </p:txBody>
+      </p:sp>
+      <p:sp>
+        <p:nvSpPr>
+          <p:cNvPr id="24" name="Shape 17"/>
+          <p:cNvSpPr/>
+          <p:nvPr/>
+        </p:nvSpPr>
+        <p:spPr>
+          <a:xfrm>
+            <a:off x="6309360" y="2971800"/>
+            <a:ext cx="0" cy="228600"/>
+          </a:xfrm>
+          <a:prstGeom prst="line">
+            <a:avLst/>
+          </a:prstGeom>
+          <a:noFill/>
+          <a:ln w="19050">
+            <a:solidFill>
+              <a:srgbClr val="C9D3D0"/>
+            </a:solidFill>
+            <a:prstDash val="solid"/>
+          </a:ln>
+        </p:spPr>
+      </p:sp>
+      <p:sp>
+        <p:nvSpPr>
+          <p:cNvPr id="25" name="Shape 18"/>
+          <p:cNvSpPr/>
+          <p:nvPr/>
+        </p:nvSpPr>
+        <p:spPr>
+          <a:xfrm>
+            <a:off x="5897880" y="3200400"/>
+            <a:ext cx="822960" cy="822960"/>
+          </a:xfrm>
+          <a:prstGeom prst="ellipse">
+            <a:avLst/>
+          </a:prstGeom>
+          <a:solidFill>
+            <a:srgbClr val="0B6E4F"/>
+          </a:solidFill>
+          <a:ln w="12700">
+            <a:solidFill>
+              <a:srgbClr val="0B6E4F"/>
+            </a:solidFill>
+            <a:prstDash val="solid"/>
+          </a:ln>
+        </p:spPr>
+      </p:sp>
+      <p:pic>
+        <p:nvPicPr>
+          <p:cNvPr id="26" name="Image 5" descr="preencoded.png">    </p:cNvPr>
+          <p:cNvPicPr>
+            <a:picLocks noChangeAspect="1"/>
+          </p:cNvPicPr>
+          <p:nvPr/>
+        </p:nvPicPr>
+        <p:blipFill>
+          <a:blip r:embed="rId6"/>
+          <a:stretch>
+            <a:fillRect/>
+          </a:stretch>
+        </p:blipFill>
+        <p:spPr>
+          <a:xfrm>
+            <a:off x="6111850" y="3414370"/>
+            <a:ext cx="395021" cy="395021"/>
+          </a:xfrm>
+          <a:prstGeom prst="rect">
+            <a:avLst/>
+          </a:prstGeom>
+        </p:spPr>
+      </p:pic>
+      <p:sp>
+        <p:nvSpPr>
+          <p:cNvPr id="27" name="Text 19"/>
+          <p:cNvSpPr txBox="1"/>
+          <p:nvPr/>
+        </p:nvSpPr>
+        <p:spPr>
+          <a:xfrm>
+            <a:off x="5623560" y="4114800"/>
+            <a:ext cx="1371600" cy="274320"/>
+          </a:xfrm>
+          <a:prstGeom prst="rect">
+            <a:avLst/>
+          </a:prstGeom>
+          <a:noFill/>
+          <a:ln/>
+        </p:spPr>
+        <p:txBody>
+          <a:bodyPr wrap="square" lIns="0" tIns="0" rIns="0" bIns="0" rtlCol="0" anchor="t"/>
+          <a:lstStyle/>
+          <a:p>
+            <a:pPr algn="ctr" indent="0" marL="0">
+              <a:buNone/>
+            </a:pPr>
+            <a:r>
+              <a:rPr lang="en-US" sz="1350" b="1" dirty="0">
+                <a:solidFill>
+                  <a:srgbClr val="0B1F2A"/>
+                </a:solidFill>
+                <a:latin typeface="Calibri" pitchFamily="34" charset="0"/>
+                <a:ea typeface="Calibri" pitchFamily="34" charset="-122"/>
+                <a:cs typeface="Calibri" pitchFamily="34" charset="-120"/>
+              </a:rPr>
+              <a:t>Governance</a:t>
+            </a:r>
+            <a:endParaRPr lang="en-US" sz="1350" dirty="0"/>
+          </a:p>
+        </p:txBody>
+      </p:sp>
+      <p:sp>
+        <p:nvSpPr>
+          <p:cNvPr id="28" name="Shape 20"/>
+          <p:cNvSpPr/>
+          <p:nvPr/>
+        </p:nvSpPr>
+        <p:spPr>
+          <a:xfrm>
+            <a:off x="5440680" y="1371600"/>
+            <a:ext cx="822960" cy="822960"/>
           </a:xfrm>
           <a:prstGeom prst="ellipse">
             <a:avLst/>
@@ -4547,22 +4219,22 @@
       </p:sp>
       <p:pic>
         <p:nvPicPr>
-          <p:cNvPr id="19" name="Image 3" descr="preencoded.png">    </p:cNvPr>
+          <p:cNvPr id="29" name="Image 6" descr="preencoded.png">    </p:cNvPr>
           <p:cNvPicPr>
             <a:picLocks noChangeAspect="1"/>
           </p:cNvPicPr>
           <p:nvPr/>
         </p:nvPicPr>
         <p:blipFill>
-          <a:blip r:embed="rId4"/>
+          <a:blip r:embed="rId7"/>
           <a:stretch>
             <a:fillRect/>
           </a:stretch>
         </p:blipFill>
         <p:spPr>
           <a:xfrm>
-            <a:off x="8088782" y="1678838"/>
-            <a:ext cx="482803" cy="482803"/>
+            <a:off x="5654650" y="1585570"/>
+            <a:ext cx="395021" cy="395021"/>
           </a:xfrm>
           <a:prstGeom prst="rect">
             <a:avLst/>
@@ -4571,14 +4243,14 @@
       </p:pic>
       <p:sp>
         <p:nvSpPr>
-          <p:cNvPr id="20" name="Text 14"/>
-          <p:cNvSpPr txBox="1"/>
-          <p:nvPr/>
-        </p:nvSpPr>
-        <p:spPr>
-          <a:xfrm>
-            <a:off x="7324344" y="2560320"/>
-            <a:ext cx="2011680" cy="320040"/>
+          <p:cNvPr id="30" name="Text 21"/>
+          <p:cNvSpPr txBox="1"/>
+          <p:nvPr/>
+        </p:nvSpPr>
+        <p:spPr>
+          <a:xfrm>
+            <a:off x="4892040" y="2286000"/>
+            <a:ext cx="1920240" cy="320040"/>
           </a:xfrm>
           <a:prstGeom prst="rect">
             <a:avLst/>
@@ -4594,7 +4266,7 @@
               <a:buNone/>
             </a:pPr>
             <a:r>
-              <a:rPr lang="en-US" sz="1700" b="1" dirty="0">
+              <a:rPr lang="en-US" sz="1400" b="1" dirty="0">
                 <a:solidFill>
                   <a:srgbClr val="0B1F2A"/>
                 </a:solidFill>
@@ -4602,217 +4274,49 @@
                 <a:ea typeface="Calibri" pitchFamily="34" charset="-122"/>
                 <a:cs typeface="Calibri" pitchFamily="34" charset="-120"/>
               </a:rPr>
-              <a:t>Policy v1</a:t>
-            </a:r>
-            <a:endParaRPr lang="en-US" sz="1700" dirty="0"/>
-          </a:p>
-        </p:txBody>
-      </p:sp>
-      <p:sp>
-        <p:nvSpPr>
-          <p:cNvPr id="21" name="Text 15"/>
-          <p:cNvSpPr txBox="1"/>
-          <p:nvPr/>
-        </p:nvSpPr>
-        <p:spPr>
-          <a:xfrm>
-            <a:off x="7324344" y="2907792"/>
-            <a:ext cx="2011680" cy="548640"/>
-          </a:xfrm>
-          <a:prstGeom prst="rect">
-            <a:avLst/>
-          </a:prstGeom>
-          <a:noFill/>
-          <a:ln/>
-        </p:spPr>
-        <p:txBody>
-          <a:bodyPr wrap="square" lIns="0" tIns="0" rIns="0" bIns="0" rtlCol="0" anchor="t"/>
-          <a:lstStyle/>
-          <a:p>
-            <a:pPr algn="ctr" indent="0" marL="0">
-              <a:buNone/>
-            </a:pPr>
-            <a:r>
-              <a:rPr lang="en-US" sz="1250" dirty="0">
-                <a:solidFill>
-                  <a:srgbClr val="5B6770"/>
-                </a:solidFill>
-                <a:latin typeface="Calibri" pitchFamily="34" charset="0"/>
-                <a:ea typeface="Calibri" pitchFamily="34" charset="-122"/>
-                <a:cs typeface="Calibri" pitchFamily="34" charset="-120"/>
-              </a:rPr>
-              <a:t>Versioned rules outside the prompt</a:t>
-            </a:r>
-            <a:endParaRPr lang="en-US" sz="1250" dirty="0"/>
-          </a:p>
-        </p:txBody>
-      </p:sp>
-      <p:sp>
-        <p:nvSpPr>
-          <p:cNvPr id="22" name="Shape 16"/>
+              <a:t>Independent Audit</a:t>
+            </a:r>
+            <a:endParaRPr lang="en-US" sz="1400" dirty="0"/>
+          </a:p>
+        </p:txBody>
+      </p:sp>
+      <p:sp>
+        <p:nvSpPr>
+          <p:cNvPr id="31" name="Shape 22"/>
           <p:cNvSpPr/>
           <p:nvPr/>
         </p:nvSpPr>
         <p:spPr>
           <a:xfrm>
-            <a:off x="9107424" y="1783080"/>
-            <a:ext cx="457200" cy="274320"/>
-          </a:xfrm>
-          <a:prstGeom prst="rightArrow">
-            <a:avLst/>
-          </a:prstGeom>
-          <a:solidFill>
-            <a:srgbClr val="C9D3D0"/>
-          </a:solidFill>
-          <a:ln w="12700">
+            <a:off x="4206240" y="1783080"/>
+            <a:ext cx="1188720" cy="0"/>
+          </a:xfrm>
+          <a:prstGeom prst="line">
+            <a:avLst/>
+          </a:prstGeom>
+          <a:noFill/>
+          <a:ln w="19050">
             <a:solidFill>
-              <a:srgbClr val="C9D3D0"/>
+              <a:srgbClr val="F2A541"/>
             </a:solidFill>
-            <a:prstDash val="solid"/>
+            <a:prstDash val="dash"/>
           </a:ln>
         </p:spPr>
       </p:sp>
       <p:sp>
         <p:nvSpPr>
-          <p:cNvPr id="23" name="Shape 17"/>
+          <p:cNvPr id="32" name="Shape 23"/>
           <p:cNvSpPr/>
           <p:nvPr/>
         </p:nvSpPr>
         <p:spPr>
           <a:xfrm>
-            <a:off x="10040112" y="1417320"/>
-            <a:ext cx="1005840" cy="1005840"/>
-          </a:xfrm>
-          <a:prstGeom prst="ellipse">
-            <a:avLst/>
-          </a:prstGeom>
-          <a:solidFill>
-            <a:srgbClr val="0B6E4F"/>
-          </a:solidFill>
-          <a:ln w="12700">
-            <a:solidFill>
-              <a:srgbClr val="0B6E4F"/>
-            </a:solidFill>
-            <a:prstDash val="solid"/>
-          </a:ln>
-        </p:spPr>
-      </p:sp>
-      <p:pic>
-        <p:nvPicPr>
-          <p:cNvPr id="24" name="Image 4" descr="preencoded.png">    </p:cNvPr>
-          <p:cNvPicPr>
-            <a:picLocks noChangeAspect="1"/>
-          </p:cNvPicPr>
-          <p:nvPr/>
-        </p:nvPicPr>
-        <p:blipFill>
-          <a:blip r:embed="rId5"/>
-          <a:stretch>
-            <a:fillRect/>
-          </a:stretch>
-        </p:blipFill>
-        <p:spPr>
-          <a:xfrm>
-            <a:off x="10301630" y="1678838"/>
-            <a:ext cx="482803" cy="482803"/>
-          </a:xfrm>
-          <a:prstGeom prst="rect">
-            <a:avLst/>
-          </a:prstGeom>
-        </p:spPr>
-      </p:pic>
-      <p:sp>
-        <p:nvSpPr>
-          <p:cNvPr id="25" name="Text 18"/>
-          <p:cNvSpPr txBox="1"/>
-          <p:nvPr/>
-        </p:nvSpPr>
-        <p:spPr>
-          <a:xfrm>
-            <a:off x="9537192" y="2560320"/>
-            <a:ext cx="2011680" cy="320040"/>
-          </a:xfrm>
-          <a:prstGeom prst="rect">
-            <a:avLst/>
-          </a:prstGeom>
-          <a:noFill/>
-          <a:ln/>
-        </p:spPr>
-        <p:txBody>
-          <a:bodyPr wrap="square" lIns="0" tIns="0" rIns="0" bIns="0" rtlCol="0" anchor="t"/>
-          <a:lstStyle/>
-          <a:p>
-            <a:pPr algn="ctr" indent="0" marL="0">
-              <a:buNone/>
-            </a:pPr>
-            <a:r>
-              <a:rPr lang="en-US" sz="1700" b="1" dirty="0">
-                <a:solidFill>
-                  <a:srgbClr val="0B1F2A"/>
-                </a:solidFill>
-                <a:latin typeface="Calibri" pitchFamily="34" charset="0"/>
-                <a:ea typeface="Calibri" pitchFamily="34" charset="-122"/>
-                <a:cs typeface="Calibri" pitchFamily="34" charset="-120"/>
-              </a:rPr>
-              <a:t>Data</a:t>
-            </a:r>
-            <a:endParaRPr lang="en-US" sz="1700" dirty="0"/>
-          </a:p>
-        </p:txBody>
-      </p:sp>
-      <p:sp>
-        <p:nvSpPr>
-          <p:cNvPr id="26" name="Text 19"/>
-          <p:cNvSpPr txBox="1"/>
-          <p:nvPr/>
-        </p:nvSpPr>
-        <p:spPr>
-          <a:xfrm>
-            <a:off x="9537192" y="2907792"/>
-            <a:ext cx="2011680" cy="548640"/>
-          </a:xfrm>
-          <a:prstGeom prst="rect">
-            <a:avLst/>
-          </a:prstGeom>
-          <a:noFill/>
-          <a:ln/>
-        </p:spPr>
-        <p:txBody>
-          <a:bodyPr wrap="square" lIns="0" tIns="0" rIns="0" bIns="0" rtlCol="0" anchor="t"/>
-          <a:lstStyle/>
-          <a:p>
-            <a:pPr algn="ctr" indent="0" marL="0">
-              <a:buNone/>
-            </a:pPr>
-            <a:r>
-              <a:rPr lang="en-US" sz="1250" dirty="0">
-                <a:solidFill>
-                  <a:srgbClr val="5B6770"/>
-                </a:solidFill>
-                <a:latin typeface="Calibri" pitchFamily="34" charset="0"/>
-                <a:ea typeface="Calibri" pitchFamily="34" charset="-122"/>
-                <a:cs typeface="Calibri" pitchFamily="34" charset="-120"/>
-              </a:rPr>
-              <a:t>BigQuery gold, Firestore cases</a:t>
-            </a:r>
-            <a:endParaRPr lang="en-US" sz="1250" dirty="0"/>
-          </a:p>
-        </p:txBody>
-      </p:sp>
-      <p:sp>
-        <p:nvSpPr>
-          <p:cNvPr id="27" name="Shape 20"/>
-          <p:cNvSpPr/>
-          <p:nvPr/>
-        </p:nvSpPr>
-        <p:spPr>
-          <a:xfrm>
-            <a:off x="548640" y="3840480"/>
-            <a:ext cx="3566160" cy="2240280"/>
+            <a:off x="548640" y="4754880"/>
+            <a:ext cx="6309360" cy="1371600"/>
           </a:xfrm>
           <a:prstGeom prst="roundRect">
             <a:avLst>
-              <a:gd name="adj" fmla="val 4898"/>
+              <a:gd name="adj" fmla="val 8000"/>
             </a:avLst>
           </a:prstGeom>
           <a:solidFill>
@@ -4828,145 +4332,57 @@
       </p:sp>
       <p:sp>
         <p:nvSpPr>
-          <p:cNvPr id="28" name="Shape 21"/>
+          <p:cNvPr id="33" name="Text 24"/>
+          <p:cNvSpPr txBox="1"/>
+          <p:nvPr/>
+        </p:nvSpPr>
+        <p:spPr>
+          <a:xfrm>
+            <a:off x="777240" y="4937760"/>
+            <a:ext cx="5852160" cy="1097280"/>
+          </a:xfrm>
+          <a:prstGeom prst="rect">
+            <a:avLst/>
+          </a:prstGeom>
+          <a:noFill/>
+          <a:ln/>
+        </p:spPr>
+        <p:txBody>
+          <a:bodyPr wrap="square" lIns="0" tIns="0" rIns="0" bIns="0" rtlCol="0" anchor="t"/>
+          <a:lstStyle/>
+          <a:p>
+            <a:pPr indent="0" marL="0">
+              <a:buNone/>
+            </a:pPr>
+            <a:r>
+              <a:rPr lang="en-US" sz="1500" dirty="0">
+                <a:solidFill>
+                  <a:srgbClr val="0B1F2A"/>
+                </a:solidFill>
+                <a:latin typeface="Calibri" pitchFamily="34" charset="0"/>
+                <a:ea typeface="Calibri" pitchFamily="34" charset="-122"/>
+                <a:cs typeface="Calibri" pitchFamily="34" charset="-120"/>
+              </a:rPr>
+              <a:t>Governance challenged the design. Audit reviewed it cold. Every vice presidency owns its folder, its rules and its tests.</a:t>
+            </a:r>
+            <a:endParaRPr lang="en-US" sz="1500" dirty="0"/>
+          </a:p>
+        </p:txBody>
+      </p:sp>
+      <p:sp>
+        <p:nvSpPr>
+          <p:cNvPr id="34" name="Shape 25"/>
           <p:cNvSpPr/>
           <p:nvPr/>
         </p:nvSpPr>
         <p:spPr>
           <a:xfrm>
-            <a:off x="777240" y="4041648"/>
-            <a:ext cx="566928" cy="566928"/>
-          </a:xfrm>
-          <a:prstGeom prst="ellipse">
-            <a:avLst/>
-          </a:prstGeom>
-          <a:solidFill>
-            <a:srgbClr val="0B6E4F"/>
-          </a:solidFill>
-          <a:ln w="12700">
-            <a:solidFill>
-              <a:srgbClr val="0B6E4F"/>
-            </a:solidFill>
-            <a:prstDash val="solid"/>
-          </a:ln>
-        </p:spPr>
-      </p:sp>
-      <p:pic>
-        <p:nvPicPr>
-          <p:cNvPr id="29" name="Image 5" descr="preencoded.png">    </p:cNvPr>
-          <p:cNvPicPr>
-            <a:picLocks noChangeAspect="1"/>
-          </p:cNvPicPr>
-          <p:nvPr/>
-        </p:nvPicPr>
-        <p:blipFill>
-          <a:blip r:embed="rId6"/>
-          <a:stretch>
-            <a:fillRect/>
-          </a:stretch>
-        </p:blipFill>
-        <p:spPr>
-          <a:xfrm>
-            <a:off x="924641" y="4189049"/>
-            <a:ext cx="272125" cy="272125"/>
-          </a:xfrm>
-          <a:prstGeom prst="rect">
-            <a:avLst/>
-          </a:prstGeom>
-        </p:spPr>
-      </p:pic>
-      <p:sp>
-        <p:nvSpPr>
-          <p:cNvPr id="30" name="Text 22"/>
-          <p:cNvSpPr txBox="1"/>
-          <p:nvPr/>
-        </p:nvSpPr>
-        <p:spPr>
-          <a:xfrm>
-            <a:off x="1508760" y="4160520"/>
-            <a:ext cx="2468880" cy="365760"/>
-          </a:xfrm>
-          <a:prstGeom prst="rect">
-            <a:avLst/>
-          </a:prstGeom>
-          <a:noFill/>
-          <a:ln/>
-        </p:spPr>
-        <p:txBody>
-          <a:bodyPr wrap="square" lIns="0" tIns="0" rIns="0" bIns="0" rtlCol="0" anchor="t"/>
-          <a:lstStyle/>
-          <a:p>
-            <a:pPr indent="0" marL="0">
-              <a:buNone/>
-            </a:pPr>
-            <a:r>
-              <a:rPr lang="en-US" sz="1700" b="1" dirty="0">
-                <a:solidFill>
-                  <a:srgbClr val="0B1F2A"/>
-                </a:solidFill>
-                <a:latin typeface="Calibri" pitchFamily="34" charset="0"/>
-                <a:ea typeface="Calibri" pitchFamily="34" charset="-122"/>
-                <a:cs typeface="Calibri" pitchFamily="34" charset="-120"/>
-              </a:rPr>
-              <a:t>Normal</a:t>
-            </a:r>
-            <a:endParaRPr lang="en-US" sz="1700" dirty="0"/>
-          </a:p>
-        </p:txBody>
-      </p:sp>
-      <p:sp>
-        <p:nvSpPr>
-          <p:cNvPr id="31" name="Text 23"/>
-          <p:cNvSpPr txBox="1"/>
-          <p:nvPr/>
-        </p:nvSpPr>
-        <p:spPr>
-          <a:xfrm>
-            <a:off x="777240" y="4800600"/>
-            <a:ext cx="3108960" cy="1188720"/>
-          </a:xfrm>
-          <a:prstGeom prst="rect">
-            <a:avLst/>
-          </a:prstGeom>
-          <a:noFill/>
-          <a:ln/>
-        </p:spPr>
-        <p:txBody>
-          <a:bodyPr wrap="square" lIns="0" tIns="0" rIns="0" bIns="0" rtlCol="0" anchor="t"/>
-          <a:lstStyle/>
-          <a:p>
-            <a:pPr indent="0" marL="0">
-              <a:buNone/>
-            </a:pPr>
-            <a:r>
-              <a:rPr lang="en-US" sz="1400" dirty="0">
-                <a:solidFill>
-                  <a:srgbClr val="5B6770"/>
-                </a:solidFill>
-                <a:latin typeface="Calibri" pitchFamily="34" charset="0"/>
-                <a:ea typeface="Calibri" pitchFamily="34" charset="-122"/>
-                <a:cs typeface="Calibri" pitchFamily="34" charset="-120"/>
-              </a:rPr>
-              <a:t>Server pins the charge. Nothing runs until the customer approves on screen.</a:t>
-            </a:r>
-            <a:endParaRPr lang="en-US" sz="1400" dirty="0"/>
-          </a:p>
-        </p:txBody>
-      </p:sp>
-      <p:sp>
-        <p:nvSpPr>
-          <p:cNvPr id="32" name="Shape 24"/>
-          <p:cNvSpPr/>
-          <p:nvPr/>
-        </p:nvSpPr>
-        <p:spPr>
-          <a:xfrm>
-            <a:off x="4297680" y="3840480"/>
-            <a:ext cx="3566160" cy="2240280"/>
+            <a:off x="7315200" y="1325880"/>
+            <a:ext cx="2057400" cy="1508760"/>
           </a:xfrm>
           <a:prstGeom prst="roundRect">
             <a:avLst>
-              <a:gd name="adj" fmla="val 4898"/>
+              <a:gd name="adj" fmla="val 7273"/>
             </a:avLst>
           </a:prstGeom>
           <a:solidFill>
@@ -4982,63 +4398,14 @@
       </p:sp>
       <p:sp>
         <p:nvSpPr>
-          <p:cNvPr id="33" name="Shape 25"/>
-          <p:cNvSpPr/>
-          <p:nvPr/>
-        </p:nvSpPr>
-        <p:spPr>
-          <a:xfrm>
-            <a:off x="4526280" y="4041648"/>
-            <a:ext cx="566928" cy="566928"/>
-          </a:xfrm>
-          <a:prstGeom prst="ellipse">
-            <a:avLst/>
-          </a:prstGeom>
-          <a:solidFill>
-            <a:srgbClr val="F2A541"/>
-          </a:solidFill>
-          <a:ln w="12700">
-            <a:solidFill>
-              <a:srgbClr val="F2A541"/>
-            </a:solidFill>
-            <a:prstDash val="solid"/>
-          </a:ln>
-        </p:spPr>
-      </p:sp>
-      <p:pic>
-        <p:nvPicPr>
-          <p:cNvPr id="34" name="Image 6" descr="preencoded.png">    </p:cNvPr>
-          <p:cNvPicPr>
-            <a:picLocks noChangeAspect="1"/>
-          </p:cNvPicPr>
-          <p:nvPr/>
-        </p:nvPicPr>
-        <p:blipFill>
-          <a:blip r:embed="rId7"/>
-          <a:stretch>
-            <a:fillRect/>
-          </a:stretch>
-        </p:blipFill>
-        <p:spPr>
-          <a:xfrm>
-            <a:off x="4673681" y="4189049"/>
-            <a:ext cx="272125" cy="272125"/>
-          </a:xfrm>
-          <a:prstGeom prst="rect">
-            <a:avLst/>
-          </a:prstGeom>
-        </p:spPr>
-      </p:pic>
-      <p:sp>
-        <p:nvSpPr>
           <p:cNvPr id="35" name="Text 26"/>
           <p:cNvSpPr txBox="1"/>
           <p:nvPr/>
         </p:nvSpPr>
         <p:spPr>
           <a:xfrm>
-            <a:off x="5257800" y="4160520"/>
-            <a:ext cx="2468880" cy="365760"/>
+            <a:off x="7543800" y="1463040"/>
+            <a:ext cx="1600200" cy="822960"/>
           </a:xfrm>
           <a:prstGeom prst="rect">
             <a:avLst/>
@@ -5054,17 +4421,17 @@
               <a:buNone/>
             </a:pPr>
             <a:r>
-              <a:rPr lang="en-US" sz="1700" b="1" dirty="0">
-                <a:solidFill>
-                  <a:srgbClr val="0B1F2A"/>
-                </a:solidFill>
-                <a:latin typeface="Calibri" pitchFamily="34" charset="0"/>
-                <a:ea typeface="Calibri" pitchFamily="34" charset="-122"/>
-                <a:cs typeface="Calibri" pitchFamily="34" charset="-120"/>
-              </a:rPr>
-              <a:t>Ambiguous or unsupported</a:t>
-            </a:r>
-            <a:endParaRPr lang="en-US" sz="1700" dirty="0"/>
+              <a:rPr lang="en-US" sz="4000" b="1" dirty="0">
+                <a:solidFill>
+                  <a:srgbClr val="0B6E4F"/>
+                </a:solidFill>
+                <a:latin typeface="Calibri" pitchFamily="34" charset="0"/>
+                <a:ea typeface="Calibri" pitchFamily="34" charset="-122"/>
+                <a:cs typeface="Calibri" pitchFamily="34" charset="-120"/>
+              </a:rPr>
+              <a:t>21</a:t>
+            </a:r>
+            <a:endParaRPr lang="en-US" sz="4000" dirty="0"/>
           </a:p>
         </p:txBody>
       </p:sp>
@@ -5076,8 +4443,8 @@
         </p:nvSpPr>
         <p:spPr>
           <a:xfrm>
-            <a:off x="4526280" y="4800600"/>
-            <a:ext cx="3108960" cy="1188720"/>
+            <a:off x="7543800" y="2286000"/>
+            <a:ext cx="1600200" cy="502920"/>
           </a:xfrm>
           <a:prstGeom prst="rect">
             <a:avLst/>
@@ -5093,7 +4460,7 @@
               <a:buNone/>
             </a:pPr>
             <a:r>
-              <a:rPr lang="en-US" sz="1400" dirty="0">
+              <a:rPr lang="en-US" sz="1350" dirty="0">
                 <a:solidFill>
                   <a:srgbClr val="5B6770"/>
                 </a:solidFill>
@@ -5101,9 +4468,9 @@
                 <a:ea typeface="Calibri" pitchFamily="34" charset="-122"/>
                 <a:cs typeface="Calibri" pitchFamily="34" charset="-120"/>
               </a:rPr>
-              <a:t>Asks which charge. Policy answers only with a cited source. Abstains on credit.</a:t>
-            </a:r>
-            <a:endParaRPr lang="en-US" sz="1400" dirty="0"/>
+              <a:t>research studies before writing code</a:t>
+            </a:r>
+            <a:endParaRPr lang="en-US" sz="1350" dirty="0"/>
           </a:p>
         </p:txBody>
       </p:sp>
@@ -5115,12 +4482,12 @@
         </p:nvSpPr>
         <p:spPr>
           <a:xfrm>
-            <a:off x="8046720" y="3840480"/>
-            <a:ext cx="3566160" cy="2240280"/>
+            <a:off x="9555480" y="1325880"/>
+            <a:ext cx="2057400" cy="1508760"/>
           </a:xfrm>
           <a:prstGeom prst="roundRect">
             <a:avLst>
-              <a:gd name="adj" fmla="val 4898"/>
+              <a:gd name="adj" fmla="val 7273"/>
             </a:avLst>
           </a:prstGeom>
           <a:solidFill>
@@ -5136,17 +4503,307 @@
       </p:sp>
       <p:sp>
         <p:nvSpPr>
-          <p:cNvPr id="38" name="Shape 29"/>
+          <p:cNvPr id="38" name="Text 29"/>
+          <p:cNvSpPr txBox="1"/>
+          <p:nvPr/>
+        </p:nvSpPr>
+        <p:spPr>
+          <a:xfrm>
+            <a:off x="9784080" y="1463040"/>
+            <a:ext cx="1600200" cy="822960"/>
+          </a:xfrm>
+          <a:prstGeom prst="rect">
+            <a:avLst/>
+          </a:prstGeom>
+          <a:noFill/>
+          <a:ln/>
+        </p:spPr>
+        <p:txBody>
+          <a:bodyPr wrap="square" lIns="0" tIns="0" rIns="0" bIns="0" rtlCol="0" anchor="t"/>
+          <a:lstStyle/>
+          <a:p>
+            <a:pPr indent="0" marL="0">
+              <a:buNone/>
+            </a:pPr>
+            <a:r>
+              <a:rPr lang="en-US" sz="4000" b="1" dirty="0">
+                <a:solidFill>
+                  <a:srgbClr val="0B6E4F"/>
+                </a:solidFill>
+                <a:latin typeface="Calibri" pitchFamily="34" charset="0"/>
+                <a:ea typeface="Calibri" pitchFamily="34" charset="-122"/>
+                <a:cs typeface="Calibri" pitchFamily="34" charset="-120"/>
+              </a:rPr>
+              <a:t>34</a:t>
+            </a:r>
+            <a:endParaRPr lang="en-US" sz="4000" dirty="0"/>
+          </a:p>
+        </p:txBody>
+      </p:sp>
+      <p:sp>
+        <p:nvSpPr>
+          <p:cNvPr id="39" name="Text 30"/>
+          <p:cNvSpPr txBox="1"/>
+          <p:nvPr/>
+        </p:nvSpPr>
+        <p:spPr>
+          <a:xfrm>
+            <a:off x="9784080" y="2286000"/>
+            <a:ext cx="1600200" cy="502920"/>
+          </a:xfrm>
+          <a:prstGeom prst="rect">
+            <a:avLst/>
+          </a:prstGeom>
+          <a:noFill/>
+          <a:ln/>
+        </p:spPr>
+        <p:txBody>
+          <a:bodyPr wrap="square" lIns="0" tIns="0" rIns="0" bIns="0" rtlCol="0" anchor="t"/>
+          <a:lstStyle/>
+          <a:p>
+            <a:pPr indent="0" marL="0">
+              <a:buNone/>
+            </a:pPr>
+            <a:r>
+              <a:rPr lang="en-US" sz="1350" dirty="0">
+                <a:solidFill>
+                  <a:srgbClr val="5B6770"/>
+                </a:solidFill>
+                <a:latin typeface="Calibri" pitchFamily="34" charset="0"/>
+                <a:ea typeface="Calibri" pitchFamily="34" charset="-122"/>
+                <a:cs typeface="Calibri" pitchFamily="34" charset="-120"/>
+              </a:rPr>
+              <a:t>decisions, each with its reason</a:t>
+            </a:r>
+            <a:endParaRPr lang="en-US" sz="1350" dirty="0"/>
+          </a:p>
+        </p:txBody>
+      </p:sp>
+      <p:sp>
+        <p:nvSpPr>
+          <p:cNvPr id="40" name="Shape 31"/>
           <p:cNvSpPr/>
           <p:nvPr/>
         </p:nvSpPr>
         <p:spPr>
           <a:xfrm>
-            <a:off x="8275320" y="4041648"/>
-            <a:ext cx="566928" cy="566928"/>
-          </a:xfrm>
-          <a:prstGeom prst="ellipse">
-            <a:avLst/>
+            <a:off x="7315200" y="3017520"/>
+            <a:ext cx="2057400" cy="1508760"/>
+          </a:xfrm>
+          <a:prstGeom prst="roundRect">
+            <a:avLst>
+              <a:gd name="adj" fmla="val 7273"/>
+            </a:avLst>
+          </a:prstGeom>
+          <a:solidFill>
+            <a:srgbClr val="F1F5F4"/>
+          </a:solidFill>
+          <a:ln w="12700">
+            <a:solidFill>
+              <a:srgbClr val="F1F5F4"/>
+            </a:solidFill>
+            <a:prstDash val="solid"/>
+          </a:ln>
+        </p:spPr>
+      </p:sp>
+      <p:sp>
+        <p:nvSpPr>
+          <p:cNvPr id="41" name="Text 32"/>
+          <p:cNvSpPr txBox="1"/>
+          <p:nvPr/>
+        </p:nvSpPr>
+        <p:spPr>
+          <a:xfrm>
+            <a:off x="7543800" y="3154680"/>
+            <a:ext cx="1600200" cy="822960"/>
+          </a:xfrm>
+          <a:prstGeom prst="rect">
+            <a:avLst/>
+          </a:prstGeom>
+          <a:noFill/>
+          <a:ln/>
+        </p:spPr>
+        <p:txBody>
+          <a:bodyPr wrap="square" lIns="0" tIns="0" rIns="0" bIns="0" rtlCol="0" anchor="t"/>
+          <a:lstStyle/>
+          <a:p>
+            <a:pPr indent="0" marL="0">
+              <a:buNone/>
+            </a:pPr>
+            <a:r>
+              <a:rPr lang="en-US" sz="4000" b="1" dirty="0">
+                <a:solidFill>
+                  <a:srgbClr val="0B6E4F"/>
+                </a:solidFill>
+                <a:latin typeface="Calibri" pitchFamily="34" charset="0"/>
+                <a:ea typeface="Calibri" pitchFamily="34" charset="-122"/>
+                <a:cs typeface="Calibri" pitchFamily="34" charset="-120"/>
+              </a:rPr>
+              <a:t>10</a:t>
+            </a:r>
+            <a:endParaRPr lang="en-US" sz="4000" dirty="0"/>
+          </a:p>
+        </p:txBody>
+      </p:sp>
+      <p:sp>
+        <p:nvSpPr>
+          <p:cNvPr id="42" name="Text 33"/>
+          <p:cNvSpPr txBox="1"/>
+          <p:nvPr/>
+        </p:nvSpPr>
+        <p:spPr>
+          <a:xfrm>
+            <a:off x="7543800" y="3977640"/>
+            <a:ext cx="1600200" cy="502920"/>
+          </a:xfrm>
+          <a:prstGeom prst="rect">
+            <a:avLst/>
+          </a:prstGeom>
+          <a:noFill/>
+          <a:ln/>
+        </p:spPr>
+        <p:txBody>
+          <a:bodyPr wrap="square" lIns="0" tIns="0" rIns="0" bIns="0" rtlCol="0" anchor="t"/>
+          <a:lstStyle/>
+          <a:p>
+            <a:pPr indent="0" marL="0">
+              <a:buNone/>
+            </a:pPr>
+            <a:r>
+              <a:rPr lang="en-US" sz="1350" dirty="0">
+                <a:solidFill>
+                  <a:srgbClr val="5B6770"/>
+                </a:solidFill>
+                <a:latin typeface="Calibri" pitchFamily="34" charset="0"/>
+                <a:ea typeface="Calibri" pitchFamily="34" charset="-122"/>
+                <a:cs typeface="Calibri" pitchFamily="34" charset="-120"/>
+              </a:rPr>
+              <a:t>architecture decision records</a:t>
+            </a:r>
+            <a:endParaRPr lang="en-US" sz="1350" dirty="0"/>
+          </a:p>
+        </p:txBody>
+      </p:sp>
+      <p:sp>
+        <p:nvSpPr>
+          <p:cNvPr id="43" name="Shape 34"/>
+          <p:cNvSpPr/>
+          <p:nvPr/>
+        </p:nvSpPr>
+        <p:spPr>
+          <a:xfrm>
+            <a:off x="9555480" y="3017520"/>
+            <a:ext cx="2057400" cy="1508760"/>
+          </a:xfrm>
+          <a:prstGeom prst="roundRect">
+            <a:avLst>
+              <a:gd name="adj" fmla="val 7273"/>
+            </a:avLst>
+          </a:prstGeom>
+          <a:solidFill>
+            <a:srgbClr val="F1F5F4"/>
+          </a:solidFill>
+          <a:ln w="12700">
+            <a:solidFill>
+              <a:srgbClr val="F1F5F4"/>
+            </a:solidFill>
+            <a:prstDash val="solid"/>
+          </a:ln>
+        </p:spPr>
+      </p:sp>
+      <p:sp>
+        <p:nvSpPr>
+          <p:cNvPr id="44" name="Text 35"/>
+          <p:cNvSpPr txBox="1"/>
+          <p:nvPr/>
+        </p:nvSpPr>
+        <p:spPr>
+          <a:xfrm>
+            <a:off x="9784080" y="3154680"/>
+            <a:ext cx="1600200" cy="822960"/>
+          </a:xfrm>
+          <a:prstGeom prst="rect">
+            <a:avLst/>
+          </a:prstGeom>
+          <a:noFill/>
+          <a:ln/>
+        </p:spPr>
+        <p:txBody>
+          <a:bodyPr wrap="square" lIns="0" tIns="0" rIns="0" bIns="0" rtlCol="0" anchor="t"/>
+          <a:lstStyle/>
+          <a:p>
+            <a:pPr indent="0" marL="0">
+              <a:buNone/>
+            </a:pPr>
+            <a:r>
+              <a:rPr lang="en-US" sz="4000" b="1" dirty="0">
+                <a:solidFill>
+                  <a:srgbClr val="0B6E4F"/>
+                </a:solidFill>
+                <a:latin typeface="Calibri" pitchFamily="34" charset="0"/>
+                <a:ea typeface="Calibri" pitchFamily="34" charset="-122"/>
+                <a:cs typeface="Calibri" pitchFamily="34" charset="-120"/>
+              </a:rPr>
+              <a:t>66</a:t>
+            </a:r>
+            <a:endParaRPr lang="en-US" sz="4000" dirty="0"/>
+          </a:p>
+        </p:txBody>
+      </p:sp>
+      <p:sp>
+        <p:nvSpPr>
+          <p:cNvPr id="45" name="Text 36"/>
+          <p:cNvSpPr txBox="1"/>
+          <p:nvPr/>
+        </p:nvSpPr>
+        <p:spPr>
+          <a:xfrm>
+            <a:off x="9784080" y="3977640"/>
+            <a:ext cx="1600200" cy="502920"/>
+          </a:xfrm>
+          <a:prstGeom prst="rect">
+            <a:avLst/>
+          </a:prstGeom>
+          <a:noFill/>
+          <a:ln/>
+        </p:spPr>
+        <p:txBody>
+          <a:bodyPr wrap="square" lIns="0" tIns="0" rIns="0" bIns="0" rtlCol="0" anchor="t"/>
+          <a:lstStyle/>
+          <a:p>
+            <a:pPr indent="0" marL="0">
+              <a:buNone/>
+            </a:pPr>
+            <a:r>
+              <a:rPr lang="en-US" sz="1350" dirty="0">
+                <a:solidFill>
+                  <a:srgbClr val="5B6770"/>
+                </a:solidFill>
+                <a:latin typeface="Calibri" pitchFamily="34" charset="0"/>
+                <a:ea typeface="Calibri" pitchFamily="34" charset="-122"/>
+                <a:cs typeface="Calibri" pitchFamily="34" charset="-120"/>
+              </a:rPr>
+              <a:t>sources tracked by Audit</a:t>
+            </a:r>
+            <a:endParaRPr lang="en-US" sz="1350" dirty="0"/>
+          </a:p>
+        </p:txBody>
+      </p:sp>
+      <p:sp>
+        <p:nvSpPr>
+          <p:cNvPr id="46" name="Shape 37"/>
+          <p:cNvSpPr/>
+          <p:nvPr/>
+        </p:nvSpPr>
+        <p:spPr>
+          <a:xfrm>
+            <a:off x="7315200" y="4754880"/>
+            <a:ext cx="4297680" cy="1371600"/>
+          </a:xfrm>
+          <a:prstGeom prst="roundRect">
+            <a:avLst>
+              <a:gd name="adj" fmla="val 8000"/>
+            </a:avLst>
           </a:prstGeom>
           <a:solidFill>
             <a:srgbClr val="0B1F2A"/>
@@ -5159,40 +4816,16 @@
           </a:ln>
         </p:spPr>
       </p:sp>
-      <p:pic>
-        <p:nvPicPr>
-          <p:cNvPr id="39" name="Image 7" descr="preencoded.png">    </p:cNvPr>
-          <p:cNvPicPr>
-            <a:picLocks noChangeAspect="1"/>
-          </p:cNvPicPr>
-          <p:nvPr/>
-        </p:nvPicPr>
-        <p:blipFill>
-          <a:blip r:embed="rId8"/>
-          <a:stretch>
-            <a:fillRect/>
-          </a:stretch>
-        </p:blipFill>
-        <p:spPr>
-          <a:xfrm>
-            <a:off x="8422721" y="4189049"/>
-            <a:ext cx="272125" cy="272125"/>
-          </a:xfrm>
-          <a:prstGeom prst="rect">
-            <a:avLst/>
-          </a:prstGeom>
-        </p:spPr>
-      </p:pic>
-      <p:sp>
-        <p:nvSpPr>
-          <p:cNvPr id="40" name="Text 30"/>
-          <p:cNvSpPr txBox="1"/>
-          <p:nvPr/>
-        </p:nvSpPr>
-        <p:spPr>
-          <a:xfrm>
-            <a:off x="9006840" y="4160520"/>
-            <a:ext cx="2468880" cy="365760"/>
+      <p:sp>
+        <p:nvSpPr>
+          <p:cNvPr id="47" name="Text 38"/>
+          <p:cNvSpPr txBox="1"/>
+          <p:nvPr/>
+        </p:nvSpPr>
+        <p:spPr>
+          <a:xfrm>
+            <a:off x="7543800" y="4983480"/>
+            <a:ext cx="3840480" cy="1005840"/>
           </a:xfrm>
           <a:prstGeom prst="rect">
             <a:avLst/>
@@ -5208,62 +4841,23 @@
               <a:buNone/>
             </a:pPr>
             <a:r>
-              <a:rPr lang="en-US" sz="1700" b="1" dirty="0">
-                <a:solidFill>
-                  <a:srgbClr val="0B1F2A"/>
-                </a:solidFill>
-                <a:latin typeface="Calibri" pitchFamily="34" charset="0"/>
-                <a:ea typeface="Calibri" pitchFamily="34" charset="-122"/>
-                <a:cs typeface="Calibri" pitchFamily="34" charset="-120"/>
-              </a:rPr>
-              <a:t>Needs a human</a:t>
-            </a:r>
-            <a:endParaRPr lang="en-US" sz="1700" dirty="0"/>
-          </a:p>
-        </p:txBody>
-      </p:sp>
-      <p:sp>
-        <p:nvSpPr>
-          <p:cNvPr id="41" name="Text 31"/>
-          <p:cNvSpPr txBox="1"/>
-          <p:nvPr/>
-        </p:nvSpPr>
-        <p:spPr>
-          <a:xfrm>
-            <a:off x="8275320" y="4800600"/>
-            <a:ext cx="3108960" cy="1188720"/>
-          </a:xfrm>
-          <a:prstGeom prst="rect">
-            <a:avLst/>
-          </a:prstGeom>
-          <a:noFill/>
-          <a:ln/>
-        </p:spPr>
-        <p:txBody>
-          <a:bodyPr wrap="square" lIns="0" tIns="0" rIns="0" bIns="0" rtlCol="0" anchor="t"/>
-          <a:lstStyle/>
-          <a:p>
-            <a:pPr indent="0" marL="0">
-              <a:buNone/>
-            </a:pPr>
-            <a:r>
-              <a:rPr lang="en-US" sz="1400" dirty="0">
-                <a:solidFill>
-                  <a:srgbClr val="5B6770"/>
-                </a:solidFill>
-                <a:latin typeface="Calibri" pitchFamily="34" charset="0"/>
-                <a:ea typeface="Calibri" pitchFamily="34" charset="-122"/>
-                <a:cs typeface="Calibri" pitchFamily="34" charset="-120"/>
-              </a:rPr>
-              <a:t>19-field handoff package. AI copilot drafts, the expert edits and sends.</a:t>
-            </a:r>
-            <a:endParaRPr lang="en-US" sz="1400" dirty="0"/>
-          </a:p>
-        </p:txBody>
-      </p:sp>
-      <p:sp>
-        <p:nvSpPr>
-          <p:cNvPr id="42" name="Text 32"/>
+              <a:rPr lang="en-US" sz="1500" i="1" dirty="0">
+                <a:solidFill>
+                  <a:srgbClr val="FFFFFF"/>
+                </a:solidFill>
+                <a:latin typeface="Calibri" pitchFamily="34" charset="0"/>
+                <a:ea typeface="Calibri" pitchFamily="34" charset="-122"/>
+                <a:cs typeface="Calibri" pitchFamily="34" charset="-120"/>
+              </a:rPr>
+              <a:t>The disagreements are in the repository, not hidden behind the demo.</a:t>
+            </a:r>
+            <a:endParaRPr lang="en-US" sz="1500" dirty="0"/>
+          </a:p>
+        </p:txBody>
+      </p:sp>
+      <p:sp>
+        <p:nvSpPr>
+          <p:cNvPr id="48" name="Text 39"/>
           <p:cNvSpPr txBox="1"/>
           <p:nvPr/>
         </p:nvSpPr>
@@ -5302,7 +4896,7 @@
       </p:sp>
       <p:sp>
         <p:nvSpPr>
-          <p:cNvPr id="43" name="Text 33"/>
+          <p:cNvPr id="49" name="Text 40"/>
           <p:cNvSpPr txBox="1"/>
           <p:nvPr/>
         </p:nvSpPr>
@@ -5397,7 +4991,7 @@
                 <a:ea typeface="Calibri" pitchFamily="34" charset="-122"/>
                 <a:cs typeface="Calibri" pitchFamily="34" charset="-120"/>
               </a:rPr>
-              <a:t>A tested data pipeline and three models, each against a baseline</a:t>
+              <a:t>Five promises a bank can actually keep</a:t>
             </a:r>
             <a:endParaRPr lang="en-US" sz="3200" dirty="0"/>
           </a:p>
@@ -5411,20 +5005,20 @@
         </p:nvSpPr>
         <p:spPr>
           <a:xfrm>
-            <a:off x="548640" y="1463040"/>
-            <a:ext cx="3931920" cy="777240"/>
+            <a:off x="548640" y="1371600"/>
+            <a:ext cx="2084832" cy="3429000"/>
           </a:xfrm>
           <a:prstGeom prst="roundRect">
             <a:avLst>
-              <a:gd name="adj" fmla="val 11765"/>
+              <a:gd name="adj" fmla="val 6140"/>
             </a:avLst>
           </a:prstGeom>
           <a:solidFill>
-            <a:srgbClr val="B08D57"/>
+            <a:srgbClr val="F1F5F4"/>
           </a:solidFill>
           <a:ln w="12700">
             <a:solidFill>
-              <a:srgbClr val="B08D57"/>
+              <a:srgbClr val="F1F5F4"/>
             </a:solidFill>
             <a:prstDash val="solid"/>
           </a:ln>
@@ -5432,500 +5026,32 @@
       </p:sp>
       <p:sp>
         <p:nvSpPr>
-          <p:cNvPr id="4" name="Text 2"/>
-          <p:cNvSpPr txBox="1"/>
-          <p:nvPr/>
-        </p:nvSpPr>
-        <p:spPr>
-          <a:xfrm>
-            <a:off x="777240" y="1664208"/>
-            <a:ext cx="1463040" cy="365760"/>
-          </a:xfrm>
-          <a:prstGeom prst="rect">
-            <a:avLst/>
-          </a:prstGeom>
-          <a:noFill/>
-          <a:ln/>
-        </p:spPr>
-        <p:txBody>
-          <a:bodyPr wrap="square" lIns="0" tIns="0" rIns="0" bIns="0" rtlCol="0" anchor="t"/>
-          <a:lstStyle/>
-          <a:p>
-            <a:pPr indent="0" marL="0">
-              <a:buNone/>
-            </a:pPr>
-            <a:r>
-              <a:rPr lang="en-US" sz="1800" b="1" dirty="0">
-                <a:solidFill>
-                  <a:srgbClr val="FFFFFF"/>
-                </a:solidFill>
-                <a:latin typeface="Calibri" pitchFamily="34" charset="0"/>
-                <a:ea typeface="Calibri" pitchFamily="34" charset="-122"/>
-                <a:cs typeface="Calibri" pitchFamily="34" charset="-120"/>
-              </a:rPr>
-              <a:t>Bronze</a:t>
-            </a:r>
-            <a:endParaRPr lang="en-US" sz="1800" dirty="0"/>
-          </a:p>
-        </p:txBody>
-      </p:sp>
-      <p:sp>
-        <p:nvSpPr>
-          <p:cNvPr id="5" name="Text 3"/>
-          <p:cNvSpPr txBox="1"/>
-          <p:nvPr/>
-        </p:nvSpPr>
-        <p:spPr>
-          <a:xfrm>
-            <a:off x="2103120" y="1709928"/>
-            <a:ext cx="2286000" cy="320040"/>
-          </a:xfrm>
-          <a:prstGeom prst="rect">
-            <a:avLst/>
-          </a:prstGeom>
-          <a:noFill/>
-          <a:ln/>
-        </p:spPr>
-        <p:txBody>
-          <a:bodyPr wrap="square" lIns="0" tIns="0" rIns="0" bIns="0" rtlCol="0" anchor="t"/>
-          <a:lstStyle/>
-          <a:p>
-            <a:pPr indent="0" marL="0">
-              <a:buNone/>
-            </a:pPr>
-            <a:r>
-              <a:rPr lang="en-US" sz="1300" dirty="0">
-                <a:solidFill>
-                  <a:srgbClr val="FFFFFF"/>
-                </a:solidFill>
-                <a:latin typeface="Calibri" pitchFamily="34" charset="0"/>
-                <a:ea typeface="Calibri" pitchFamily="34" charset="-122"/>
-                <a:cs typeface="Calibri" pitchFamily="34" charset="-120"/>
-              </a:rPr>
-              <a:t>13 raw tables</a:t>
-            </a:r>
-            <a:endParaRPr lang="en-US" sz="1300" dirty="0"/>
-          </a:p>
-        </p:txBody>
-      </p:sp>
-      <p:sp>
-        <p:nvSpPr>
-          <p:cNvPr id="6" name="Shape 4"/>
+          <p:cNvPr id="4" name="Shape 2"/>
           <p:cNvSpPr/>
           <p:nvPr/>
         </p:nvSpPr>
         <p:spPr>
           <a:xfrm>
-            <a:off x="2377440" y="2267712"/>
-            <a:ext cx="274320" cy="201168"/>
-          </a:xfrm>
-          <a:prstGeom prst="downArrow">
+            <a:off x="1133856" y="1645920"/>
+            <a:ext cx="914400" cy="914400"/>
+          </a:xfrm>
+          <a:prstGeom prst="ellipse">
             <a:avLst/>
           </a:prstGeom>
           <a:solidFill>
-            <a:srgbClr val="C9D3D0"/>
+            <a:srgbClr val="0B6E4F"/>
           </a:solidFill>
           <a:ln w="12700">
             <a:solidFill>
-              <a:srgbClr val="C9D3D0"/>
+              <a:srgbClr val="0B6E4F"/>
             </a:solidFill>
             <a:prstDash val="solid"/>
           </a:ln>
         </p:spPr>
       </p:sp>
-      <p:sp>
-        <p:nvSpPr>
-          <p:cNvPr id="7" name="Shape 5"/>
-          <p:cNvSpPr/>
-          <p:nvPr/>
-        </p:nvSpPr>
-        <p:spPr>
-          <a:xfrm>
-            <a:off x="548640" y="2496312"/>
-            <a:ext cx="3931920" cy="777240"/>
-          </a:xfrm>
-          <a:prstGeom prst="roundRect">
-            <a:avLst>
-              <a:gd name="adj" fmla="val 11765"/>
-            </a:avLst>
-          </a:prstGeom>
-          <a:solidFill>
-            <a:srgbClr val="8A9BA8"/>
-          </a:solidFill>
-          <a:ln w="12700">
-            <a:solidFill>
-              <a:srgbClr val="8A9BA8"/>
-            </a:solidFill>
-            <a:prstDash val="solid"/>
-          </a:ln>
-        </p:spPr>
-      </p:sp>
-      <p:sp>
-        <p:nvSpPr>
-          <p:cNvPr id="8" name="Text 6"/>
-          <p:cNvSpPr txBox="1"/>
-          <p:nvPr/>
-        </p:nvSpPr>
-        <p:spPr>
-          <a:xfrm>
-            <a:off x="777240" y="2697480"/>
-            <a:ext cx="1463040" cy="365760"/>
-          </a:xfrm>
-          <a:prstGeom prst="rect">
-            <a:avLst/>
-          </a:prstGeom>
-          <a:noFill/>
-          <a:ln/>
-        </p:spPr>
-        <p:txBody>
-          <a:bodyPr wrap="square" lIns="0" tIns="0" rIns="0" bIns="0" rtlCol="0" anchor="t"/>
-          <a:lstStyle/>
-          <a:p>
-            <a:pPr indent="0" marL="0">
-              <a:buNone/>
-            </a:pPr>
-            <a:r>
-              <a:rPr lang="en-US" sz="1800" b="1" dirty="0">
-                <a:solidFill>
-                  <a:srgbClr val="FFFFFF"/>
-                </a:solidFill>
-                <a:latin typeface="Calibri" pitchFamily="34" charset="0"/>
-                <a:ea typeface="Calibri" pitchFamily="34" charset="-122"/>
-                <a:cs typeface="Calibri" pitchFamily="34" charset="-120"/>
-              </a:rPr>
-              <a:t>Silver</a:t>
-            </a:r>
-            <a:endParaRPr lang="en-US" sz="1800" dirty="0"/>
-          </a:p>
-        </p:txBody>
-      </p:sp>
-      <p:sp>
-        <p:nvSpPr>
-          <p:cNvPr id="9" name="Text 7"/>
-          <p:cNvSpPr txBox="1"/>
-          <p:nvPr/>
-        </p:nvSpPr>
-        <p:spPr>
-          <a:xfrm>
-            <a:off x="2103120" y="2743200"/>
-            <a:ext cx="2286000" cy="320040"/>
-          </a:xfrm>
-          <a:prstGeom prst="rect">
-            <a:avLst/>
-          </a:prstGeom>
-          <a:noFill/>
-          <a:ln/>
-        </p:spPr>
-        <p:txBody>
-          <a:bodyPr wrap="square" lIns="0" tIns="0" rIns="0" bIns="0" rtlCol="0" anchor="t"/>
-          <a:lstStyle/>
-          <a:p>
-            <a:pPr indent="0" marL="0">
-              <a:buNone/>
-            </a:pPr>
-            <a:r>
-              <a:rPr lang="en-US" sz="1300" dirty="0">
-                <a:solidFill>
-                  <a:srgbClr val="FFFFFF"/>
-                </a:solidFill>
-                <a:latin typeface="Calibri" pitchFamily="34" charset="0"/>
-                <a:ea typeface="Calibri" pitchFamily="34" charset="-122"/>
-                <a:cs typeface="Calibri" pitchFamily="34" charset="-120"/>
-              </a:rPr>
-              <a:t>Typed, PII pseudonymized</a:t>
-            </a:r>
-            <a:endParaRPr lang="en-US" sz="1300" dirty="0"/>
-          </a:p>
-        </p:txBody>
-      </p:sp>
-      <p:sp>
-        <p:nvSpPr>
-          <p:cNvPr id="10" name="Shape 8"/>
-          <p:cNvSpPr/>
-          <p:nvPr/>
-        </p:nvSpPr>
-        <p:spPr>
-          <a:xfrm>
-            <a:off x="2377440" y="3300984"/>
-            <a:ext cx="274320" cy="201168"/>
-          </a:xfrm>
-          <a:prstGeom prst="downArrow">
-            <a:avLst/>
-          </a:prstGeom>
-          <a:solidFill>
-            <a:srgbClr val="C9D3D0"/>
-          </a:solidFill>
-          <a:ln w="12700">
-            <a:solidFill>
-              <a:srgbClr val="C9D3D0"/>
-            </a:solidFill>
-            <a:prstDash val="solid"/>
-          </a:ln>
-        </p:spPr>
-      </p:sp>
-      <p:sp>
-        <p:nvSpPr>
-          <p:cNvPr id="11" name="Shape 9"/>
-          <p:cNvSpPr/>
-          <p:nvPr/>
-        </p:nvSpPr>
-        <p:spPr>
-          <a:xfrm>
-            <a:off x="548640" y="3529584"/>
-            <a:ext cx="3931920" cy="777240"/>
-          </a:xfrm>
-          <a:prstGeom prst="roundRect">
-            <a:avLst>
-              <a:gd name="adj" fmla="val 11765"/>
-            </a:avLst>
-          </a:prstGeom>
-          <a:solidFill>
-            <a:srgbClr val="D9A400"/>
-          </a:solidFill>
-          <a:ln w="12700">
-            <a:solidFill>
-              <a:srgbClr val="D9A400"/>
-            </a:solidFill>
-            <a:prstDash val="solid"/>
-          </a:ln>
-        </p:spPr>
-      </p:sp>
-      <p:sp>
-        <p:nvSpPr>
-          <p:cNvPr id="12" name="Text 10"/>
-          <p:cNvSpPr txBox="1"/>
-          <p:nvPr/>
-        </p:nvSpPr>
-        <p:spPr>
-          <a:xfrm>
-            <a:off x="777240" y="3730752"/>
-            <a:ext cx="1463040" cy="365760"/>
-          </a:xfrm>
-          <a:prstGeom prst="rect">
-            <a:avLst/>
-          </a:prstGeom>
-          <a:noFill/>
-          <a:ln/>
-        </p:spPr>
-        <p:txBody>
-          <a:bodyPr wrap="square" lIns="0" tIns="0" rIns="0" bIns="0" rtlCol="0" anchor="t"/>
-          <a:lstStyle/>
-          <a:p>
-            <a:pPr indent="0" marL="0">
-              <a:buNone/>
-            </a:pPr>
-            <a:r>
-              <a:rPr lang="en-US" sz="1800" b="1" dirty="0">
-                <a:solidFill>
-                  <a:srgbClr val="FFFFFF"/>
-                </a:solidFill>
-                <a:latin typeface="Calibri" pitchFamily="34" charset="0"/>
-                <a:ea typeface="Calibri" pitchFamily="34" charset="-122"/>
-                <a:cs typeface="Calibri" pitchFamily="34" charset="-120"/>
-              </a:rPr>
-              <a:t>Gold</a:t>
-            </a:r>
-            <a:endParaRPr lang="en-US" sz="1800" dirty="0"/>
-          </a:p>
-        </p:txBody>
-      </p:sp>
-      <p:sp>
-        <p:nvSpPr>
-          <p:cNvPr id="13" name="Text 11"/>
-          <p:cNvSpPr txBox="1"/>
-          <p:nvPr/>
-        </p:nvSpPr>
-        <p:spPr>
-          <a:xfrm>
-            <a:off x="2103120" y="3776472"/>
-            <a:ext cx="2286000" cy="320040"/>
-          </a:xfrm>
-          <a:prstGeom prst="rect">
-            <a:avLst/>
-          </a:prstGeom>
-          <a:noFill/>
-          <a:ln/>
-        </p:spPr>
-        <p:txBody>
-          <a:bodyPr wrap="square" lIns="0" tIns="0" rIns="0" bIns="0" rtlCol="0" anchor="t"/>
-          <a:lstStyle/>
-          <a:p>
-            <a:pPr indent="0" marL="0">
-              <a:buNone/>
-            </a:pPr>
-            <a:r>
-              <a:rPr lang="en-US" sz="1300" dirty="0">
-                <a:solidFill>
-                  <a:srgbClr val="FFFFFF"/>
-                </a:solidFill>
-                <a:latin typeface="Calibri" pitchFamily="34" charset="0"/>
-                <a:ea typeface="Calibri" pitchFamily="34" charset="-122"/>
-                <a:cs typeface="Calibri" pitchFamily="34" charset="-120"/>
-              </a:rPr>
-              <a:t>8 contracts, no PII</a:t>
-            </a:r>
-            <a:endParaRPr lang="en-US" sz="1300" dirty="0"/>
-          </a:p>
-        </p:txBody>
-      </p:sp>
-      <p:sp>
-        <p:nvSpPr>
-          <p:cNvPr id="14" name="Shape 12"/>
-          <p:cNvSpPr/>
-          <p:nvPr/>
-        </p:nvSpPr>
-        <p:spPr>
-          <a:xfrm>
-            <a:off x="2377440" y="4334256"/>
-            <a:ext cx="274320" cy="201168"/>
-          </a:xfrm>
-          <a:prstGeom prst="downArrow">
-            <a:avLst/>
-          </a:prstGeom>
-          <a:solidFill>
-            <a:srgbClr val="C9D3D0"/>
-          </a:solidFill>
-          <a:ln w="12700">
-            <a:solidFill>
-              <a:srgbClr val="C9D3D0"/>
-            </a:solidFill>
-            <a:prstDash val="solid"/>
-          </a:ln>
-        </p:spPr>
-      </p:sp>
-      <p:sp>
-        <p:nvSpPr>
-          <p:cNvPr id="15" name="Shape 13"/>
-          <p:cNvSpPr/>
-          <p:nvPr/>
-        </p:nvSpPr>
-        <p:spPr>
-          <a:xfrm>
-            <a:off x="548640" y="4562856"/>
-            <a:ext cx="3931920" cy="777240"/>
-          </a:xfrm>
-          <a:prstGeom prst="roundRect">
-            <a:avLst>
-              <a:gd name="adj" fmla="val 11765"/>
-            </a:avLst>
-          </a:prstGeom>
-          <a:solidFill>
-            <a:srgbClr val="5C6F7B"/>
-          </a:solidFill>
-          <a:ln w="12700">
-            <a:solidFill>
-              <a:srgbClr val="5C6F7B"/>
-            </a:solidFill>
-            <a:prstDash val="solid"/>
-          </a:ln>
-        </p:spPr>
-      </p:sp>
-      <p:sp>
-        <p:nvSpPr>
-          <p:cNvPr id="16" name="Text 14"/>
-          <p:cNvSpPr txBox="1"/>
-          <p:nvPr/>
-        </p:nvSpPr>
-        <p:spPr>
-          <a:xfrm>
-            <a:off x="777240" y="4764024"/>
-            <a:ext cx="1463040" cy="365760"/>
-          </a:xfrm>
-          <a:prstGeom prst="rect">
-            <a:avLst/>
-          </a:prstGeom>
-          <a:noFill/>
-          <a:ln/>
-        </p:spPr>
-        <p:txBody>
-          <a:bodyPr wrap="square" lIns="0" tIns="0" rIns="0" bIns="0" rtlCol="0" anchor="t"/>
-          <a:lstStyle/>
-          <a:p>
-            <a:pPr indent="0" marL="0">
-              <a:buNone/>
-            </a:pPr>
-            <a:r>
-              <a:rPr lang="en-US" sz="1800" b="1" dirty="0">
-                <a:solidFill>
-                  <a:srgbClr val="FFFFFF"/>
-                </a:solidFill>
-                <a:latin typeface="Calibri" pitchFamily="34" charset="0"/>
-                <a:ea typeface="Calibri" pitchFamily="34" charset="-122"/>
-                <a:cs typeface="Calibri" pitchFamily="34" charset="-120"/>
-              </a:rPr>
-              <a:t>Platinum</a:t>
-            </a:r>
-            <a:endParaRPr lang="en-US" sz="1800" dirty="0"/>
-          </a:p>
-        </p:txBody>
-      </p:sp>
-      <p:sp>
-        <p:nvSpPr>
-          <p:cNvPr id="17" name="Text 15"/>
-          <p:cNvSpPr txBox="1"/>
-          <p:nvPr/>
-        </p:nvSpPr>
-        <p:spPr>
-          <a:xfrm>
-            <a:off x="2103120" y="4809744"/>
-            <a:ext cx="2286000" cy="320040"/>
-          </a:xfrm>
-          <a:prstGeom prst="rect">
-            <a:avLst/>
-          </a:prstGeom>
-          <a:noFill/>
-          <a:ln/>
-        </p:spPr>
-        <p:txBody>
-          <a:bodyPr wrap="square" lIns="0" tIns="0" rIns="0" bIns="0" rtlCol="0" anchor="t"/>
-          <a:lstStyle/>
-          <a:p>
-            <a:pPr indent="0" marL="0">
-              <a:buNone/>
-            </a:pPr>
-            <a:r>
-              <a:rPr lang="en-US" sz="1300" dirty="0">
-                <a:solidFill>
-                  <a:srgbClr val="FFFFFF"/>
-                </a:solidFill>
-                <a:latin typeface="Calibri" pitchFamily="34" charset="0"/>
-                <a:ea typeface="Calibri" pitchFamily="34" charset="-122"/>
-                <a:cs typeface="Calibri" pitchFamily="34" charset="-120"/>
-              </a:rPr>
-              <a:t>Lineage and quality</a:t>
-            </a:r>
-            <a:endParaRPr lang="en-US" sz="1300" dirty="0"/>
-          </a:p>
-        </p:txBody>
-      </p:sp>
-      <p:sp>
-        <p:nvSpPr>
-          <p:cNvPr id="18" name="Shape 16"/>
-          <p:cNvSpPr/>
-          <p:nvPr/>
-        </p:nvSpPr>
-        <p:spPr>
-          <a:xfrm>
-            <a:off x="548640" y="5669280"/>
-            <a:ext cx="384048" cy="384048"/>
-          </a:xfrm>
-          <a:prstGeom prst="ellipse">
-            <a:avLst/>
-          </a:prstGeom>
-          <a:solidFill>
-            <a:srgbClr val="DCEFE7"/>
-          </a:solidFill>
-          <a:ln w="12700">
-            <a:solidFill>
-              <a:srgbClr val="DCEFE7"/>
-            </a:solidFill>
-            <a:prstDash val="solid"/>
-          </a:ln>
-        </p:spPr>
-      </p:sp>
       <p:pic>
         <p:nvPicPr>
-          <p:cNvPr id="19" name="Image 0" descr="preencoded.png">    </p:cNvPr>
+          <p:cNvPr id="5" name="Image 0" descr="preencoded.png">    </p:cNvPr>
           <p:cNvPicPr>
             <a:picLocks noChangeAspect="1"/>
           </p:cNvPicPr>
@@ -5939,8 +5065,8 @@
         </p:blipFill>
         <p:spPr>
           <a:xfrm>
-            <a:off x="648492" y="5769132"/>
-            <a:ext cx="184343" cy="184343"/>
+            <a:off x="1371600" y="1883664"/>
+            <a:ext cx="438912" cy="438912"/>
           </a:xfrm>
           <a:prstGeom prst="rect">
             <a:avLst/>
@@ -5949,14 +5075,14 @@
       </p:pic>
       <p:sp>
         <p:nvSpPr>
-          <p:cNvPr id="20" name="Text 17"/>
-          <p:cNvSpPr txBox="1"/>
-          <p:nvPr/>
-        </p:nvSpPr>
-        <p:spPr>
-          <a:xfrm>
-            <a:off x="1005840" y="5742432"/>
-            <a:ext cx="1097280" cy="274320"/>
+          <p:cNvPr id="6" name="Text 3"/>
+          <p:cNvSpPr txBox="1"/>
+          <p:nvPr/>
+        </p:nvSpPr>
+        <p:spPr>
+          <a:xfrm>
+            <a:off x="685800" y="1463040"/>
+            <a:ext cx="365760" cy="365760"/>
           </a:xfrm>
           <a:prstGeom prst="rect">
             <a:avLst/>
@@ -5972,7 +5098,46 @@
               <a:buNone/>
             </a:pPr>
             <a:r>
-              <a:rPr lang="en-US" sz="1150" dirty="0">
+              <a:rPr lang="en-US" sz="1600" b="1" dirty="0">
+                <a:solidFill>
+                  <a:srgbClr val="8FA3AD"/>
+                </a:solidFill>
+                <a:latin typeface="Calibri" pitchFamily="34" charset="0"/>
+                <a:ea typeface="Calibri" pitchFamily="34" charset="-122"/>
+                <a:cs typeface="Calibri" pitchFamily="34" charset="-120"/>
+              </a:rPr>
+              <a:t>1</a:t>
+            </a:r>
+            <a:endParaRPr lang="en-US" sz="1600" dirty="0"/>
+          </a:p>
+        </p:txBody>
+      </p:sp>
+      <p:sp>
+        <p:nvSpPr>
+          <p:cNvPr id="7" name="Text 4"/>
+          <p:cNvSpPr txBox="1"/>
+          <p:nvPr/>
+        </p:nvSpPr>
+        <p:spPr>
+          <a:xfrm>
+            <a:off x="713232" y="2788920"/>
+            <a:ext cx="1755648" cy="731520"/>
+          </a:xfrm>
+          <a:prstGeom prst="rect">
+            <a:avLst/>
+          </a:prstGeom>
+          <a:noFill/>
+          <a:ln/>
+        </p:spPr>
+        <p:txBody>
+          <a:bodyPr wrap="square" lIns="0" tIns="0" rIns="0" bIns="0" rtlCol="0" anchor="t"/>
+          <a:lstStyle/>
+          <a:p>
+            <a:pPr algn="ctr" indent="0" marL="0">
+              <a:buNone/>
+            </a:pPr>
+            <a:r>
+              <a:rPr lang="en-US" sz="1700" b="1" dirty="0">
                 <a:solidFill>
                   <a:srgbClr val="0B1F2A"/>
                 </a:solidFill>
@@ -5980,40 +5145,106 @@
                 <a:ea typeface="Calibri" pitchFamily="34" charset="-122"/>
                 <a:cs typeface="Calibri" pitchFamily="34" charset="-120"/>
               </a:rPr>
-              <a:t>56 dbt tests</a:t>
-            </a:r>
-            <a:endParaRPr lang="en-US" sz="1150" dirty="0"/>
-          </a:p>
-        </p:txBody>
-      </p:sp>
-      <p:sp>
-        <p:nvSpPr>
-          <p:cNvPr id="21" name="Shape 18"/>
+              <a:t>Nothing without your yes</a:t>
+            </a:r>
+            <a:endParaRPr lang="en-US" sz="1700" dirty="0"/>
+          </a:p>
+        </p:txBody>
+      </p:sp>
+      <p:sp>
+        <p:nvSpPr>
+          <p:cNvPr id="8" name="Text 5"/>
+          <p:cNvSpPr txBox="1"/>
+          <p:nvPr/>
+        </p:nvSpPr>
+        <p:spPr>
+          <a:xfrm>
+            <a:off x="713232" y="3611880"/>
+            <a:ext cx="1755648" cy="1051560"/>
+          </a:xfrm>
+          <a:prstGeom prst="rect">
+            <a:avLst/>
+          </a:prstGeom>
+          <a:noFill/>
+          <a:ln/>
+        </p:spPr>
+        <p:txBody>
+          <a:bodyPr wrap="square" lIns="0" tIns="0" rIns="0" bIns="0" rtlCol="0" anchor="t"/>
+          <a:lstStyle/>
+          <a:p>
+            <a:pPr algn="ctr" indent="0" marL="0">
+              <a:buNone/>
+            </a:pPr>
+            <a:r>
+              <a:rPr lang="en-US" sz="1300" dirty="0">
+                <a:solidFill>
+                  <a:srgbClr val="5B6770"/>
+                </a:solidFill>
+                <a:latin typeface="Calibri" pitchFamily="34" charset="0"/>
+                <a:ea typeface="Calibri" pitchFamily="34" charset="-122"/>
+                <a:cs typeface="Calibri" pitchFamily="34" charset="-120"/>
+              </a:rPr>
+              <a:t>Every action waits for your approval on screen</a:t>
+            </a:r>
+            <a:endParaRPr lang="en-US" sz="1300" dirty="0"/>
+          </a:p>
+        </p:txBody>
+      </p:sp>
+      <p:sp>
+        <p:nvSpPr>
+          <p:cNvPr id="9" name="Shape 6"/>
           <p:cNvSpPr/>
           <p:nvPr/>
         </p:nvSpPr>
         <p:spPr>
           <a:xfrm>
-            <a:off x="1901952" y="5669280"/>
-            <a:ext cx="384048" cy="384048"/>
-          </a:xfrm>
-          <a:prstGeom prst="ellipse">
-            <a:avLst/>
+            <a:off x="2798064" y="1371600"/>
+            <a:ext cx="2084832" cy="3429000"/>
+          </a:xfrm>
+          <a:prstGeom prst="roundRect">
+            <a:avLst>
+              <a:gd name="adj" fmla="val 6140"/>
+            </a:avLst>
           </a:prstGeom>
           <a:solidFill>
-            <a:srgbClr val="DCEFE7"/>
+            <a:srgbClr val="F1F5F4"/>
           </a:solidFill>
           <a:ln w="12700">
             <a:solidFill>
-              <a:srgbClr val="DCEFE7"/>
+              <a:srgbClr val="F1F5F4"/>
             </a:solidFill>
             <a:prstDash val="solid"/>
           </a:ln>
         </p:spPr>
       </p:sp>
+      <p:sp>
+        <p:nvSpPr>
+          <p:cNvPr id="10" name="Shape 7"/>
+          <p:cNvSpPr/>
+          <p:nvPr/>
+        </p:nvSpPr>
+        <p:spPr>
+          <a:xfrm>
+            <a:off x="3383280" y="1645920"/>
+            <a:ext cx="914400" cy="914400"/>
+          </a:xfrm>
+          <a:prstGeom prst="ellipse">
+            <a:avLst/>
+          </a:prstGeom>
+          <a:solidFill>
+            <a:srgbClr val="0B6E4F"/>
+          </a:solidFill>
+          <a:ln w="12700">
+            <a:solidFill>
+              <a:srgbClr val="0B6E4F"/>
+            </a:solidFill>
+            <a:prstDash val="solid"/>
+          </a:ln>
+        </p:spPr>
+      </p:sp>
       <p:pic>
         <p:nvPicPr>
-          <p:cNvPr id="22" name="Image 1" descr="preencoded.png">    </p:cNvPr>
+          <p:cNvPr id="11" name="Image 1" descr="preencoded.png">    </p:cNvPr>
           <p:cNvPicPr>
             <a:picLocks noChangeAspect="1"/>
           </p:cNvPicPr>
@@ -6027,8 +5258,8 @@
         </p:blipFill>
         <p:spPr>
           <a:xfrm>
-            <a:off x="2001804" y="5769132"/>
-            <a:ext cx="184343" cy="184343"/>
+            <a:off x="3621024" y="1883664"/>
+            <a:ext cx="438912" cy="438912"/>
           </a:xfrm>
           <a:prstGeom prst="rect">
             <a:avLst/>
@@ -6037,14 +5268,14 @@
       </p:pic>
       <p:sp>
         <p:nvSpPr>
-          <p:cNvPr id="23" name="Text 19"/>
-          <p:cNvSpPr txBox="1"/>
-          <p:nvPr/>
-        </p:nvSpPr>
-        <p:spPr>
-          <a:xfrm>
-            <a:off x="2359152" y="5742432"/>
-            <a:ext cx="1097280" cy="274320"/>
+          <p:cNvPr id="12" name="Text 8"/>
+          <p:cNvSpPr txBox="1"/>
+          <p:nvPr/>
+        </p:nvSpPr>
+        <p:spPr>
+          <a:xfrm>
+            <a:off x="2935224" y="1463040"/>
+            <a:ext cx="365760" cy="365760"/>
           </a:xfrm>
           <a:prstGeom prst="rect">
             <a:avLst/>
@@ -6060,7 +5291,46 @@
               <a:buNone/>
             </a:pPr>
             <a:r>
-              <a:rPr lang="en-US" sz="1150" dirty="0">
+              <a:rPr lang="en-US" sz="1600" b="1" dirty="0">
+                <a:solidFill>
+                  <a:srgbClr val="8FA3AD"/>
+                </a:solidFill>
+                <a:latin typeface="Calibri" pitchFamily="34" charset="0"/>
+                <a:ea typeface="Calibri" pitchFamily="34" charset="-122"/>
+                <a:cs typeface="Calibri" pitchFamily="34" charset="-120"/>
+              </a:rPr>
+              <a:t>2</a:t>
+            </a:r>
+            <a:endParaRPr lang="en-US" sz="1600" dirty="0"/>
+          </a:p>
+        </p:txBody>
+      </p:sp>
+      <p:sp>
+        <p:nvSpPr>
+          <p:cNvPr id="13" name="Text 9"/>
+          <p:cNvSpPr txBox="1"/>
+          <p:nvPr/>
+        </p:nvSpPr>
+        <p:spPr>
+          <a:xfrm>
+            <a:off x="2962656" y="2788920"/>
+            <a:ext cx="1755648" cy="731520"/>
+          </a:xfrm>
+          <a:prstGeom prst="rect">
+            <a:avLst/>
+          </a:prstGeom>
+          <a:noFill/>
+          <a:ln/>
+        </p:spPr>
+        <p:txBody>
+          <a:bodyPr wrap="square" lIns="0" tIns="0" rIns="0" bIns="0" rtlCol="0" anchor="t"/>
+          <a:lstStyle/>
+          <a:p>
+            <a:pPr algn="ctr" indent="0" marL="0">
+              <a:buNone/>
+            </a:pPr>
+            <a:r>
+              <a:rPr lang="en-US" sz="1700" b="1" dirty="0">
                 <a:solidFill>
                   <a:srgbClr val="0B1F2A"/>
                 </a:solidFill>
@@ -6068,40 +5338,106 @@
                 <a:ea typeface="Calibri" pitchFamily="34" charset="-122"/>
                 <a:cs typeface="Calibri" pitchFamily="34" charset="-120"/>
               </a:rPr>
-              <a:t>Manifest</a:t>
-            </a:r>
-            <a:endParaRPr lang="en-US" sz="1150" dirty="0"/>
-          </a:p>
-        </p:txBody>
-      </p:sp>
-      <p:sp>
-        <p:nvSpPr>
-          <p:cNvPr id="24" name="Shape 20"/>
+              <a:t>Only your data</a:t>
+            </a:r>
+            <a:endParaRPr lang="en-US" sz="1700" dirty="0"/>
+          </a:p>
+        </p:txBody>
+      </p:sp>
+      <p:sp>
+        <p:nvSpPr>
+          <p:cNvPr id="14" name="Text 10"/>
+          <p:cNvSpPr txBox="1"/>
+          <p:nvPr/>
+        </p:nvSpPr>
+        <p:spPr>
+          <a:xfrm>
+            <a:off x="2962656" y="3611880"/>
+            <a:ext cx="1755648" cy="1051560"/>
+          </a:xfrm>
+          <a:prstGeom prst="rect">
+            <a:avLst/>
+          </a:prstGeom>
+          <a:noFill/>
+          <a:ln/>
+        </p:spPr>
+        <p:txBody>
+          <a:bodyPr wrap="square" lIns="0" tIns="0" rIns="0" bIns="0" rtlCol="0" anchor="t"/>
+          <a:lstStyle/>
+          <a:p>
+            <a:pPr algn="ctr" indent="0" marL="0">
+              <a:buNone/>
+            </a:pPr>
+            <a:r>
+              <a:rPr lang="en-US" sz="1300" dirty="0">
+                <a:solidFill>
+                  <a:srgbClr val="5B6770"/>
+                </a:solidFill>
+                <a:latin typeface="Calibri" pitchFamily="34" charset="0"/>
+                <a:ea typeface="Calibri" pitchFamily="34" charset="-122"/>
+                <a:cs typeface="Calibri" pitchFamily="34" charset="-120"/>
+              </a:rPr>
+              <a:t>Other customers do not exist for your session</a:t>
+            </a:r>
+            <a:endParaRPr lang="en-US" sz="1300" dirty="0"/>
+          </a:p>
+        </p:txBody>
+      </p:sp>
+      <p:sp>
+        <p:nvSpPr>
+          <p:cNvPr id="15" name="Shape 11"/>
           <p:cNvSpPr/>
           <p:nvPr/>
         </p:nvSpPr>
         <p:spPr>
           <a:xfrm>
-            <a:off x="3255264" y="5669280"/>
-            <a:ext cx="384048" cy="384048"/>
-          </a:xfrm>
-          <a:prstGeom prst="ellipse">
-            <a:avLst/>
+            <a:off x="5047488" y="1371600"/>
+            <a:ext cx="2084832" cy="3429000"/>
+          </a:xfrm>
+          <a:prstGeom prst="roundRect">
+            <a:avLst>
+              <a:gd name="adj" fmla="val 6140"/>
+            </a:avLst>
           </a:prstGeom>
           <a:solidFill>
-            <a:srgbClr val="DCEFE7"/>
+            <a:srgbClr val="F1F5F4"/>
           </a:solidFill>
           <a:ln w="12700">
             <a:solidFill>
-              <a:srgbClr val="DCEFE7"/>
+              <a:srgbClr val="F1F5F4"/>
             </a:solidFill>
             <a:prstDash val="solid"/>
           </a:ln>
         </p:spPr>
       </p:sp>
+      <p:sp>
+        <p:nvSpPr>
+          <p:cNvPr id="16" name="Shape 12"/>
+          <p:cNvSpPr/>
+          <p:nvPr/>
+        </p:nvSpPr>
+        <p:spPr>
+          <a:xfrm>
+            <a:off x="5632704" y="1645920"/>
+            <a:ext cx="914400" cy="914400"/>
+          </a:xfrm>
+          <a:prstGeom prst="ellipse">
+            <a:avLst/>
+          </a:prstGeom>
+          <a:solidFill>
+            <a:srgbClr val="0B6E4F"/>
+          </a:solidFill>
+          <a:ln w="12700">
+            <a:solidFill>
+              <a:srgbClr val="0B6E4F"/>
+            </a:solidFill>
+            <a:prstDash val="solid"/>
+          </a:ln>
+        </p:spPr>
+      </p:sp>
       <p:pic>
         <p:nvPicPr>
-          <p:cNvPr id="25" name="Image 2" descr="preencoded.png">    </p:cNvPr>
+          <p:cNvPr id="17" name="Image 2" descr="preencoded.png">    </p:cNvPr>
           <p:cNvPicPr>
             <a:picLocks noChangeAspect="1"/>
           </p:cNvPicPr>
@@ -6115,8 +5451,8 @@
         </p:blipFill>
         <p:spPr>
           <a:xfrm>
-            <a:off x="3355116" y="5769132"/>
-            <a:ext cx="184343" cy="184343"/>
+            <a:off x="5870448" y="1883664"/>
+            <a:ext cx="438912" cy="438912"/>
           </a:xfrm>
           <a:prstGeom prst="rect">
             <a:avLst/>
@@ -6125,14 +5461,14 @@
       </p:pic>
       <p:sp>
         <p:nvSpPr>
-          <p:cNvPr id="26" name="Text 21"/>
-          <p:cNvSpPr txBox="1"/>
-          <p:nvPr/>
-        </p:nvSpPr>
-        <p:spPr>
-          <a:xfrm>
-            <a:off x="3712464" y="5742432"/>
-            <a:ext cx="1097280" cy="274320"/>
+          <p:cNvPr id="18" name="Text 13"/>
+          <p:cNvSpPr txBox="1"/>
+          <p:nvPr/>
+        </p:nvSpPr>
+        <p:spPr>
+          <a:xfrm>
+            <a:off x="5184648" y="1463040"/>
+            <a:ext cx="365760" cy="365760"/>
           </a:xfrm>
           <a:prstGeom prst="rect">
             <a:avLst/>
@@ -6148,7 +5484,46 @@
               <a:buNone/>
             </a:pPr>
             <a:r>
-              <a:rPr lang="en-US" sz="1150" dirty="0">
+              <a:rPr lang="en-US" sz="1600" b="1" dirty="0">
+                <a:solidFill>
+                  <a:srgbClr val="8FA3AD"/>
+                </a:solidFill>
+                <a:latin typeface="Calibri" pitchFamily="34" charset="0"/>
+                <a:ea typeface="Calibri" pitchFamily="34" charset="-122"/>
+                <a:cs typeface="Calibri" pitchFamily="34" charset="-120"/>
+              </a:rPr>
+              <a:t>3</a:t>
+            </a:r>
+            <a:endParaRPr lang="en-US" sz="1600" dirty="0"/>
+          </a:p>
+        </p:txBody>
+      </p:sp>
+      <p:sp>
+        <p:nvSpPr>
+          <p:cNvPr id="19" name="Text 14"/>
+          <p:cNvSpPr txBox="1"/>
+          <p:nvPr/>
+        </p:nvSpPr>
+        <p:spPr>
+          <a:xfrm>
+            <a:off x="5212080" y="2788920"/>
+            <a:ext cx="1755648" cy="731520"/>
+          </a:xfrm>
+          <a:prstGeom prst="rect">
+            <a:avLst/>
+          </a:prstGeom>
+          <a:noFill/>
+          <a:ln/>
+        </p:spPr>
+        <p:txBody>
+          <a:bodyPr wrap="square" lIns="0" tIns="0" rIns="0" bIns="0" rtlCol="0" anchor="t"/>
+          <a:lstStyle/>
+          <a:p>
+            <a:pPr algn="ctr" indent="0" marL="0">
+              <a:buNone/>
+            </a:pPr>
+            <a:r>
+              <a:rPr lang="en-US" sz="1700" b="1" dirty="0">
                 <a:solidFill>
                   <a:srgbClr val="0B1F2A"/>
                 </a:solidFill>
@@ -6156,38 +5531,137 @@
                 <a:ea typeface="Calibri" pitchFamily="34" charset="-122"/>
                 <a:cs typeface="Calibri" pitchFamily="34" charset="-120"/>
               </a:rPr>
-              <a:t>Update fixture</a:t>
-            </a:r>
-            <a:endParaRPr lang="en-US" sz="1150" dirty="0"/>
-          </a:p>
-        </p:txBody>
-      </p:sp>
-      <p:graphicFrame>
-        <p:nvGraphicFramePr>
-          <p:cNvPr id="27" name="Chart 0" descr=""/>
-          <p:cNvGraphicFramePr/>
-          <p:nvPr/>
-        </p:nvGraphicFramePr>
-        <p:xfrm>
-          <a:off x="4937760" y="1371600"/>
-          <a:ext cx="6766560" cy="3840480"/>
-        </p:xfrm>
-        <a:graphic xmlns:a="http://schemas.openxmlformats.org/drawingml/2006/main">
-          <a:graphicData uri="http://schemas.openxmlformats.org/drawingml/2006/chart">
-            <c:chart xmlns:c="http://schemas.openxmlformats.org/drawingml/2006/chart" r:id="rId4"/>
-          </a:graphicData>
-        </a:graphic>
-      </p:graphicFrame>
-      <p:sp>
-        <p:nvSpPr>
-          <p:cNvPr id="28" name="Text 22"/>
-          <p:cNvSpPr txBox="1"/>
-          <p:nvPr/>
-        </p:nvSpPr>
-        <p:spPr>
-          <a:xfrm>
-            <a:off x="5029200" y="5349240"/>
-            <a:ext cx="6583680" cy="868680"/>
+              <a:t>A person, whenever you ask</a:t>
+            </a:r>
+            <a:endParaRPr lang="en-US" sz="1700" dirty="0"/>
+          </a:p>
+        </p:txBody>
+      </p:sp>
+      <p:sp>
+        <p:nvSpPr>
+          <p:cNvPr id="20" name="Text 15"/>
+          <p:cNvSpPr txBox="1"/>
+          <p:nvPr/>
+        </p:nvSpPr>
+        <p:spPr>
+          <a:xfrm>
+            <a:off x="5212080" y="3611880"/>
+            <a:ext cx="1755648" cy="1051560"/>
+          </a:xfrm>
+          <a:prstGeom prst="rect">
+            <a:avLst/>
+          </a:prstGeom>
+          <a:noFill/>
+          <a:ln/>
+        </p:spPr>
+        <p:txBody>
+          <a:bodyPr wrap="square" lIns="0" tIns="0" rIns="0" bIns="0" rtlCol="0" anchor="t"/>
+          <a:lstStyle/>
+          <a:p>
+            <a:pPr algn="ctr" indent="0" marL="0">
+              <a:buNone/>
+            </a:pPr>
+            <a:r>
+              <a:rPr lang="en-US" sz="1300" dirty="0">
+                <a:solidFill>
+                  <a:srgbClr val="5B6770"/>
+                </a:solidFill>
+                <a:latin typeface="Calibri" pitchFamily="34" charset="0"/>
+                <a:ea typeface="Calibri" pitchFamily="34" charset="-122"/>
+                <a:cs typeface="Calibri" pitchFamily="34" charset="-120"/>
+              </a:rPr>
+              <a:t>With your whole story. You never repeat it</a:t>
+            </a:r>
+            <a:endParaRPr lang="en-US" sz="1300" dirty="0"/>
+          </a:p>
+        </p:txBody>
+      </p:sp>
+      <p:sp>
+        <p:nvSpPr>
+          <p:cNvPr id="21" name="Shape 16"/>
+          <p:cNvSpPr/>
+          <p:nvPr/>
+        </p:nvSpPr>
+        <p:spPr>
+          <a:xfrm>
+            <a:off x="7296912" y="1371600"/>
+            <a:ext cx="2084832" cy="3429000"/>
+          </a:xfrm>
+          <a:prstGeom prst="roundRect">
+            <a:avLst>
+              <a:gd name="adj" fmla="val 6140"/>
+            </a:avLst>
+          </a:prstGeom>
+          <a:solidFill>
+            <a:srgbClr val="F1F5F4"/>
+          </a:solidFill>
+          <a:ln w="12700">
+            <a:solidFill>
+              <a:srgbClr val="F1F5F4"/>
+            </a:solidFill>
+            <a:prstDash val="solid"/>
+          </a:ln>
+        </p:spPr>
+      </p:sp>
+      <p:sp>
+        <p:nvSpPr>
+          <p:cNvPr id="22" name="Shape 17"/>
+          <p:cNvSpPr/>
+          <p:nvPr/>
+        </p:nvSpPr>
+        <p:spPr>
+          <a:xfrm>
+            <a:off x="7882128" y="1645920"/>
+            <a:ext cx="914400" cy="914400"/>
+          </a:xfrm>
+          <a:prstGeom prst="ellipse">
+            <a:avLst/>
+          </a:prstGeom>
+          <a:solidFill>
+            <a:srgbClr val="0B6E4F"/>
+          </a:solidFill>
+          <a:ln w="12700">
+            <a:solidFill>
+              <a:srgbClr val="0B6E4F"/>
+            </a:solidFill>
+            <a:prstDash val="solid"/>
+          </a:ln>
+        </p:spPr>
+      </p:sp>
+      <p:pic>
+        <p:nvPicPr>
+          <p:cNvPr id="23" name="Image 3" descr="preencoded.png">    </p:cNvPr>
+          <p:cNvPicPr>
+            <a:picLocks noChangeAspect="1"/>
+          </p:cNvPicPr>
+          <p:nvPr/>
+        </p:nvPicPr>
+        <p:blipFill>
+          <a:blip r:embed="rId4"/>
+          <a:stretch>
+            <a:fillRect/>
+          </a:stretch>
+        </p:blipFill>
+        <p:spPr>
+          <a:xfrm>
+            <a:off x="8119872" y="1883664"/>
+            <a:ext cx="438912" cy="438912"/>
+          </a:xfrm>
+          <a:prstGeom prst="rect">
+            <a:avLst/>
+          </a:prstGeom>
+        </p:spPr>
+      </p:pic>
+      <p:sp>
+        <p:nvSpPr>
+          <p:cNvPr id="24" name="Text 18"/>
+          <p:cNvSpPr txBox="1"/>
+          <p:nvPr/>
+        </p:nvSpPr>
+        <p:spPr>
+          <a:xfrm>
+            <a:off x="7434072" y="1463040"/>
+            <a:ext cx="365760" cy="365760"/>
           </a:xfrm>
           <a:prstGeom prst="rect">
             <a:avLst/>
@@ -6203,21 +5677,278 @@
               <a:buNone/>
             </a:pPr>
             <a:r>
-              <a:rPr lang="en-US" sz="1350" b="1" dirty="0">
-                <a:solidFill>
-                  <a:srgbClr val="0B6E4F"/>
-                </a:solidFill>
-                <a:latin typeface="Calibri" pitchFamily="34" charset="0"/>
-                <a:ea typeface="Calibri" pitchFamily="34" charset="-122"/>
-                <a:cs typeface="Calibri" pitchFamily="34" charset="-120"/>
-              </a:rPr>
-              <a:t>In the workflow: </a:t>
-            </a:r>
+              <a:rPr lang="en-US" sz="1600" b="1" dirty="0">
+                <a:solidFill>
+                  <a:srgbClr val="8FA3AD"/>
+                </a:solidFill>
+                <a:latin typeface="Calibri" pitchFamily="34" charset="0"/>
+                <a:ea typeface="Calibri" pitchFamily="34" charset="-122"/>
+                <a:cs typeface="Calibri" pitchFamily="34" charset="-120"/>
+              </a:rPr>
+              <a:t>4</a:t>
+            </a:r>
+            <a:endParaRPr lang="en-US" sz="1600" dirty="0"/>
+          </a:p>
+        </p:txBody>
+      </p:sp>
+      <p:sp>
+        <p:nvSpPr>
+          <p:cNvPr id="25" name="Text 19"/>
+          <p:cNvSpPr txBox="1"/>
+          <p:nvPr/>
+        </p:nvSpPr>
+        <p:spPr>
+          <a:xfrm>
+            <a:off x="7461504" y="2788920"/>
+            <a:ext cx="1755648" cy="731520"/>
+          </a:xfrm>
+          <a:prstGeom prst="rect">
+            <a:avLst/>
+          </a:prstGeom>
+          <a:noFill/>
+          <a:ln/>
+        </p:spPr>
+        <p:txBody>
+          <a:bodyPr wrap="square" lIns="0" tIns="0" rIns="0" bIns="0" rtlCol="0" anchor="t"/>
+          <a:lstStyle/>
+          <a:p>
+            <a:pPr algn="ctr" indent="0" marL="0">
+              <a:buNone/>
+            </a:pPr>
+            <a:r>
+              <a:rPr lang="en-US" sz="1700" b="1" dirty="0">
+                <a:solidFill>
+                  <a:srgbClr val="0B1F2A"/>
+                </a:solidFill>
+                <a:latin typeface="Calibri" pitchFamily="34" charset="0"/>
+                <a:ea typeface="Calibri" pitchFamily="34" charset="-122"/>
+                <a:cs typeface="Calibri" pitchFamily="34" charset="-120"/>
+              </a:rPr>
+              <a:t>Answers with a source</a:t>
+            </a:r>
+            <a:endParaRPr lang="en-US" sz="1700" dirty="0"/>
+          </a:p>
+        </p:txBody>
+      </p:sp>
+      <p:sp>
+        <p:nvSpPr>
+          <p:cNvPr id="26" name="Text 20"/>
+          <p:cNvSpPr txBox="1"/>
+          <p:nvPr/>
+        </p:nvSpPr>
+        <p:spPr>
+          <a:xfrm>
+            <a:off x="7461504" y="3611880"/>
+            <a:ext cx="1755648" cy="1051560"/>
+          </a:xfrm>
+          <a:prstGeom prst="rect">
+            <a:avLst/>
+          </a:prstGeom>
+          <a:noFill/>
+          <a:ln/>
+        </p:spPr>
+        <p:txBody>
+          <a:bodyPr wrap="square" lIns="0" tIns="0" rIns="0" bIns="0" rtlCol="0" anchor="t"/>
+          <a:lstStyle/>
+          <a:p>
+            <a:pPr algn="ctr" indent="0" marL="0">
+              <a:buNone/>
+            </a:pPr>
+            <a:r>
+              <a:rPr lang="en-US" sz="1300" dirty="0">
+                <a:solidFill>
+                  <a:srgbClr val="5B6770"/>
+                </a:solidFill>
+                <a:latin typeface="Calibri" pitchFamily="34" charset="0"/>
+                <a:ea typeface="Calibri" pitchFamily="34" charset="-122"/>
+                <a:cs typeface="Calibri" pitchFamily="34" charset="-120"/>
+              </a:rPr>
+              <a:t>Policy cited by rule, or an honest “I don't know”</a:t>
+            </a:r>
+            <a:endParaRPr lang="en-US" sz="1300" dirty="0"/>
+          </a:p>
+        </p:txBody>
+      </p:sp>
+      <p:sp>
+        <p:nvSpPr>
+          <p:cNvPr id="27" name="Shape 21"/>
+          <p:cNvSpPr/>
+          <p:nvPr/>
+        </p:nvSpPr>
+        <p:spPr>
+          <a:xfrm>
+            <a:off x="9546336" y="1371600"/>
+            <a:ext cx="2084832" cy="3429000"/>
+          </a:xfrm>
+          <a:prstGeom prst="roundRect">
+            <a:avLst>
+              <a:gd name="adj" fmla="val 6140"/>
+            </a:avLst>
+          </a:prstGeom>
+          <a:solidFill>
+            <a:srgbClr val="F1F5F4"/>
+          </a:solidFill>
+          <a:ln w="12700">
+            <a:solidFill>
+              <a:srgbClr val="F1F5F4"/>
+            </a:solidFill>
+            <a:prstDash val="solid"/>
+          </a:ln>
+        </p:spPr>
+      </p:sp>
+      <p:sp>
+        <p:nvSpPr>
+          <p:cNvPr id="28" name="Shape 22"/>
+          <p:cNvSpPr/>
+          <p:nvPr/>
+        </p:nvSpPr>
+        <p:spPr>
+          <a:xfrm>
+            <a:off x="10131552" y="1645920"/>
+            <a:ext cx="914400" cy="914400"/>
+          </a:xfrm>
+          <a:prstGeom prst="ellipse">
+            <a:avLst/>
+          </a:prstGeom>
+          <a:solidFill>
+            <a:srgbClr val="0B6E4F"/>
+          </a:solidFill>
+          <a:ln w="12700">
+            <a:solidFill>
+              <a:srgbClr val="0B6E4F"/>
+            </a:solidFill>
+            <a:prstDash val="solid"/>
+          </a:ln>
+        </p:spPr>
+      </p:sp>
+      <p:pic>
+        <p:nvPicPr>
+          <p:cNvPr id="29" name="Image 4" descr="preencoded.png">    </p:cNvPr>
+          <p:cNvPicPr>
+            <a:picLocks noChangeAspect="1"/>
+          </p:cNvPicPr>
+          <p:nvPr/>
+        </p:nvPicPr>
+        <p:blipFill>
+          <a:blip r:embed="rId5"/>
+          <a:stretch>
+            <a:fillRect/>
+          </a:stretch>
+        </p:blipFill>
+        <p:spPr>
+          <a:xfrm>
+            <a:off x="10369296" y="1883664"/>
+            <a:ext cx="438912" cy="438912"/>
+          </a:xfrm>
+          <a:prstGeom prst="rect">
+            <a:avLst/>
+          </a:prstGeom>
+        </p:spPr>
+      </p:pic>
+      <p:sp>
+        <p:nvSpPr>
+          <p:cNvPr id="30" name="Text 23"/>
+          <p:cNvSpPr txBox="1"/>
+          <p:nvPr/>
+        </p:nvSpPr>
+        <p:spPr>
+          <a:xfrm>
+            <a:off x="9683496" y="1463040"/>
+            <a:ext cx="365760" cy="365760"/>
+          </a:xfrm>
+          <a:prstGeom prst="rect">
+            <a:avLst/>
+          </a:prstGeom>
+          <a:noFill/>
+          <a:ln/>
+        </p:spPr>
+        <p:txBody>
+          <a:bodyPr wrap="square" lIns="0" tIns="0" rIns="0" bIns="0" rtlCol="0" anchor="t"/>
+          <a:lstStyle/>
+          <a:p>
             <a:pPr indent="0" marL="0">
               <a:buNone/>
             </a:pPr>
             <a:r>
-              <a:rPr lang="en-US" sz="1350" dirty="0">
+              <a:rPr lang="en-US" sz="1600" b="1" dirty="0">
+                <a:solidFill>
+                  <a:srgbClr val="8FA3AD"/>
+                </a:solidFill>
+                <a:latin typeface="Calibri" pitchFamily="34" charset="0"/>
+                <a:ea typeface="Calibri" pitchFamily="34" charset="-122"/>
+                <a:cs typeface="Calibri" pitchFamily="34" charset="-120"/>
+              </a:rPr>
+              <a:t>5</a:t>
+            </a:r>
+            <a:endParaRPr lang="en-US" sz="1600" dirty="0"/>
+          </a:p>
+        </p:txBody>
+      </p:sp>
+      <p:sp>
+        <p:nvSpPr>
+          <p:cNvPr id="31" name="Text 24"/>
+          <p:cNvSpPr txBox="1"/>
+          <p:nvPr/>
+        </p:nvSpPr>
+        <p:spPr>
+          <a:xfrm>
+            <a:off x="9710928" y="2788920"/>
+            <a:ext cx="1755648" cy="731520"/>
+          </a:xfrm>
+          <a:prstGeom prst="rect">
+            <a:avLst/>
+          </a:prstGeom>
+          <a:noFill/>
+          <a:ln/>
+        </p:spPr>
+        <p:txBody>
+          <a:bodyPr wrap="square" lIns="0" tIns="0" rIns="0" bIns="0" rtlCol="0" anchor="t"/>
+          <a:lstStyle/>
+          <a:p>
+            <a:pPr algn="ctr" indent="0" marL="0">
+              <a:buNone/>
+            </a:pPr>
+            <a:r>
+              <a:rPr lang="en-US" sz="1700" b="1" dirty="0">
+                <a:solidFill>
+                  <a:srgbClr val="0B1F2A"/>
+                </a:solidFill>
+                <a:latin typeface="Calibri" pitchFamily="34" charset="0"/>
+                <a:ea typeface="Calibri" pitchFamily="34" charset="-122"/>
+                <a:cs typeface="Calibri" pitchFamily="34" charset="-120"/>
+              </a:rPr>
+              <a:t>Only what was verified</a:t>
+            </a:r>
+            <a:endParaRPr lang="en-US" sz="1700" dirty="0"/>
+          </a:p>
+        </p:txBody>
+      </p:sp>
+      <p:sp>
+        <p:nvSpPr>
+          <p:cNvPr id="32" name="Text 25"/>
+          <p:cNvSpPr txBox="1"/>
+          <p:nvPr/>
+        </p:nvSpPr>
+        <p:spPr>
+          <a:xfrm>
+            <a:off x="9710928" y="3611880"/>
+            <a:ext cx="1755648" cy="1051560"/>
+          </a:xfrm>
+          <a:prstGeom prst="rect">
+            <a:avLst/>
+          </a:prstGeom>
+          <a:noFill/>
+          <a:ln/>
+        </p:spPr>
+        <p:txBody>
+          <a:bodyPr wrap="square" lIns="0" tIns="0" rIns="0" bIns="0" rtlCol="0" anchor="t"/>
+          <a:lstStyle/>
+          <a:p>
+            <a:pPr algn="ctr" indent="0" marL="0">
+              <a:buNone/>
+            </a:pPr>
+            <a:r>
+              <a:rPr lang="en-US" sz="1300" dirty="0">
                 <a:solidFill>
                   <a:srgbClr val="5B6770"/>
                 </a:solidFill>
@@ -6225,43 +5956,130 @@
                 <a:ea typeface="Calibri" pitchFamily="34" charset="-122"/>
                 <a:cs typeface="Calibri" pitchFamily="34" charset="-120"/>
               </a:rPr>
-              <a:t>retrieval cites the policy rule or says it does not know. 0 false citations on 15 uncovered questions.  </a:t>
-            </a:r>
+              <a:t>It reports what the system actually did</a:t>
+            </a:r>
+            <a:endParaRPr lang="en-US" sz="1300" dirty="0"/>
+          </a:p>
+        </p:txBody>
+      </p:sp>
+      <p:sp>
+        <p:nvSpPr>
+          <p:cNvPr id="33" name="Shape 26"/>
+          <p:cNvSpPr/>
+          <p:nvPr/>
+        </p:nvSpPr>
+        <p:spPr>
+          <a:xfrm>
+            <a:off x="548640" y="5074920"/>
+            <a:ext cx="11082528" cy="1051560"/>
+          </a:xfrm>
+          <a:prstGeom prst="roundRect">
+            <a:avLst>
+              <a:gd name="adj" fmla="val 10435"/>
+            </a:avLst>
+          </a:prstGeom>
+          <a:solidFill>
+            <a:srgbClr val="0B1F2A"/>
+          </a:solidFill>
+          <a:ln w="12700">
+            <a:solidFill>
+              <a:srgbClr val="0B1F2A"/>
+            </a:solidFill>
+            <a:prstDash val="solid"/>
+          </a:ln>
+        </p:spPr>
+      </p:sp>
+      <p:sp>
+        <p:nvSpPr>
+          <p:cNvPr id="34" name="Shape 27"/>
+          <p:cNvSpPr/>
+          <p:nvPr/>
+        </p:nvSpPr>
+        <p:spPr>
+          <a:xfrm>
+            <a:off x="822960" y="5321808"/>
+            <a:ext cx="566928" cy="566928"/>
+          </a:xfrm>
+          <a:prstGeom prst="ellipse">
+            <a:avLst/>
+          </a:prstGeom>
+          <a:solidFill>
+            <a:srgbClr val="9FE0C4"/>
+          </a:solidFill>
+          <a:ln w="12700">
+            <a:solidFill>
+              <a:srgbClr val="9FE0C4"/>
+            </a:solidFill>
+            <a:prstDash val="solid"/>
+          </a:ln>
+        </p:spPr>
+      </p:sp>
+      <p:pic>
+        <p:nvPicPr>
+          <p:cNvPr id="35" name="Image 5" descr="preencoded.png">    </p:cNvPr>
+          <p:cNvPicPr>
+            <a:picLocks noChangeAspect="1"/>
+          </p:cNvPicPr>
+          <p:nvPr/>
+        </p:nvPicPr>
+        <p:blipFill>
+          <a:blip r:embed="rId6"/>
+          <a:stretch>
+            <a:fillRect/>
+          </a:stretch>
+        </p:blipFill>
+        <p:spPr>
+          <a:xfrm>
+            <a:off x="970361" y="5469209"/>
+            <a:ext cx="272125" cy="272125"/>
+          </a:xfrm>
+          <a:prstGeom prst="rect">
+            <a:avLst/>
+          </a:prstGeom>
+        </p:spPr>
+      </p:pic>
+      <p:sp>
+        <p:nvSpPr>
+          <p:cNvPr id="36" name="Text 28"/>
+          <p:cNvSpPr txBox="1"/>
+          <p:nvPr/>
+        </p:nvSpPr>
+        <p:spPr>
+          <a:xfrm>
+            <a:off x="1600200" y="5422392"/>
+            <a:ext cx="9784080" cy="411480"/>
+          </a:xfrm>
+          <a:prstGeom prst="rect">
+            <a:avLst/>
+          </a:prstGeom>
+          <a:noFill/>
+          <a:ln/>
+        </p:spPr>
+        <p:txBody>
+          <a:bodyPr wrap="square" lIns="0" tIns="0" rIns="0" bIns="0" rtlCol="0" anchor="t"/>
+          <a:lstStyle/>
+          <a:p>
             <a:pPr indent="0" marL="0">
               <a:buNone/>
             </a:pPr>
             <a:r>
-              <a:rPr lang="en-US" sz="1350" b="1" dirty="0">
-                <a:solidFill>
-                  <a:srgbClr val="B5483A"/>
-                </a:solidFill>
-                <a:latin typeface="Calibri" pitchFamily="34" charset="0"/>
-                <a:ea typeface="Calibri" pitchFamily="34" charset="-122"/>
-                <a:cs typeface="Calibri" pitchFamily="34" charset="-120"/>
-              </a:rPr>
-              <a:t>Negative result reported: </a:t>
-            </a:r>
-            <a:pPr indent="0" marL="0">
-              <a:buNone/>
-            </a:pPr>
-            <a:r>
-              <a:rPr lang="en-US" sz="1350" dirty="0">
-                <a:solidFill>
-                  <a:srgbClr val="5B6770"/>
-                </a:solidFill>
-                <a:latin typeface="Calibri" pitchFamily="34" charset="0"/>
-                <a:ea typeface="Calibri" pitchFamily="34" charset="-122"/>
-                <a:cs typeface="Calibri" pitchFamily="34" charset="-120"/>
-              </a:rPr>
-              <a:t>the SLA model has no signal, so it always abstains.</a:t>
-            </a:r>
-            <a:endParaRPr lang="en-US" sz="1350" dirty="0"/>
-          </a:p>
-        </p:txBody>
-      </p:sp>
-      <p:sp>
-        <p:nvSpPr>
-          <p:cNvPr id="29" name="Text 23"/>
+              <a:rPr lang="en-US" sz="1900" b="1" dirty="0">
+                <a:solidFill>
+                  <a:srgbClr val="FFFFFF"/>
+                </a:solidFill>
+                <a:latin typeface="Calibri" pitchFamily="34" charset="0"/>
+                <a:ea typeface="Calibri" pitchFamily="34" charset="-122"/>
+                <a:cs typeface="Calibri" pitchFamily="34" charset="-120"/>
+              </a:rPr>
+              <a:t>Enforced in code and versioned policy, not in a prompt. A prompt injection cannot break them.</a:t>
+            </a:r>
+            <a:endParaRPr lang="en-US" sz="1900" dirty="0"/>
+          </a:p>
+        </p:txBody>
+      </p:sp>
+      <p:sp>
+        <p:nvSpPr>
+          <p:cNvPr id="37" name="Text 29"/>
           <p:cNvSpPr txBox="1"/>
           <p:nvPr/>
         </p:nvSpPr>
@@ -6300,7 +6118,7 @@
       </p:sp>
       <p:sp>
         <p:nvSpPr>
-          <p:cNvPr id="30" name="Text 24"/>
+          <p:cNvPr id="38" name="Text 30"/>
           <p:cNvSpPr txBox="1"/>
           <p:nvPr/>
         </p:nvSpPr>
@@ -6395,7 +6213,7 @@
                 <a:ea typeface="Calibri" pitchFamily="34" charset="-122"/>
                 <a:cs typeface="Calibri" pitchFamily="34" charset="-120"/>
               </a:rPr>
-              <a:t>On a fresh held-out set, the agent beats the rules baseline</a:t>
+              <a:t>Under the hood: the model talks, policy as code acts</a:t>
             </a:r>
             <a:endParaRPr lang="en-US" sz="3200" dirty="0"/>
           </a:p>
@@ -6409,12 +6227,272 @@
         </p:nvSpPr>
         <p:spPr>
           <a:xfrm>
-            <a:off x="548640" y="1371600"/>
-            <a:ext cx="2651760" cy="1874520"/>
+            <a:off x="548640" y="1325880"/>
+            <a:ext cx="3429000" cy="868680"/>
           </a:xfrm>
           <a:prstGeom prst="roundRect">
             <a:avLst>
-              <a:gd name="adj" fmla="val 5854"/>
+              <a:gd name="adj" fmla="val 10526"/>
+            </a:avLst>
+          </a:prstGeom>
+          <a:solidFill>
+            <a:srgbClr val="DCEFE7"/>
+          </a:solidFill>
+          <a:ln w="12700">
+            <a:solidFill>
+              <a:srgbClr val="DCEFE7"/>
+            </a:solidFill>
+            <a:prstDash val="solid"/>
+          </a:ln>
+        </p:spPr>
+      </p:sp>
+      <p:sp>
+        <p:nvSpPr>
+          <p:cNvPr id="4" name="Text 2"/>
+          <p:cNvSpPr txBox="1"/>
+          <p:nvPr/>
+        </p:nvSpPr>
+        <p:spPr>
+          <a:xfrm>
+            <a:off x="731520" y="1435608"/>
+            <a:ext cx="3063240" cy="292608"/>
+          </a:xfrm>
+          <a:prstGeom prst="rect">
+            <a:avLst/>
+          </a:prstGeom>
+          <a:noFill/>
+          <a:ln/>
+        </p:spPr>
+        <p:txBody>
+          <a:bodyPr wrap="square" lIns="0" tIns="0" rIns="0" bIns="0" rtlCol="0" anchor="t"/>
+          <a:lstStyle/>
+          <a:p>
+            <a:pPr indent="0" marL="0">
+              <a:buNone/>
+            </a:pPr>
+            <a:r>
+              <a:rPr lang="en-US" sz="1500" b="1" dirty="0">
+                <a:solidFill>
+                  <a:srgbClr val="0B1F2A"/>
+                </a:solidFill>
+                <a:latin typeface="Calibri" pitchFamily="34" charset="0"/>
+                <a:ea typeface="Calibri" pitchFamily="34" charset="-122"/>
+                <a:cs typeface="Calibri" pitchFamily="34" charset="-120"/>
+              </a:rPr>
+              <a:t>Online banking and chat</a:t>
+            </a:r>
+            <a:endParaRPr lang="en-US" sz="1500" dirty="0"/>
+          </a:p>
+        </p:txBody>
+      </p:sp>
+      <p:sp>
+        <p:nvSpPr>
+          <p:cNvPr id="5" name="Text 3"/>
+          <p:cNvSpPr txBox="1"/>
+          <p:nvPr/>
+        </p:nvSpPr>
+        <p:spPr>
+          <a:xfrm>
+            <a:off x="731520" y="1746504"/>
+            <a:ext cx="3063240" cy="411480"/>
+          </a:xfrm>
+          <a:prstGeom prst="rect">
+            <a:avLst/>
+          </a:prstGeom>
+          <a:noFill/>
+          <a:ln/>
+        </p:spPr>
+        <p:txBody>
+          <a:bodyPr wrap="square" lIns="0" tIns="0" rIns="0" bIns="0" rtlCol="0" anchor="t"/>
+          <a:lstStyle/>
+          <a:p>
+            <a:pPr indent="0" marL="0">
+              <a:buNone/>
+            </a:pPr>
+            <a:r>
+              <a:rPr lang="en-US" sz="1150" dirty="0">
+                <a:solidFill>
+                  <a:srgbClr val="5B6770"/>
+                </a:solidFill>
+                <a:latin typeface="Calibri" pitchFamily="34" charset="0"/>
+                <a:ea typeface="Calibri" pitchFamily="34" charset="-122"/>
+                <a:cs typeface="Calibri" pitchFamily="34" charset="-120"/>
+              </a:rPr>
+              <a:t>Firebase Hosting. Lía, always disclosed as AI</a:t>
+            </a:r>
+            <a:endParaRPr lang="en-US" sz="1150" dirty="0"/>
+          </a:p>
+        </p:txBody>
+      </p:sp>
+      <p:sp>
+        <p:nvSpPr>
+          <p:cNvPr id="6" name="Shape 4"/>
+          <p:cNvSpPr/>
+          <p:nvPr/>
+        </p:nvSpPr>
+        <p:spPr>
+          <a:xfrm>
+            <a:off x="4160520" y="1325880"/>
+            <a:ext cx="3429000" cy="868680"/>
+          </a:xfrm>
+          <a:prstGeom prst="roundRect">
+            <a:avLst>
+              <a:gd name="adj" fmla="val 10526"/>
+            </a:avLst>
+          </a:prstGeom>
+          <a:solidFill>
+            <a:srgbClr val="DCEFE7"/>
+          </a:solidFill>
+          <a:ln w="12700">
+            <a:solidFill>
+              <a:srgbClr val="DCEFE7"/>
+            </a:solidFill>
+            <a:prstDash val="solid"/>
+          </a:ln>
+        </p:spPr>
+      </p:sp>
+      <p:sp>
+        <p:nvSpPr>
+          <p:cNvPr id="7" name="Text 5"/>
+          <p:cNvSpPr txBox="1"/>
+          <p:nvPr/>
+        </p:nvSpPr>
+        <p:spPr>
+          <a:xfrm>
+            <a:off x="4343400" y="1435608"/>
+            <a:ext cx="3063240" cy="292608"/>
+          </a:xfrm>
+          <a:prstGeom prst="rect">
+            <a:avLst/>
+          </a:prstGeom>
+          <a:noFill/>
+          <a:ln/>
+        </p:spPr>
+        <p:txBody>
+          <a:bodyPr wrap="square" lIns="0" tIns="0" rIns="0" bIns="0" rtlCol="0" anchor="t"/>
+          <a:lstStyle/>
+          <a:p>
+            <a:pPr indent="0" marL="0">
+              <a:buNone/>
+            </a:pPr>
+            <a:r>
+              <a:rPr lang="en-US" sz="1500" b="1" dirty="0">
+                <a:solidFill>
+                  <a:srgbClr val="0B1F2A"/>
+                </a:solidFill>
+                <a:latin typeface="Calibri" pitchFamily="34" charset="0"/>
+                <a:ea typeface="Calibri" pitchFamily="34" charset="-122"/>
+                <a:cs typeface="Calibri" pitchFamily="34" charset="-120"/>
+              </a:rPr>
+              <a:t>Expert console + AI copilot</a:t>
+            </a:r>
+            <a:endParaRPr lang="en-US" sz="1500" dirty="0"/>
+          </a:p>
+        </p:txBody>
+      </p:sp>
+      <p:sp>
+        <p:nvSpPr>
+          <p:cNvPr id="8" name="Text 6"/>
+          <p:cNvSpPr txBox="1"/>
+          <p:nvPr/>
+        </p:nvSpPr>
+        <p:spPr>
+          <a:xfrm>
+            <a:off x="4343400" y="1746504"/>
+            <a:ext cx="3063240" cy="411480"/>
+          </a:xfrm>
+          <a:prstGeom prst="rect">
+            <a:avLst/>
+          </a:prstGeom>
+          <a:noFill/>
+          <a:ln/>
+        </p:spPr>
+        <p:txBody>
+          <a:bodyPr wrap="square" lIns="0" tIns="0" rIns="0" bIns="0" rtlCol="0" anchor="t"/>
+          <a:lstStyle/>
+          <a:p>
+            <a:pPr indent="0" marL="0">
+              <a:buNone/>
+            </a:pPr>
+            <a:r>
+              <a:rPr lang="en-US" sz="1150" dirty="0">
+                <a:solidFill>
+                  <a:srgbClr val="5B6770"/>
+                </a:solidFill>
+                <a:latin typeface="Calibri" pitchFamily="34" charset="0"/>
+                <a:ea typeface="Calibri" pitchFamily="34" charset="-122"/>
+                <a:cs typeface="Calibri" pitchFamily="34" charset="-120"/>
+              </a:rPr>
+              <a:t>19-field handoff, drafted reply, human sends</a:t>
+            </a:r>
+            <a:endParaRPr lang="en-US" sz="1150" dirty="0"/>
+          </a:p>
+        </p:txBody>
+      </p:sp>
+      <p:sp>
+        <p:nvSpPr>
+          <p:cNvPr id="9" name="Shape 7"/>
+          <p:cNvSpPr/>
+          <p:nvPr/>
+        </p:nvSpPr>
+        <p:spPr>
+          <a:xfrm>
+            <a:off x="2103120" y="2221992"/>
+            <a:ext cx="274320" cy="219456"/>
+          </a:xfrm>
+          <a:prstGeom prst="downArrow">
+            <a:avLst/>
+          </a:prstGeom>
+          <a:solidFill>
+            <a:srgbClr val="C9D3D0"/>
+          </a:solidFill>
+          <a:ln w="12700">
+            <a:solidFill>
+              <a:srgbClr val="C9D3D0"/>
+            </a:solidFill>
+            <a:prstDash val="solid"/>
+          </a:ln>
+        </p:spPr>
+      </p:sp>
+      <p:sp>
+        <p:nvSpPr>
+          <p:cNvPr id="10" name="Shape 8"/>
+          <p:cNvSpPr/>
+          <p:nvPr/>
+        </p:nvSpPr>
+        <p:spPr>
+          <a:xfrm>
+            <a:off x="5760720" y="2221992"/>
+            <a:ext cx="274320" cy="219456"/>
+          </a:xfrm>
+          <a:prstGeom prst="downArrow">
+            <a:avLst/>
+          </a:prstGeom>
+          <a:solidFill>
+            <a:srgbClr val="C9D3D0"/>
+          </a:solidFill>
+          <a:ln w="12700">
+            <a:solidFill>
+              <a:srgbClr val="C9D3D0"/>
+            </a:solidFill>
+            <a:prstDash val="solid"/>
+          </a:ln>
+        </p:spPr>
+      </p:sp>
+      <p:sp>
+        <p:nvSpPr>
+          <p:cNvPr id="11" name="Shape 9"/>
+          <p:cNvSpPr/>
+          <p:nvPr/>
+        </p:nvSpPr>
+        <p:spPr>
+          <a:xfrm>
+            <a:off x="548640" y="2468880"/>
+            <a:ext cx="7040880" cy="868680"/>
+          </a:xfrm>
+          <a:prstGeom prst="roundRect">
+            <a:avLst>
+              <a:gd name="adj" fmla="val 10526"/>
             </a:avLst>
           </a:prstGeom>
           <a:solidFill>
@@ -6430,14 +6508,14 @@
       </p:sp>
       <p:sp>
         <p:nvSpPr>
-          <p:cNvPr id="4" name="Text 2"/>
-          <p:cNvSpPr txBox="1"/>
-          <p:nvPr/>
-        </p:nvSpPr>
-        <p:spPr>
-          <a:xfrm>
-            <a:off x="777240" y="1536192"/>
-            <a:ext cx="2194560" cy="868680"/>
+          <p:cNvPr id="12" name="Text 10"/>
+          <p:cNvSpPr txBox="1"/>
+          <p:nvPr/>
+        </p:nvSpPr>
+        <p:spPr>
+          <a:xfrm>
+            <a:off x="731520" y="2578608"/>
+            <a:ext cx="6675120" cy="292608"/>
           </a:xfrm>
           <a:prstGeom prst="rect">
             <a:avLst/>
@@ -6453,30 +6531,30 @@
               <a:buNone/>
             </a:pPr>
             <a:r>
-              <a:rPr lang="en-US" sz="4400" b="1" dirty="0">
-                <a:solidFill>
-                  <a:srgbClr val="0B6E4F"/>
-                </a:solidFill>
-                <a:latin typeface="Calibri" pitchFamily="34" charset="0"/>
-                <a:ea typeface="Calibri" pitchFamily="34" charset="-122"/>
-                <a:cs typeface="Calibri" pitchFamily="34" charset="-120"/>
-              </a:rPr>
-              <a:t>89%</a:t>
-            </a:r>
-            <a:endParaRPr lang="en-US" sz="4400" dirty="0"/>
-          </a:p>
-        </p:txBody>
-      </p:sp>
-      <p:sp>
-        <p:nvSpPr>
-          <p:cNvPr id="5" name="Text 3"/>
-          <p:cNvSpPr txBox="1"/>
-          <p:nvPr/>
-        </p:nvSpPr>
-        <p:spPr>
-          <a:xfrm>
-            <a:off x="777240" y="2423160"/>
-            <a:ext cx="2194560" cy="731520"/>
+              <a:rPr lang="en-US" sz="1500" b="1" dirty="0">
+                <a:solidFill>
+                  <a:srgbClr val="0B1F2A"/>
+                </a:solidFill>
+                <a:latin typeface="Calibri" pitchFamily="34" charset="0"/>
+                <a:ea typeface="Calibri" pitchFamily="34" charset="-122"/>
+                <a:cs typeface="Calibri" pitchFamily="34" charset="-120"/>
+              </a:rPr>
+              <a:t>Channel service on Cloud Run</a:t>
+            </a:r>
+            <a:endParaRPr lang="en-US" sz="1500" dirty="0"/>
+          </a:p>
+        </p:txBody>
+      </p:sp>
+      <p:sp>
+        <p:nvSpPr>
+          <p:cNvPr id="13" name="Text 11"/>
+          <p:cNvSpPr txBox="1"/>
+          <p:nvPr/>
+        </p:nvSpPr>
+        <p:spPr>
+          <a:xfrm>
+            <a:off x="731520" y="2889504"/>
+            <a:ext cx="6675120" cy="411480"/>
           </a:xfrm>
           <a:prstGeom prst="rect">
             <a:avLst/>
@@ -6492,7 +6570,7 @@
               <a:buNone/>
             </a:pPr>
             <a:r>
-              <a:rPr lang="en-US" sz="1400" dirty="0">
+              <a:rPr lang="en-US" sz="1150" dirty="0">
                 <a:solidFill>
                   <a:srgbClr val="5B6770"/>
                 </a:solidFill>
@@ -6500,34 +6578,32 @@
                 <a:ea typeface="Calibri" pitchFamily="34" charset="-122"/>
                 <a:cs typeface="Calibri" pitchFamily="34" charset="-120"/>
               </a:rPr>
-              <a:t>of 129 runs pass every check. 43 new cases, frozen before building</a:t>
-            </a:r>
-            <a:endParaRPr lang="en-US" sz="1400" dirty="0"/>
-          </a:p>
-        </p:txBody>
-      </p:sp>
-      <p:sp>
-        <p:nvSpPr>
-          <p:cNvPr id="6" name="Shape 4"/>
+              <a:t>Trusted session, one-time on-screen approval, output filter, bounded retries</a:t>
+            </a:r>
+            <a:endParaRPr lang="en-US" sz="1150" dirty="0"/>
+          </a:p>
+        </p:txBody>
+      </p:sp>
+      <p:sp>
+        <p:nvSpPr>
+          <p:cNvPr id="14" name="Shape 12"/>
           <p:cNvSpPr/>
           <p:nvPr/>
         </p:nvSpPr>
         <p:spPr>
           <a:xfrm>
-            <a:off x="3383280" y="1371600"/>
-            <a:ext cx="2651760" cy="1874520"/>
-          </a:xfrm>
-          <a:prstGeom prst="roundRect">
-            <a:avLst>
-              <a:gd name="adj" fmla="val 5854"/>
-            </a:avLst>
+            <a:off x="3931920" y="3364992"/>
+            <a:ext cx="274320" cy="219456"/>
+          </a:xfrm>
+          <a:prstGeom prst="downArrow">
+            <a:avLst/>
           </a:prstGeom>
           <a:solidFill>
-            <a:srgbClr val="F1F5F4"/>
+            <a:srgbClr val="C9D3D0"/>
           </a:solidFill>
           <a:ln w="12700">
             <a:solidFill>
-              <a:srgbClr val="F1F5F4"/>
+              <a:srgbClr val="C9D3D0"/>
             </a:solidFill>
             <a:prstDash val="solid"/>
           </a:ln>
@@ -6535,104 +6611,26 @@
       </p:sp>
       <p:sp>
         <p:nvSpPr>
-          <p:cNvPr id="7" name="Text 5"/>
-          <p:cNvSpPr txBox="1"/>
-          <p:nvPr/>
-        </p:nvSpPr>
-        <p:spPr>
-          <a:xfrm>
-            <a:off x="3611880" y="1536192"/>
-            <a:ext cx="2194560" cy="868680"/>
-          </a:xfrm>
-          <a:prstGeom prst="rect">
-            <a:avLst/>
-          </a:prstGeom>
-          <a:noFill/>
-          <a:ln/>
-        </p:spPr>
-        <p:txBody>
-          <a:bodyPr wrap="square" lIns="0" tIns="0" rIns="0" bIns="0" rtlCol="0" anchor="t"/>
-          <a:lstStyle/>
-          <a:p>
-            <a:pPr indent="0" marL="0">
-              <a:buNone/>
-            </a:pPr>
-            <a:r>
-              <a:rPr lang="en-US" sz="4400" b="1" dirty="0">
-                <a:solidFill>
-                  <a:srgbClr val="0B6E4F"/>
-                </a:solidFill>
-                <a:latin typeface="Calibri" pitchFamily="34" charset="0"/>
-                <a:ea typeface="Calibri" pitchFamily="34" charset="-122"/>
-                <a:cs typeface="Calibri" pitchFamily="34" charset="-120"/>
-              </a:rPr>
-              <a:t>82%</a:t>
-            </a:r>
-            <a:endParaRPr lang="en-US" sz="4400" dirty="0"/>
-          </a:p>
-        </p:txBody>
-      </p:sp>
-      <p:sp>
-        <p:nvSpPr>
-          <p:cNvPr id="8" name="Text 6"/>
-          <p:cNvSpPr txBox="1"/>
-          <p:nvPr/>
-        </p:nvSpPr>
-        <p:spPr>
-          <a:xfrm>
-            <a:off x="3611880" y="2423160"/>
-            <a:ext cx="2194560" cy="731520"/>
-          </a:xfrm>
-          <a:prstGeom prst="rect">
-            <a:avLst/>
-          </a:prstGeom>
-          <a:noFill/>
-          <a:ln/>
-        </p:spPr>
-        <p:txBody>
-          <a:bodyPr wrap="square" lIns="0" tIns="0" rIns="0" bIns="0" rtlCol="0" anchor="t"/>
-          <a:lstStyle/>
-          <a:p>
-            <a:pPr indent="0" marL="0">
-              <a:buNone/>
-            </a:pPr>
-            <a:r>
-              <a:rPr lang="en-US" sz="1400" dirty="0">
-                <a:solidFill>
-                  <a:srgbClr val="5B6770"/>
-                </a:solidFill>
-                <a:latin typeface="Calibri" pitchFamily="34" charset="0"/>
-                <a:ea typeface="Calibri" pitchFamily="34" charset="-122"/>
-                <a:cs typeface="Calibri" pitchFamily="34" charset="-120"/>
-              </a:rPr>
-              <a:t>safe automated resolution on resolvable cases. Rules: 62%</a:t>
-            </a:r>
-            <a:endParaRPr lang="en-US" sz="1400" dirty="0"/>
-          </a:p>
-        </p:txBody>
-      </p:sp>
-      <p:sp>
-        <p:nvSpPr>
-          <p:cNvPr id="9" name="Shape 7"/>
+          <p:cNvPr id="15" name="Shape 13"/>
           <p:cNvSpPr/>
           <p:nvPr/>
         </p:nvSpPr>
         <p:spPr>
           <a:xfrm>
-            <a:off x="6217920" y="1371600"/>
-            <a:ext cx="2651760" cy="1874520"/>
+            <a:off x="548640" y="3611880"/>
+            <a:ext cx="3429000" cy="1051560"/>
           </a:xfrm>
           <a:prstGeom prst="roundRect">
             <a:avLst>
-              <a:gd name="adj" fmla="val 5854"/>
+              <a:gd name="adj" fmla="val 8696"/>
             </a:avLst>
           </a:prstGeom>
           <a:solidFill>
-            <a:srgbClr val="F1F5F4"/>
+            <a:srgbClr val="0B6E4F"/>
           </a:solidFill>
           <a:ln w="12700">
             <a:solidFill>
-              <a:srgbClr val="F1F5F4"/>
+              <a:srgbClr val="0B6E4F"/>
             </a:solidFill>
             <a:prstDash val="solid"/>
           </a:ln>
@@ -6640,14 +6638,14 @@
       </p:sp>
       <p:sp>
         <p:nvSpPr>
-          <p:cNvPr id="10" name="Text 8"/>
-          <p:cNvSpPr txBox="1"/>
-          <p:nvPr/>
-        </p:nvSpPr>
-        <p:spPr>
-          <a:xfrm>
-            <a:off x="6446520" y="1536192"/>
-            <a:ext cx="2194560" cy="868680"/>
+          <p:cNvPr id="16" name="Text 14"/>
+          <p:cNvSpPr txBox="1"/>
+          <p:nvPr/>
+        </p:nvSpPr>
+        <p:spPr>
+          <a:xfrm>
+            <a:off x="731520" y="3721608"/>
+            <a:ext cx="3063240" cy="292608"/>
           </a:xfrm>
           <a:prstGeom prst="rect">
             <a:avLst/>
@@ -6663,30 +6661,30 @@
               <a:buNone/>
             </a:pPr>
             <a:r>
-              <a:rPr lang="en-US" sz="4400" b="1" dirty="0">
-                <a:solidFill>
-                  <a:srgbClr val="0B6E4F"/>
-                </a:solidFill>
-                <a:latin typeface="Calibri" pitchFamily="34" charset="0"/>
-                <a:ea typeface="Calibri" pitchFamily="34" charset="-122"/>
-                <a:cs typeface="Calibri" pitchFamily="34" charset="-120"/>
-              </a:rPr>
-              <a:t>0 / 18</a:t>
-            </a:r>
-            <a:endParaRPr lang="en-US" sz="4400" dirty="0"/>
-          </a:p>
-        </p:txBody>
-      </p:sp>
-      <p:sp>
-        <p:nvSpPr>
-          <p:cNvPr id="11" name="Text 9"/>
-          <p:cNvSpPr txBox="1"/>
-          <p:nvPr/>
-        </p:nvSpPr>
-        <p:spPr>
-          <a:xfrm>
-            <a:off x="6446520" y="2423160"/>
-            <a:ext cx="2194560" cy="731520"/>
+              <a:rPr lang="en-US" sz="1500" b="1" dirty="0">
+                <a:solidFill>
+                  <a:srgbClr val="FFFFFF"/>
+                </a:solidFill>
+                <a:latin typeface="Calibri" pitchFamily="34" charset="0"/>
+                <a:ea typeface="Calibri" pitchFamily="34" charset="-122"/>
+                <a:cs typeface="Calibri" pitchFamily="34" charset="-120"/>
+              </a:rPr>
+              <a:t>Agent on Agent Runtime</a:t>
+            </a:r>
+            <a:endParaRPr lang="en-US" sz="1500" dirty="0"/>
+          </a:p>
+        </p:txBody>
+      </p:sp>
+      <p:sp>
+        <p:nvSpPr>
+          <p:cNvPr id="17" name="Text 15"/>
+          <p:cNvSpPr txBox="1"/>
+          <p:nvPr/>
+        </p:nvSpPr>
+        <p:spPr>
+          <a:xfrm>
+            <a:off x="731520" y="4032504"/>
+            <a:ext cx="3063240" cy="594360"/>
           </a:xfrm>
           <a:prstGeom prst="rect">
             <a:avLst/>
@@ -6702,42 +6700,42 @@
               <a:buNone/>
             </a:pPr>
             <a:r>
-              <a:rPr lang="en-US" sz="1400" dirty="0">
-                <a:solidFill>
-                  <a:srgbClr val="5B6770"/>
-                </a:solidFill>
-                <a:latin typeface="Calibri" pitchFamily="34" charset="0"/>
-                <a:ea typeface="Calibri" pitchFamily="34" charset="-122"/>
-                <a:cs typeface="Calibri" pitchFamily="34" charset="-120"/>
-              </a:rPr>
-              <a:t>missed handoffs to a human</a:t>
-            </a:r>
-            <a:endParaRPr lang="en-US" sz="1400" dirty="0"/>
-          </a:p>
-        </p:txBody>
-      </p:sp>
-      <p:sp>
-        <p:nvSpPr>
-          <p:cNvPr id="12" name="Shape 10"/>
+              <a:rPr lang="en-US" sz="1150" dirty="0">
+                <a:solidFill>
+                  <a:srgbClr val="D5E2E0"/>
+                </a:solidFill>
+                <a:latin typeface="Calibri" pitchFamily="34" charset="0"/>
+                <a:ea typeface="Calibri" pitchFamily="34" charset="-122"/>
+                <a:cs typeface="Calibri" pitchFamily="34" charset="-120"/>
+              </a:rPr>
+              <a:t>Gemini 3.1 Flash-Lite, 8 typed tools. The customer comes from the session, never from the model</a:t>
+            </a:r>
+            <a:endParaRPr lang="en-US" sz="1150" dirty="0"/>
+          </a:p>
+        </p:txBody>
+      </p:sp>
+      <p:sp>
+        <p:nvSpPr>
+          <p:cNvPr id="18" name="Shape 16"/>
           <p:cNvSpPr/>
           <p:nvPr/>
         </p:nvSpPr>
         <p:spPr>
           <a:xfrm>
-            <a:off x="9052560" y="1371600"/>
-            <a:ext cx="2606040" cy="1874520"/>
+            <a:off x="4160520" y="3611880"/>
+            <a:ext cx="3429000" cy="1051560"/>
           </a:xfrm>
           <a:prstGeom prst="roundRect">
             <a:avLst>
-              <a:gd name="adj" fmla="val 5854"/>
+              <a:gd name="adj" fmla="val 8696"/>
             </a:avLst>
           </a:prstGeom>
           <a:solidFill>
-            <a:srgbClr val="F1F5F4"/>
+            <a:srgbClr val="F2A541"/>
           </a:solidFill>
           <a:ln w="12700">
             <a:solidFill>
-              <a:srgbClr val="F1F5F4"/>
+              <a:srgbClr val="F2A541"/>
             </a:solidFill>
             <a:prstDash val="solid"/>
           </a:ln>
@@ -6745,14 +6743,14 @@
       </p:sp>
       <p:sp>
         <p:nvSpPr>
-          <p:cNvPr id="13" name="Text 11"/>
-          <p:cNvSpPr txBox="1"/>
-          <p:nvPr/>
-        </p:nvSpPr>
-        <p:spPr>
-          <a:xfrm>
-            <a:off x="9281160" y="1536192"/>
-            <a:ext cx="2148840" cy="868680"/>
+          <p:cNvPr id="19" name="Text 17"/>
+          <p:cNvSpPr txBox="1"/>
+          <p:nvPr/>
+        </p:nvSpPr>
+        <p:spPr>
+          <a:xfrm>
+            <a:off x="4343400" y="3721608"/>
+            <a:ext cx="3063240" cy="292608"/>
           </a:xfrm>
           <a:prstGeom prst="rect">
             <a:avLst/>
@@ -6768,30 +6766,30 @@
               <a:buNone/>
             </a:pPr>
             <a:r>
-              <a:rPr lang="en-US" sz="4400" b="1" dirty="0">
-                <a:solidFill>
-                  <a:srgbClr val="B5483A"/>
-                </a:solidFill>
-                <a:latin typeface="Calibri" pitchFamily="34" charset="0"/>
-                <a:ea typeface="Calibri" pitchFamily="34" charset="-122"/>
-                <a:cs typeface="Calibri" pitchFamily="34" charset="-120"/>
-              </a:rPr>
-              <a:t>1 / 129</a:t>
-            </a:r>
-            <a:endParaRPr lang="en-US" sz="4400" dirty="0"/>
-          </a:p>
-        </p:txBody>
-      </p:sp>
-      <p:sp>
-        <p:nvSpPr>
-          <p:cNvPr id="14" name="Text 12"/>
-          <p:cNvSpPr txBox="1"/>
-          <p:nvPr/>
-        </p:nvSpPr>
-        <p:spPr>
-          <a:xfrm>
-            <a:off x="9281160" y="2423160"/>
-            <a:ext cx="2148840" cy="731520"/>
+              <a:rPr lang="en-US" sz="1500" b="1" dirty="0">
+                <a:solidFill>
+                  <a:srgbClr val="0B1F2A"/>
+                </a:solidFill>
+                <a:latin typeface="Calibri" pitchFamily="34" charset="0"/>
+                <a:ea typeface="Calibri" pitchFamily="34" charset="-122"/>
+                <a:cs typeface="Calibri" pitchFamily="34" charset="-120"/>
+              </a:rPr>
+              <a:t>Policy v1 as code</a:t>
+            </a:r>
+            <a:endParaRPr lang="en-US" sz="1500" dirty="0"/>
+          </a:p>
+        </p:txBody>
+      </p:sp>
+      <p:sp>
+        <p:nvSpPr>
+          <p:cNvPr id="20" name="Text 18"/>
+          <p:cNvSpPr txBox="1"/>
+          <p:nvPr/>
+        </p:nvSpPr>
+        <p:spPr>
+          <a:xfrm>
+            <a:off x="4343400" y="4032504"/>
+            <a:ext cx="3063240" cy="594360"/>
           </a:xfrm>
           <a:prstGeom prst="rect">
             <a:avLst/>
@@ -6807,7 +6805,7 @@
               <a:buNone/>
             </a:pPr>
             <a:r>
-              <a:rPr lang="en-US" sz="1400" dirty="0">
+              <a:rPr lang="en-US" sz="1150" dirty="0">
                 <a:solidFill>
                   <a:srgbClr val="5B6770"/>
                 </a:solidFill>
@@ -6815,38 +6813,409 @@
                 <a:ea typeface="Calibri" pitchFamily="34" charset="-122"/>
                 <a:cs typeface="Calibri" pitchFamily="34" charset="-120"/>
               </a:rPr>
-              <a:t>real unsafe outcome (echoed typed card digits). 3 more flags: fixture artifact</a:t>
+              <a:t>Escalation, auth level per action, provisional credit. Versioned and hashed</a:t>
+            </a:r>
+            <a:endParaRPr lang="en-US" sz="1150" dirty="0"/>
+          </a:p>
+        </p:txBody>
+      </p:sp>
+      <p:sp>
+        <p:nvSpPr>
+          <p:cNvPr id="21" name="Shape 19"/>
+          <p:cNvSpPr/>
+          <p:nvPr/>
+        </p:nvSpPr>
+        <p:spPr>
+          <a:xfrm>
+            <a:off x="2103120" y="4690872"/>
+            <a:ext cx="274320" cy="219456"/>
+          </a:xfrm>
+          <a:prstGeom prst="downArrow">
+            <a:avLst/>
+          </a:prstGeom>
+          <a:solidFill>
+            <a:srgbClr val="C9D3D0"/>
+          </a:solidFill>
+          <a:ln w="12700">
+            <a:solidFill>
+              <a:srgbClr val="C9D3D0"/>
+            </a:solidFill>
+            <a:prstDash val="solid"/>
+          </a:ln>
+        </p:spPr>
+      </p:sp>
+      <p:sp>
+        <p:nvSpPr>
+          <p:cNvPr id="22" name="Shape 20"/>
+          <p:cNvSpPr/>
+          <p:nvPr/>
+        </p:nvSpPr>
+        <p:spPr>
+          <a:xfrm>
+            <a:off x="5760720" y="4690872"/>
+            <a:ext cx="274320" cy="219456"/>
+          </a:xfrm>
+          <a:prstGeom prst="downArrow">
+            <a:avLst/>
+          </a:prstGeom>
+          <a:solidFill>
+            <a:srgbClr val="C9D3D0"/>
+          </a:solidFill>
+          <a:ln w="12700">
+            <a:solidFill>
+              <a:srgbClr val="C9D3D0"/>
+            </a:solidFill>
+            <a:prstDash val="solid"/>
+          </a:ln>
+        </p:spPr>
+      </p:sp>
+      <p:sp>
+        <p:nvSpPr>
+          <p:cNvPr id="23" name="Shape 21"/>
+          <p:cNvSpPr/>
+          <p:nvPr/>
+        </p:nvSpPr>
+        <p:spPr>
+          <a:xfrm>
+            <a:off x="548640" y="4937760"/>
+            <a:ext cx="4343400" cy="1234440"/>
+          </a:xfrm>
+          <a:prstGeom prst="roundRect">
+            <a:avLst>
+              <a:gd name="adj" fmla="val 7407"/>
+            </a:avLst>
+          </a:prstGeom>
+          <a:solidFill>
+            <a:srgbClr val="0B1F2A"/>
+          </a:solidFill>
+          <a:ln w="12700">
+            <a:solidFill>
+              <a:srgbClr val="0B1F2A"/>
+            </a:solidFill>
+            <a:prstDash val="solid"/>
+          </a:ln>
+        </p:spPr>
+      </p:sp>
+      <p:sp>
+        <p:nvSpPr>
+          <p:cNvPr id="24" name="Text 22"/>
+          <p:cNvSpPr txBox="1"/>
+          <p:nvPr/>
+        </p:nvSpPr>
+        <p:spPr>
+          <a:xfrm>
+            <a:off x="731520" y="5047488"/>
+            <a:ext cx="3977640" cy="292608"/>
+          </a:xfrm>
+          <a:prstGeom prst="rect">
+            <a:avLst/>
+          </a:prstGeom>
+          <a:noFill/>
+          <a:ln/>
+        </p:spPr>
+        <p:txBody>
+          <a:bodyPr wrap="square" lIns="0" tIns="0" rIns="0" bIns="0" rtlCol="0" anchor="t"/>
+          <a:lstStyle/>
+          <a:p>
+            <a:pPr indent="0" marL="0">
+              <a:buNone/>
+            </a:pPr>
+            <a:r>
+              <a:rPr lang="en-US" sz="1500" b="1" dirty="0">
+                <a:solidFill>
+                  <a:srgbClr val="FFFFFF"/>
+                </a:solidFill>
+                <a:latin typeface="Calibri" pitchFamily="34" charset="0"/>
+                <a:ea typeface="Calibri" pitchFamily="34" charset="-122"/>
+                <a:cs typeface="Calibri" pitchFamily="34" charset="-120"/>
+              </a:rPr>
+              <a:t>BigQuery: bronze, silver, gold, platinum</a:t>
+            </a:r>
+            <a:endParaRPr lang="en-US" sz="1500" dirty="0"/>
+          </a:p>
+        </p:txBody>
+      </p:sp>
+      <p:sp>
+        <p:nvSpPr>
+          <p:cNvPr id="25" name="Text 23"/>
+          <p:cNvSpPr txBox="1"/>
+          <p:nvPr/>
+        </p:nvSpPr>
+        <p:spPr>
+          <a:xfrm>
+            <a:off x="731520" y="5358384"/>
+            <a:ext cx="3977640" cy="777240"/>
+          </a:xfrm>
+          <a:prstGeom prst="rect">
+            <a:avLst/>
+          </a:prstGeom>
+          <a:noFill/>
+          <a:ln/>
+        </p:spPr>
+        <p:txBody>
+          <a:bodyPr wrap="square" lIns="0" tIns="0" rIns="0" bIns="0" rtlCol="0" anchor="t"/>
+          <a:lstStyle/>
+          <a:p>
+            <a:pPr indent="0" marL="0">
+              <a:buNone/>
+            </a:pPr>
+            <a:r>
+              <a:rPr lang="en-US" sz="1150" dirty="0">
+                <a:solidFill>
+                  <a:srgbClr val="D5E2E0"/>
+                </a:solidFill>
+                <a:latin typeface="Calibri" pitchFamily="34" charset="0"/>
+                <a:ea typeface="Calibri" pitchFamily="34" charset="-122"/>
+                <a:cs typeface="Calibri" pitchFamily="34" charset="-120"/>
+              </a:rPr>
+              <a:t>19M rows, dbt with 56 tests, data contracts, hashed lineage, PII pseudonymized, freshness fixture</a:t>
+            </a:r>
+            <a:endParaRPr lang="en-US" sz="1150" dirty="0"/>
+          </a:p>
+        </p:txBody>
+      </p:sp>
+      <p:sp>
+        <p:nvSpPr>
+          <p:cNvPr id="26" name="Shape 24"/>
+          <p:cNvSpPr/>
+          <p:nvPr/>
+        </p:nvSpPr>
+        <p:spPr>
+          <a:xfrm>
+            <a:off x="5074920" y="4937760"/>
+            <a:ext cx="2514600" cy="1234440"/>
+          </a:xfrm>
+          <a:prstGeom prst="roundRect">
+            <a:avLst>
+              <a:gd name="adj" fmla="val 7407"/>
+            </a:avLst>
+          </a:prstGeom>
+          <a:solidFill>
+            <a:srgbClr val="0B1F2A"/>
+          </a:solidFill>
+          <a:ln w="12700">
+            <a:solidFill>
+              <a:srgbClr val="0B1F2A"/>
+            </a:solidFill>
+            <a:prstDash val="solid"/>
+          </a:ln>
+        </p:spPr>
+      </p:sp>
+      <p:sp>
+        <p:nvSpPr>
+          <p:cNvPr id="27" name="Text 25"/>
+          <p:cNvSpPr txBox="1"/>
+          <p:nvPr/>
+        </p:nvSpPr>
+        <p:spPr>
+          <a:xfrm>
+            <a:off x="5257800" y="5047488"/>
+            <a:ext cx="2148840" cy="292608"/>
+          </a:xfrm>
+          <a:prstGeom prst="rect">
+            <a:avLst/>
+          </a:prstGeom>
+          <a:noFill/>
+          <a:ln/>
+        </p:spPr>
+        <p:txBody>
+          <a:bodyPr wrap="square" lIns="0" tIns="0" rIns="0" bIns="0" rtlCol="0" anchor="t"/>
+          <a:lstStyle/>
+          <a:p>
+            <a:pPr indent="0" marL="0">
+              <a:buNone/>
+            </a:pPr>
+            <a:r>
+              <a:rPr lang="en-US" sz="1500" b="1" dirty="0">
+                <a:solidFill>
+                  <a:srgbClr val="FFFFFF"/>
+                </a:solidFill>
+                <a:latin typeface="Calibri" pitchFamily="34" charset="0"/>
+                <a:ea typeface="Calibri" pitchFamily="34" charset="-122"/>
+                <a:cs typeface="Calibri" pitchFamily="34" charset="-120"/>
+              </a:rPr>
+              <a:t>Firestore</a:t>
+            </a:r>
+            <a:endParaRPr lang="en-US" sz="1500" dirty="0"/>
+          </a:p>
+        </p:txBody>
+      </p:sp>
+      <p:sp>
+        <p:nvSpPr>
+          <p:cNvPr id="28" name="Text 26"/>
+          <p:cNvSpPr txBox="1"/>
+          <p:nvPr/>
+        </p:nvSpPr>
+        <p:spPr>
+          <a:xfrm>
+            <a:off x="5257800" y="5358384"/>
+            <a:ext cx="2148840" cy="777240"/>
+          </a:xfrm>
+          <a:prstGeom prst="rect">
+            <a:avLst/>
+          </a:prstGeom>
+          <a:noFill/>
+          <a:ln/>
+        </p:spPr>
+        <p:txBody>
+          <a:bodyPr wrap="square" lIns="0" tIns="0" rIns="0" bIns="0" rtlCol="0" anchor="t"/>
+          <a:lstStyle/>
+          <a:p>
+            <a:pPr indent="0" marL="0">
+              <a:buNone/>
+            </a:pPr>
+            <a:r>
+              <a:rPr lang="en-US" sz="1150" dirty="0">
+                <a:solidFill>
+                  <a:srgbClr val="D5E2E0"/>
+                </a:solidFill>
+                <a:latin typeface="Calibri" pitchFamily="34" charset="0"/>
+                <a:ea typeface="Calibri" pitchFamily="34" charset="-122"/>
+                <a:cs typeface="Calibri" pitchFamily="34" charset="-120"/>
+              </a:rPr>
+              <a:t>Cases and handoffs, 30-day retention</a:t>
+            </a:r>
+            <a:endParaRPr lang="en-US" sz="1150" dirty="0"/>
+          </a:p>
+        </p:txBody>
+      </p:sp>
+      <p:sp>
+        <p:nvSpPr>
+          <p:cNvPr id="29" name="Text 27"/>
+          <p:cNvSpPr txBox="1"/>
+          <p:nvPr/>
+        </p:nvSpPr>
+        <p:spPr>
+          <a:xfrm>
+            <a:off x="8001000" y="1325880"/>
+            <a:ext cx="3657600" cy="274320"/>
+          </a:xfrm>
+          <a:prstGeom prst="rect">
+            <a:avLst/>
+          </a:prstGeom>
+          <a:noFill/>
+          <a:ln/>
+        </p:spPr>
+        <p:txBody>
+          <a:bodyPr wrap="square" lIns="0" tIns="0" rIns="0" bIns="0" rtlCol="0" anchor="t"/>
+          <a:lstStyle/>
+          <a:p>
+            <a:pPr indent="0" marL="0">
+              <a:buNone/>
+            </a:pPr>
+            <a:r>
+              <a:rPr lang="en-US" sz="1150" b="1" spc="200" kern="0" dirty="0">
+                <a:solidFill>
+                  <a:srgbClr val="0B6E4F"/>
+                </a:solidFill>
+                <a:latin typeface="Calibri" pitchFamily="34" charset="0"/>
+                <a:ea typeface="Calibri" pitchFamily="34" charset="-122"/>
+                <a:cs typeface="Calibri" pitchFamily="34" charset="-120"/>
+              </a:rPr>
+              <a:t>MACHINE LEARNING, EACH VS A BASELINE</a:t>
+            </a:r>
+            <a:endParaRPr lang="en-US" sz="1150" dirty="0"/>
+          </a:p>
+        </p:txBody>
+      </p:sp>
+      <p:sp>
+        <p:nvSpPr>
+          <p:cNvPr id="30" name="Shape 28"/>
+          <p:cNvSpPr/>
+          <p:nvPr/>
+        </p:nvSpPr>
+        <p:spPr>
+          <a:xfrm>
+            <a:off x="8001000" y="1691640"/>
+            <a:ext cx="502920" cy="502920"/>
+          </a:xfrm>
+          <a:prstGeom prst="ellipse">
+            <a:avLst/>
+          </a:prstGeom>
+          <a:solidFill>
+            <a:srgbClr val="0B6E4F"/>
+          </a:solidFill>
+          <a:ln w="12700">
+            <a:solidFill>
+              <a:srgbClr val="0B6E4F"/>
+            </a:solidFill>
+            <a:prstDash val="solid"/>
+          </a:ln>
+        </p:spPr>
+      </p:sp>
+      <p:pic>
+        <p:nvPicPr>
+          <p:cNvPr id="31" name="Image 0" descr="preencoded.png">    </p:cNvPr>
+          <p:cNvPicPr>
+            <a:picLocks noChangeAspect="1"/>
+          </p:cNvPicPr>
+          <p:nvPr/>
+        </p:nvPicPr>
+        <p:blipFill>
+          <a:blip r:embed="rId1"/>
+          <a:stretch>
+            <a:fillRect/>
+          </a:stretch>
+        </p:blipFill>
+        <p:spPr>
+          <a:xfrm>
+            <a:off x="8131759" y="1822399"/>
+            <a:ext cx="241402" cy="241402"/>
+          </a:xfrm>
+          <a:prstGeom prst="rect">
+            <a:avLst/>
+          </a:prstGeom>
+        </p:spPr>
+      </p:pic>
+      <p:sp>
+        <p:nvSpPr>
+          <p:cNvPr id="32" name="Text 29"/>
+          <p:cNvSpPr txBox="1"/>
+          <p:nvPr/>
+        </p:nvSpPr>
+        <p:spPr>
+          <a:xfrm>
+            <a:off x="8641080" y="1691640"/>
+            <a:ext cx="3017520" cy="274320"/>
+          </a:xfrm>
+          <a:prstGeom prst="rect">
+            <a:avLst/>
+          </a:prstGeom>
+          <a:noFill/>
+          <a:ln/>
+        </p:spPr>
+        <p:txBody>
+          <a:bodyPr wrap="square" lIns="0" tIns="0" rIns="0" bIns="0" rtlCol="0" anchor="t"/>
+          <a:lstStyle/>
+          <a:p>
+            <a:pPr indent="0" marL="0">
+              <a:buNone/>
+            </a:pPr>
+            <a:r>
+              <a:rPr lang="en-US" sz="1400" b="1" dirty="0">
+                <a:solidFill>
+                  <a:srgbClr val="0B1F2A"/>
+                </a:solidFill>
+                <a:latin typeface="Calibri" pitchFamily="34" charset="0"/>
+                <a:ea typeface="Calibri" pitchFamily="34" charset="-122"/>
+                <a:cs typeface="Calibri" pitchFamily="34" charset="-120"/>
+              </a:rPr>
+              <a:t>Policy retrieval with citation</a:t>
             </a:r>
             <a:endParaRPr lang="en-US" sz="1400" dirty="0"/>
           </a:p>
         </p:txBody>
       </p:sp>
-      <p:graphicFrame>
-        <p:nvGraphicFramePr>
-          <p:cNvPr id="15" name="Chart 0" descr=""/>
-          <p:cNvGraphicFramePr/>
-          <p:nvPr/>
-        </p:nvGraphicFramePr>
-        <p:xfrm>
-          <a:off x="457200" y="3474720"/>
-          <a:ext cx="6035040" cy="2788920"/>
-        </p:xfrm>
-        <a:graphic xmlns:a="http://schemas.openxmlformats.org/drawingml/2006/main">
-          <a:graphicData uri="http://schemas.openxmlformats.org/drawingml/2006/chart">
-            <c:chart xmlns:c="http://schemas.openxmlformats.org/drawingml/2006/chart" r:id="rId1"/>
-          </a:graphicData>
-        </a:graphic>
-      </p:graphicFrame>
-      <p:sp>
-        <p:nvSpPr>
-          <p:cNvPr id="16" name="Text 13"/>
-          <p:cNvSpPr txBox="1"/>
-          <p:nvPr/>
-        </p:nvSpPr>
-        <p:spPr>
-          <a:xfrm>
-            <a:off x="6858000" y="3566160"/>
-            <a:ext cx="4754880" cy="960120"/>
+      <p:sp>
+        <p:nvSpPr>
+          <p:cNvPr id="33" name="Text 30"/>
+          <p:cNvSpPr txBox="1"/>
+          <p:nvPr/>
+        </p:nvSpPr>
+        <p:spPr>
+          <a:xfrm>
+            <a:off x="8641080" y="1965960"/>
+            <a:ext cx="3017520" cy="274320"/>
           </a:xfrm>
           <a:prstGeom prst="rect">
             <a:avLst/>
@@ -6862,7 +7231,95 @@
               <a:buNone/>
             </a:pPr>
             <a:r>
-              <a:rPr lang="en-US" sz="1450" dirty="0">
+              <a:rPr lang="en-US" sz="1150" dirty="0">
+                <a:solidFill>
+                  <a:srgbClr val="5B6770"/>
+                </a:solidFill>
+                <a:latin typeface="Calibri" pitchFamily="34" charset="0"/>
+                <a:ea typeface="Calibri" pitchFamily="34" charset="-122"/>
+                <a:cs typeface="Calibri" pitchFamily="34" charset="-120"/>
+              </a:rPr>
+              <a:t>0.90 vs 0.52 (BM25). In the workflow</a:t>
+            </a:r>
+            <a:endParaRPr lang="en-US" sz="1150" dirty="0"/>
+          </a:p>
+        </p:txBody>
+      </p:sp>
+      <p:sp>
+        <p:nvSpPr>
+          <p:cNvPr id="34" name="Shape 31"/>
+          <p:cNvSpPr/>
+          <p:nvPr/>
+        </p:nvSpPr>
+        <p:spPr>
+          <a:xfrm>
+            <a:off x="8001000" y="2441448"/>
+            <a:ext cx="502920" cy="502920"/>
+          </a:xfrm>
+          <a:prstGeom prst="ellipse">
+            <a:avLst/>
+          </a:prstGeom>
+          <a:solidFill>
+            <a:srgbClr val="0B6E4F"/>
+          </a:solidFill>
+          <a:ln w="12700">
+            <a:solidFill>
+              <a:srgbClr val="0B6E4F"/>
+            </a:solidFill>
+            <a:prstDash val="solid"/>
+          </a:ln>
+        </p:spPr>
+      </p:sp>
+      <p:pic>
+        <p:nvPicPr>
+          <p:cNvPr id="35" name="Image 1" descr="preencoded.png">    </p:cNvPr>
+          <p:cNvPicPr>
+            <a:picLocks noChangeAspect="1"/>
+          </p:cNvPicPr>
+          <p:nvPr/>
+        </p:nvPicPr>
+        <p:blipFill>
+          <a:blip r:embed="rId2"/>
+          <a:stretch>
+            <a:fillRect/>
+          </a:stretch>
+        </p:blipFill>
+        <p:spPr>
+          <a:xfrm>
+            <a:off x="8131759" y="2572207"/>
+            <a:ext cx="241402" cy="241402"/>
+          </a:xfrm>
+          <a:prstGeom prst="rect">
+            <a:avLst/>
+          </a:prstGeom>
+        </p:spPr>
+      </p:pic>
+      <p:sp>
+        <p:nvSpPr>
+          <p:cNvPr id="36" name="Text 32"/>
+          <p:cNvSpPr txBox="1"/>
+          <p:nvPr/>
+        </p:nvSpPr>
+        <p:spPr>
+          <a:xfrm>
+            <a:off x="8641080" y="2441448"/>
+            <a:ext cx="3017520" cy="274320"/>
+          </a:xfrm>
+          <a:prstGeom prst="rect">
+            <a:avLst/>
+          </a:prstGeom>
+          <a:noFill/>
+          <a:ln/>
+        </p:spPr>
+        <p:txBody>
+          <a:bodyPr wrap="square" lIns="0" tIns="0" rIns="0" bIns="0" rtlCol="0" anchor="t"/>
+          <a:lstStyle/>
+          <a:p>
+            <a:pPr indent="0" marL="0">
+              <a:buNone/>
+            </a:pPr>
+            <a:r>
+              <a:rPr lang="en-US" sz="1400" b="1" dirty="0">
                 <a:solidFill>
                   <a:srgbClr val="0B1F2A"/>
                 </a:solidFill>
@@ -6870,22 +7327,227 @@
                 <a:ea typeface="Calibri" pitchFamily="34" charset="-122"/>
                 <a:cs typeface="Calibri" pitchFamily="34" charset="-120"/>
               </a:rPr>
-              <a:t>Rules tie on the core flow. The agent wins where rules cannot go. On an older set and version, rules led 91 to 80, with 0 of 96 unsafe.</a:t>
-            </a:r>
-            <a:endParaRPr lang="en-US" sz="1450" dirty="0"/>
-          </a:p>
-        </p:txBody>
-      </p:sp>
-      <p:sp>
-        <p:nvSpPr>
-          <p:cNvPr id="17" name="Shape 14"/>
+              <a:t>Contact-reason classifier</a:t>
+            </a:r>
+            <a:endParaRPr lang="en-US" sz="1400" dirty="0"/>
+          </a:p>
+        </p:txBody>
+      </p:sp>
+      <p:sp>
+        <p:nvSpPr>
+          <p:cNvPr id="37" name="Text 33"/>
+          <p:cNvSpPr txBox="1"/>
+          <p:nvPr/>
+        </p:nvSpPr>
+        <p:spPr>
+          <a:xfrm>
+            <a:off x="8641080" y="2715768"/>
+            <a:ext cx="3017520" cy="274320"/>
+          </a:xfrm>
+          <a:prstGeom prst="rect">
+            <a:avLst/>
+          </a:prstGeom>
+          <a:noFill/>
+          <a:ln/>
+        </p:spPr>
+        <p:txBody>
+          <a:bodyPr wrap="square" lIns="0" tIns="0" rIns="0" bIns="0" rtlCol="0" anchor="t"/>
+          <a:lstStyle/>
+          <a:p>
+            <a:pPr indent="0" marL="0">
+              <a:buNone/>
+            </a:pPr>
+            <a:r>
+              <a:rPr lang="en-US" sz="1150" dirty="0">
+                <a:solidFill>
+                  <a:srgbClr val="5B6770"/>
+                </a:solidFill>
+                <a:latin typeface="Calibri" pitchFamily="34" charset="0"/>
+                <a:ea typeface="Calibri" pitchFamily="34" charset="-122"/>
+                <a:cs typeface="Calibri" pitchFamily="34" charset="-120"/>
+              </a:rPr>
+              <a:t>macro-F1 0.40 vs 0.34 (rules)</a:t>
+            </a:r>
+            <a:endParaRPr lang="en-US" sz="1150" dirty="0"/>
+          </a:p>
+        </p:txBody>
+      </p:sp>
+      <p:sp>
+        <p:nvSpPr>
+          <p:cNvPr id="38" name="Shape 34"/>
           <p:cNvSpPr/>
           <p:nvPr/>
         </p:nvSpPr>
         <p:spPr>
           <a:xfrm>
-            <a:off x="6858000" y="4617720"/>
-            <a:ext cx="402336" cy="402336"/>
+            <a:off x="8001000" y="3191256"/>
+            <a:ext cx="502920" cy="502920"/>
+          </a:xfrm>
+          <a:prstGeom prst="ellipse">
+            <a:avLst/>
+          </a:prstGeom>
+          <a:solidFill>
+            <a:srgbClr val="0B6E4F"/>
+          </a:solidFill>
+          <a:ln w="12700">
+            <a:solidFill>
+              <a:srgbClr val="0B6E4F"/>
+            </a:solidFill>
+            <a:prstDash val="solid"/>
+          </a:ln>
+        </p:spPr>
+      </p:sp>
+      <p:pic>
+        <p:nvPicPr>
+          <p:cNvPr id="39" name="Image 2" descr="preencoded.png">    </p:cNvPr>
+          <p:cNvPicPr>
+            <a:picLocks noChangeAspect="1"/>
+          </p:cNvPicPr>
+          <p:nvPr/>
+        </p:nvPicPr>
+        <p:blipFill>
+          <a:blip r:embed="rId3"/>
+          <a:stretch>
+            <a:fillRect/>
+          </a:stretch>
+        </p:blipFill>
+        <p:spPr>
+          <a:xfrm>
+            <a:off x="8131759" y="3322015"/>
+            <a:ext cx="241402" cy="241402"/>
+          </a:xfrm>
+          <a:prstGeom prst="rect">
+            <a:avLst/>
+          </a:prstGeom>
+        </p:spPr>
+      </p:pic>
+      <p:sp>
+        <p:nvSpPr>
+          <p:cNvPr id="40" name="Text 35"/>
+          <p:cNvSpPr txBox="1"/>
+          <p:nvPr/>
+        </p:nvSpPr>
+        <p:spPr>
+          <a:xfrm>
+            <a:off x="8641080" y="3191256"/>
+            <a:ext cx="3017520" cy="274320"/>
+          </a:xfrm>
+          <a:prstGeom prst="rect">
+            <a:avLst/>
+          </a:prstGeom>
+          <a:noFill/>
+          <a:ln/>
+        </p:spPr>
+        <p:txBody>
+          <a:bodyPr wrap="square" lIns="0" tIns="0" rIns="0" bIns="0" rtlCol="0" anchor="t"/>
+          <a:lstStyle/>
+          <a:p>
+            <a:pPr indent="0" marL="0">
+              <a:buNone/>
+            </a:pPr>
+            <a:r>
+              <a:rPr lang="en-US" sz="1400" b="1" dirty="0">
+                <a:solidFill>
+                  <a:srgbClr val="0B1F2A"/>
+                </a:solidFill>
+                <a:latin typeface="Calibri" pitchFamily="34" charset="0"/>
+                <a:ea typeface="Calibri" pitchFamily="34" charset="-122"/>
+                <a:cs typeface="Calibri" pitchFamily="34" charset="-120"/>
+              </a:rPr>
+              <a:t>SLA-breach risk</a:t>
+            </a:r>
+            <a:endParaRPr lang="en-US" sz="1400" dirty="0"/>
+          </a:p>
+        </p:txBody>
+      </p:sp>
+      <p:sp>
+        <p:nvSpPr>
+          <p:cNvPr id="41" name="Text 36"/>
+          <p:cNvSpPr txBox="1"/>
+          <p:nvPr/>
+        </p:nvSpPr>
+        <p:spPr>
+          <a:xfrm>
+            <a:off x="8641080" y="3465576"/>
+            <a:ext cx="3017520" cy="274320"/>
+          </a:xfrm>
+          <a:prstGeom prst="rect">
+            <a:avLst/>
+          </a:prstGeom>
+          <a:noFill/>
+          <a:ln/>
+        </p:spPr>
+        <p:txBody>
+          <a:bodyPr wrap="square" lIns="0" tIns="0" rIns="0" bIns="0" rtlCol="0" anchor="t"/>
+          <a:lstStyle/>
+          <a:p>
+            <a:pPr indent="0" marL="0">
+              <a:buNone/>
+            </a:pPr>
+            <a:r>
+              <a:rPr lang="en-US" sz="1150" dirty="0">
+                <a:solidFill>
+                  <a:srgbClr val="5B6770"/>
+                </a:solidFill>
+                <a:latin typeface="Calibri" pitchFamily="34" charset="0"/>
+                <a:ea typeface="Calibri" pitchFamily="34" charset="-122"/>
+                <a:cs typeface="Calibri" pitchFamily="34" charset="-120"/>
+              </a:rPr>
+              <a:t>No signal (AUC 0.50). Reported, abstains</a:t>
+            </a:r>
+            <a:endParaRPr lang="en-US" sz="1150" dirty="0"/>
+          </a:p>
+        </p:txBody>
+      </p:sp>
+      <p:sp>
+        <p:nvSpPr>
+          <p:cNvPr id="42" name="Text 37"/>
+          <p:cNvSpPr txBox="1"/>
+          <p:nvPr/>
+        </p:nvSpPr>
+        <p:spPr>
+          <a:xfrm>
+            <a:off x="8001000" y="4069080"/>
+            <a:ext cx="3657600" cy="274320"/>
+          </a:xfrm>
+          <a:prstGeom prst="rect">
+            <a:avLst/>
+          </a:prstGeom>
+          <a:noFill/>
+          <a:ln/>
+        </p:spPr>
+        <p:txBody>
+          <a:bodyPr wrap="square" lIns="0" tIns="0" rIns="0" bIns="0" rtlCol="0" anchor="t"/>
+          <a:lstStyle/>
+          <a:p>
+            <a:pPr indent="0" marL="0">
+              <a:buNone/>
+            </a:pPr>
+            <a:r>
+              <a:rPr lang="en-US" sz="1150" b="1" spc="200" kern="0" dirty="0">
+                <a:solidFill>
+                  <a:srgbClr val="0B6E4F"/>
+                </a:solidFill>
+                <a:latin typeface="Calibri" pitchFamily="34" charset="0"/>
+                <a:ea typeface="Calibri" pitchFamily="34" charset="-122"/>
+                <a:cs typeface="Calibri" pitchFamily="34" charset="-120"/>
+              </a:rPr>
+              <a:t>OPERATIONS</a:t>
+            </a:r>
+            <a:endParaRPr lang="en-US" sz="1150" dirty="0"/>
+          </a:p>
+        </p:txBody>
+      </p:sp>
+      <p:sp>
+        <p:nvSpPr>
+          <p:cNvPr id="43" name="Shape 38"/>
+          <p:cNvSpPr/>
+          <p:nvPr/>
+        </p:nvSpPr>
+        <p:spPr>
+          <a:xfrm>
+            <a:off x="8001000" y="4434840"/>
+            <a:ext cx="365760" cy="365760"/>
           </a:xfrm>
           <a:prstGeom prst="ellipse">
             <a:avLst/>
@@ -6903,22 +7565,22 @@
       </p:sp>
       <p:pic>
         <p:nvPicPr>
-          <p:cNvPr id="18" name="Image 0" descr="preencoded.png">    </p:cNvPr>
+          <p:cNvPr id="44" name="Image 3" descr="preencoded.png">    </p:cNvPr>
           <p:cNvPicPr>
             <a:picLocks noChangeAspect="1"/>
           </p:cNvPicPr>
           <p:nvPr/>
         </p:nvPicPr>
         <p:blipFill>
-          <a:blip r:embed="rId2"/>
+          <a:blip r:embed="rId4"/>
           <a:stretch>
             <a:fillRect/>
           </a:stretch>
         </p:blipFill>
         <p:spPr>
           <a:xfrm>
-            <a:off x="6962607" y="4722327"/>
-            <a:ext cx="193121" cy="193121"/>
+            <a:off x="8096098" y="4529938"/>
+            <a:ext cx="175565" cy="175565"/>
           </a:xfrm>
           <a:prstGeom prst="rect">
             <a:avLst/>
@@ -6927,30 +7589,30 @@
       </p:pic>
       <p:sp>
         <p:nvSpPr>
-          <p:cNvPr id="19" name="Text 15"/>
-          <p:cNvSpPr txBox="1"/>
-          <p:nvPr/>
-        </p:nvSpPr>
-        <p:spPr>
-          <a:xfrm>
-            <a:off x="7360920" y="4636008"/>
-            <a:ext cx="1874520" cy="384048"/>
-          </a:xfrm>
-          <a:prstGeom prst="rect">
-            <a:avLst/>
-          </a:prstGeom>
-          <a:noFill/>
-          <a:ln/>
-        </p:spPr>
-        <p:txBody>
-          <a:bodyPr wrap="square" lIns="0" tIns="0" rIns="0" bIns="0" rtlCol="0" anchor="ctr"/>
+          <p:cNvPr id="45" name="Text 39"/>
+          <p:cNvSpPr txBox="1"/>
+          <p:nvPr/>
+        </p:nvSpPr>
+        <p:spPr>
+          <a:xfrm>
+            <a:off x="8503920" y="4489704"/>
+            <a:ext cx="3200400" cy="274320"/>
+          </a:xfrm>
+          <a:prstGeom prst="rect">
+            <a:avLst/>
+          </a:prstGeom>
+          <a:noFill/>
+          <a:ln/>
+        </p:spPr>
+        <p:txBody>
+          <a:bodyPr wrap="square" lIns="0" tIns="0" rIns="0" bIns="0" rtlCol="0" anchor="t"/>
           <a:lstStyle/>
           <a:p>
             <a:pPr indent="0" marL="0">
               <a:buNone/>
             </a:pPr>
             <a:r>
-              <a:rPr lang="en-US" sz="1250" dirty="0">
+              <a:rPr lang="en-US" sz="1300" dirty="0">
                 <a:solidFill>
                   <a:srgbClr val="0B1F2A"/>
                 </a:solidFill>
@@ -6958,22 +7620,22 @@
                 <a:ea typeface="Calibri" pitchFamily="34" charset="-122"/>
                 <a:cs typeface="Calibri" pitchFamily="34" charset="-120"/>
               </a:rPr>
-              <a:t>Expired session</a:t>
-            </a:r>
-            <a:endParaRPr lang="en-US" sz="1250" dirty="0"/>
-          </a:p>
-        </p:txBody>
-      </p:sp>
-      <p:sp>
-        <p:nvSpPr>
-          <p:cNvPr id="20" name="Shape 16"/>
+              <a:t>Tracing without message content</a:t>
+            </a:r>
+            <a:endParaRPr lang="en-US" sz="1300" dirty="0"/>
+          </a:p>
+        </p:txBody>
+      </p:sp>
+      <p:sp>
+        <p:nvSpPr>
+          <p:cNvPr id="46" name="Shape 40"/>
           <p:cNvSpPr/>
           <p:nvPr/>
         </p:nvSpPr>
         <p:spPr>
           <a:xfrm>
-            <a:off x="9326880" y="4617720"/>
-            <a:ext cx="402336" cy="402336"/>
+            <a:off x="8001000" y="4892040"/>
+            <a:ext cx="365760" cy="365760"/>
           </a:xfrm>
           <a:prstGeom prst="ellipse">
             <a:avLst/>
@@ -6991,22 +7653,22 @@
       </p:sp>
       <p:pic>
         <p:nvPicPr>
-          <p:cNvPr id="21" name="Image 1" descr="preencoded.png">    </p:cNvPr>
+          <p:cNvPr id="47" name="Image 4" descr="preencoded.png">    </p:cNvPr>
           <p:cNvPicPr>
             <a:picLocks noChangeAspect="1"/>
           </p:cNvPicPr>
           <p:nvPr/>
         </p:nvPicPr>
         <p:blipFill>
-          <a:blip r:embed="rId3"/>
+          <a:blip r:embed="rId5"/>
           <a:stretch>
             <a:fillRect/>
           </a:stretch>
         </p:blipFill>
         <p:spPr>
           <a:xfrm>
-            <a:off x="9431487" y="4722327"/>
-            <a:ext cx="193121" cy="193121"/>
+            <a:off x="8096098" y="4987138"/>
+            <a:ext cx="175565" cy="175565"/>
           </a:xfrm>
           <a:prstGeom prst="rect">
             <a:avLst/>
@@ -7015,30 +7677,30 @@
       </p:pic>
       <p:sp>
         <p:nvSpPr>
-          <p:cNvPr id="22" name="Text 17"/>
-          <p:cNvSpPr txBox="1"/>
-          <p:nvPr/>
-        </p:nvSpPr>
-        <p:spPr>
-          <a:xfrm>
-            <a:off x="9829800" y="4636008"/>
-            <a:ext cx="1874520" cy="384048"/>
-          </a:xfrm>
-          <a:prstGeom prst="rect">
-            <a:avLst/>
-          </a:prstGeom>
-          <a:noFill/>
-          <a:ln/>
-        </p:spPr>
-        <p:txBody>
-          <a:bodyPr wrap="square" lIns="0" tIns="0" rIns="0" bIns="0" rtlCol="0" anchor="ctr"/>
+          <p:cNvPr id="48" name="Text 41"/>
+          <p:cNvSpPr txBox="1"/>
+          <p:nvPr/>
+        </p:nvSpPr>
+        <p:spPr>
+          <a:xfrm>
+            <a:off x="8503920" y="4946904"/>
+            <a:ext cx="3200400" cy="274320"/>
+          </a:xfrm>
+          <a:prstGeom prst="rect">
+            <a:avLst/>
+          </a:prstGeom>
+          <a:noFill/>
+          <a:ln/>
+        </p:spPr>
+        <p:txBody>
+          <a:bodyPr wrap="square" lIns="0" tIns="0" rIns="0" bIns="0" rtlCol="0" anchor="t"/>
           <a:lstStyle/>
           <a:p>
             <a:pPr indent="0" marL="0">
               <a:buNone/>
             </a:pPr>
             <a:r>
-              <a:rPr lang="en-US" sz="1250" dirty="0">
+              <a:rPr lang="en-US" sz="1300" dirty="0">
                 <a:solidFill>
                   <a:srgbClr val="0B1F2A"/>
                 </a:solidFill>
@@ -7046,22 +7708,22 @@
                 <a:ea typeface="Calibri" pitchFamily="34" charset="-122"/>
                 <a:cs typeface="Calibri" pitchFamily="34" charset="-120"/>
               </a:rPr>
-              <a:t>Unauthorized access</a:t>
-            </a:r>
-            <a:endParaRPr lang="en-US" sz="1250" dirty="0"/>
-          </a:p>
-        </p:txBody>
-      </p:sp>
-      <p:sp>
-        <p:nvSpPr>
-          <p:cNvPr id="23" name="Shape 18"/>
+              <a:t>Least privilege, Secret Manager</a:t>
+            </a:r>
+            <a:endParaRPr lang="en-US" sz="1300" dirty="0"/>
+          </a:p>
+        </p:txBody>
+      </p:sp>
+      <p:sp>
+        <p:nvSpPr>
+          <p:cNvPr id="49" name="Shape 42"/>
           <p:cNvSpPr/>
           <p:nvPr/>
         </p:nvSpPr>
         <p:spPr>
           <a:xfrm>
-            <a:off x="6858000" y="5166360"/>
-            <a:ext cx="402336" cy="402336"/>
+            <a:off x="8001000" y="5349240"/>
+            <a:ext cx="365760" cy="365760"/>
           </a:xfrm>
           <a:prstGeom prst="ellipse">
             <a:avLst/>
@@ -7079,22 +7741,22 @@
       </p:sp>
       <p:pic>
         <p:nvPicPr>
-          <p:cNvPr id="24" name="Image 2" descr="preencoded.png">    </p:cNvPr>
+          <p:cNvPr id="50" name="Image 5" descr="preencoded.png">    </p:cNvPr>
           <p:cNvPicPr>
             <a:picLocks noChangeAspect="1"/>
           </p:cNvPicPr>
           <p:nvPr/>
         </p:nvPicPr>
         <p:blipFill>
-          <a:blip r:embed="rId4"/>
+          <a:blip r:embed="rId6"/>
           <a:stretch>
             <a:fillRect/>
           </a:stretch>
         </p:blipFill>
         <p:spPr>
           <a:xfrm>
-            <a:off x="6962607" y="5270967"/>
-            <a:ext cx="193121" cy="193121"/>
+            <a:off x="8096098" y="5444338"/>
+            <a:ext cx="175565" cy="175565"/>
           </a:xfrm>
           <a:prstGeom prst="rect">
             <a:avLst/>
@@ -7103,30 +7765,30 @@
       </p:pic>
       <p:sp>
         <p:nvSpPr>
-          <p:cNvPr id="25" name="Text 19"/>
-          <p:cNvSpPr txBox="1"/>
-          <p:nvPr/>
-        </p:nvSpPr>
-        <p:spPr>
-          <a:xfrm>
-            <a:off x="7360920" y="5184648"/>
-            <a:ext cx="1874520" cy="384048"/>
-          </a:xfrm>
-          <a:prstGeom prst="rect">
-            <a:avLst/>
-          </a:prstGeom>
-          <a:noFill/>
-          <a:ln/>
-        </p:spPr>
-        <p:txBody>
-          <a:bodyPr wrap="square" lIns="0" tIns="0" rIns="0" bIns="0" rtlCol="0" anchor="ctr"/>
+          <p:cNvPr id="51" name="Text 43"/>
+          <p:cNvSpPr txBox="1"/>
+          <p:nvPr/>
+        </p:nvSpPr>
+        <p:spPr>
+          <a:xfrm>
+            <a:off x="8503920" y="5404104"/>
+            <a:ext cx="3200400" cy="274320"/>
+          </a:xfrm>
+          <a:prstGeom prst="rect">
+            <a:avLst/>
+          </a:prstGeom>
+          <a:noFill/>
+          <a:ln/>
+        </p:spPr>
+        <p:txBody>
+          <a:bodyPr wrap="square" lIns="0" tIns="0" rIns="0" bIns="0" rtlCol="0" anchor="t"/>
           <a:lstStyle/>
           <a:p>
             <a:pPr indent="0" marL="0">
               <a:buNone/>
             </a:pPr>
             <a:r>
-              <a:rPr lang="en-US" sz="1250" dirty="0">
+              <a:rPr lang="en-US" sz="1300" dirty="0">
                 <a:solidFill>
                   <a:srgbClr val="0B1F2A"/>
                 </a:solidFill>
@@ -7134,22 +7796,22 @@
                 <a:ea typeface="Calibri" pitchFamily="34" charset="-122"/>
                 <a:cs typeface="Calibri" pitchFamily="34" charset="-120"/>
               </a:rPr>
-              <a:t>Prompt injection</a:t>
-            </a:r>
-            <a:endParaRPr lang="en-US" sz="1250" dirty="0"/>
-          </a:p>
-        </p:txBody>
-      </p:sp>
-      <p:sp>
-        <p:nvSpPr>
-          <p:cNvPr id="26" name="Shape 20"/>
+              <a:t>Uptime check and alerts, Terraform</a:t>
+            </a:r>
+            <a:endParaRPr lang="en-US" sz="1300" dirty="0"/>
+          </a:p>
+        </p:txBody>
+      </p:sp>
+      <p:sp>
+        <p:nvSpPr>
+          <p:cNvPr id="52" name="Shape 44"/>
           <p:cNvSpPr/>
           <p:nvPr/>
         </p:nvSpPr>
         <p:spPr>
           <a:xfrm>
-            <a:off x="9326880" y="5166360"/>
-            <a:ext cx="402336" cy="402336"/>
+            <a:off x="8001000" y="5806440"/>
+            <a:ext cx="365760" cy="365760"/>
           </a:xfrm>
           <a:prstGeom prst="ellipse">
             <a:avLst/>
@@ -7167,183 +7829,7 @@
       </p:sp>
       <p:pic>
         <p:nvPicPr>
-          <p:cNvPr id="27" name="Image 3" descr="preencoded.png">    </p:cNvPr>
-          <p:cNvPicPr>
-            <a:picLocks noChangeAspect="1"/>
-          </p:cNvPicPr>
-          <p:nvPr/>
-        </p:nvPicPr>
-        <p:blipFill>
-          <a:blip r:embed="rId5"/>
-          <a:stretch>
-            <a:fillRect/>
-          </a:stretch>
-        </p:blipFill>
-        <p:spPr>
-          <a:xfrm>
-            <a:off x="9431487" y="5270967"/>
-            <a:ext cx="193121" cy="193121"/>
-          </a:xfrm>
-          <a:prstGeom prst="rect">
-            <a:avLst/>
-          </a:prstGeom>
-        </p:spPr>
-      </p:pic>
-      <p:sp>
-        <p:nvSpPr>
-          <p:cNvPr id="28" name="Text 21"/>
-          <p:cNvSpPr txBox="1"/>
-          <p:nvPr/>
-        </p:nvSpPr>
-        <p:spPr>
-          <a:xfrm>
-            <a:off x="9829800" y="5184648"/>
-            <a:ext cx="1874520" cy="384048"/>
-          </a:xfrm>
-          <a:prstGeom prst="rect">
-            <a:avLst/>
-          </a:prstGeom>
-          <a:noFill/>
-          <a:ln/>
-        </p:spPr>
-        <p:txBody>
-          <a:bodyPr wrap="square" lIns="0" tIns="0" rIns="0" bIns="0" rtlCol="0" anchor="ctr"/>
-          <a:lstStyle/>
-          <a:p>
-            <a:pPr indent="0" marL="0">
-              <a:buNone/>
-            </a:pPr>
-            <a:r>
-              <a:rPr lang="en-US" sz="1250" dirty="0">
-                <a:solidFill>
-                  <a:srgbClr val="0B1F2A"/>
-                </a:solidFill>
-                <a:latin typeface="Calibri" pitchFamily="34" charset="0"/>
-                <a:ea typeface="Calibri" pitchFamily="34" charset="-122"/>
-                <a:cs typeface="Calibri" pitchFamily="34" charset="-120"/>
-              </a:rPr>
-              <a:t>Tool outage</a:t>
-            </a:r>
-            <a:endParaRPr lang="en-US" sz="1250" dirty="0"/>
-          </a:p>
-        </p:txBody>
-      </p:sp>
-      <p:sp>
-        <p:nvSpPr>
-          <p:cNvPr id="29" name="Shape 22"/>
-          <p:cNvSpPr/>
-          <p:nvPr/>
-        </p:nvSpPr>
-        <p:spPr>
-          <a:xfrm>
-            <a:off x="6858000" y="5715000"/>
-            <a:ext cx="402336" cy="402336"/>
-          </a:xfrm>
-          <a:prstGeom prst="ellipse">
-            <a:avLst/>
-          </a:prstGeom>
-          <a:solidFill>
-            <a:srgbClr val="DCEFE7"/>
-          </a:solidFill>
-          <a:ln w="12700">
-            <a:solidFill>
-              <a:srgbClr val="DCEFE7"/>
-            </a:solidFill>
-            <a:prstDash val="solid"/>
-          </a:ln>
-        </p:spPr>
-      </p:sp>
-      <p:pic>
-        <p:nvPicPr>
-          <p:cNvPr id="30" name="Image 4" descr="preencoded.png">    </p:cNvPr>
-          <p:cNvPicPr>
-            <a:picLocks noChangeAspect="1"/>
-          </p:cNvPicPr>
-          <p:nvPr/>
-        </p:nvPicPr>
-        <p:blipFill>
-          <a:blip r:embed="rId6"/>
-          <a:stretch>
-            <a:fillRect/>
-          </a:stretch>
-        </p:blipFill>
-        <p:spPr>
-          <a:xfrm>
-            <a:off x="6962607" y="5819607"/>
-            <a:ext cx="193121" cy="193121"/>
-          </a:xfrm>
-          <a:prstGeom prst="rect">
-            <a:avLst/>
-          </a:prstGeom>
-        </p:spPr>
-      </p:pic>
-      <p:sp>
-        <p:nvSpPr>
-          <p:cNvPr id="31" name="Text 23"/>
-          <p:cNvSpPr txBox="1"/>
-          <p:nvPr/>
-        </p:nvSpPr>
-        <p:spPr>
-          <a:xfrm>
-            <a:off x="7360920" y="5733288"/>
-            <a:ext cx="1874520" cy="384048"/>
-          </a:xfrm>
-          <a:prstGeom prst="rect">
-            <a:avLst/>
-          </a:prstGeom>
-          <a:noFill/>
-          <a:ln/>
-        </p:spPr>
-        <p:txBody>
-          <a:bodyPr wrap="square" lIns="0" tIns="0" rIns="0" bIns="0" rtlCol="0" anchor="ctr"/>
-          <a:lstStyle/>
-          <a:p>
-            <a:pPr indent="0" marL="0">
-              <a:buNone/>
-            </a:pPr>
-            <a:r>
-              <a:rPr lang="en-US" sz="1250" dirty="0">
-                <a:solidFill>
-                  <a:srgbClr val="0B1F2A"/>
-                </a:solidFill>
-                <a:latin typeface="Calibri" pitchFamily="34" charset="0"/>
-                <a:ea typeface="Calibri" pitchFamily="34" charset="-122"/>
-                <a:cs typeface="Calibri" pitchFamily="34" charset="-120"/>
-              </a:rPr>
-              <a:t>Missing data</a:t>
-            </a:r>
-            <a:endParaRPr lang="en-US" sz="1250" dirty="0"/>
-          </a:p>
-        </p:txBody>
-      </p:sp>
-      <p:sp>
-        <p:nvSpPr>
-          <p:cNvPr id="32" name="Shape 24"/>
-          <p:cNvSpPr/>
-          <p:nvPr/>
-        </p:nvSpPr>
-        <p:spPr>
-          <a:xfrm>
-            <a:off x="9326880" y="5715000"/>
-            <a:ext cx="402336" cy="402336"/>
-          </a:xfrm>
-          <a:prstGeom prst="ellipse">
-            <a:avLst/>
-          </a:prstGeom>
-          <a:solidFill>
-            <a:srgbClr val="DCEFE7"/>
-          </a:solidFill>
-          <a:ln w="12700">
-            <a:solidFill>
-              <a:srgbClr val="DCEFE7"/>
-            </a:solidFill>
-            <a:prstDash val="solid"/>
-          </a:ln>
-        </p:spPr>
-      </p:sp>
-      <p:pic>
-        <p:nvPicPr>
-          <p:cNvPr id="33" name="Image 5" descr="preencoded.png">    </p:cNvPr>
+          <p:cNvPr id="53" name="Image 6" descr="preencoded.png">    </p:cNvPr>
           <p:cNvPicPr>
             <a:picLocks noChangeAspect="1"/>
           </p:cNvPicPr>
@@ -7357,8 +7843,8 @@
         </p:blipFill>
         <p:spPr>
           <a:xfrm>
-            <a:off x="9431487" y="5819607"/>
-            <a:ext cx="193121" cy="193121"/>
+            <a:off x="8096098" y="5901538"/>
+            <a:ext cx="175565" cy="175565"/>
           </a:xfrm>
           <a:prstGeom prst="rect">
             <a:avLst/>
@@ -7367,30 +7853,30 @@
       </p:pic>
       <p:sp>
         <p:nvSpPr>
-          <p:cNvPr id="34" name="Text 25"/>
-          <p:cNvSpPr txBox="1"/>
-          <p:nvPr/>
-        </p:nvSpPr>
-        <p:spPr>
-          <a:xfrm>
-            <a:off x="9829800" y="5733288"/>
-            <a:ext cx="1874520" cy="384048"/>
-          </a:xfrm>
-          <a:prstGeom prst="rect">
-            <a:avLst/>
-          </a:prstGeom>
-          <a:noFill/>
-          <a:ln/>
-        </p:spPr>
-        <p:txBody>
-          <a:bodyPr wrap="square" lIns="0" tIns="0" rIns="0" bIns="0" rtlCol="0" anchor="ctr"/>
+          <p:cNvPr id="54" name="Text 45"/>
+          <p:cNvSpPr txBox="1"/>
+          <p:nvPr/>
+        </p:nvSpPr>
+        <p:spPr>
+          <a:xfrm>
+            <a:off x="8503920" y="5861304"/>
+            <a:ext cx="3200400" cy="274320"/>
+          </a:xfrm>
+          <a:prstGeom prst="rect">
+            <a:avLst/>
+          </a:prstGeom>
+          <a:noFill/>
+          <a:ln/>
+        </p:spPr>
+        <p:txBody>
+          <a:bodyPr wrap="square" lIns="0" tIns="0" rIns="0" bIns="0" rtlCol="0" anchor="t"/>
           <a:lstStyle/>
           <a:p>
             <a:pPr indent="0" marL="0">
               <a:buNone/>
             </a:pPr>
             <a:r>
-              <a:rPr lang="en-US" sz="1250" dirty="0">
+              <a:rPr lang="en-US" sz="1300" dirty="0">
                 <a:solidFill>
                   <a:srgbClr val="0B1F2A"/>
                 </a:solidFill>
@@ -7398,15 +7884,15 @@
                 <a:ea typeface="Calibri" pitchFamily="34" charset="-122"/>
                 <a:cs typeface="Calibri" pitchFamily="34" charset="-120"/>
               </a:rPr>
-              <a:t>Mixed languages</a:t>
-            </a:r>
-            <a:endParaRPr lang="en-US" sz="1250" dirty="0"/>
-          </a:p>
-        </p:txBody>
-      </p:sp>
-      <p:sp>
-        <p:nvSpPr>
-          <p:cNvPr id="35" name="Text 26"/>
+              <a:t>588 unit + 81 browser tests in CI</a:t>
+            </a:r>
+            <a:endParaRPr lang="en-US" sz="1300" dirty="0"/>
+          </a:p>
+        </p:txBody>
+      </p:sp>
+      <p:sp>
+        <p:nvSpPr>
+          <p:cNvPr id="55" name="Text 46"/>
           <p:cNvSpPr txBox="1"/>
           <p:nvPr/>
         </p:nvSpPr>
@@ -7445,7 +7931,7 @@
       </p:sp>
       <p:sp>
         <p:nvSpPr>
-          <p:cNvPr id="36" name="Text 27"/>
+          <p:cNvPr id="56" name="Text 47"/>
           <p:cNvSpPr txBox="1"/>
           <p:nvPr/>
         </p:nvSpPr>
@@ -7493,13 +7979,6 @@
 <file path=ppt/slides/slide6.xml><?xml version="1.0" encoding="utf-8"?>
 <p:sld xmlns:a="http://schemas.openxmlformats.org/drawingml/2006/main" xmlns:r="http://schemas.openxmlformats.org/officeDocument/2006/relationships" xmlns:p="http://schemas.openxmlformats.org/presentationml/2006/main">
   <p:cSld name="Slide 6">
-    <p:bg>
-      <p:bgPr>
-        <a:solidFill>
-          <a:srgbClr val="0B1F2A"/>
-        </a:solidFill>
-      </p:bgPr>
-    </p:bg>
     <p:spTree>
       <p:nvGrpSpPr>
         <p:cNvPr id="1" name=""/>
@@ -7541,28 +8020,71 @@
             <a:r>
               <a:rPr lang="en-US" sz="3200" b="1" dirty="0">
                 <a:solidFill>
-                  <a:srgbClr val="FFFFFF"/>
-                </a:solidFill>
-                <a:latin typeface="Calibri" pitchFamily="34" charset="0"/>
-                <a:ea typeface="Calibri" pitchFamily="34" charset="-122"/>
-                <a:cs typeface="Calibri" pitchFamily="34" charset="-120"/>
-              </a:rPr>
-              <a:t>Live today, and clear about what is missing</a:t>
+                  <a:srgbClr val="0B1F2A"/>
+                </a:solidFill>
+                <a:latin typeface="Calibri" pitchFamily="34" charset="0"/>
+                <a:ea typeface="Calibri" pitchFamily="34" charset="-122"/>
+                <a:cs typeface="Calibri" pitchFamily="34" charset="-120"/>
+              </a:rPr>
+              <a:t>We tried to break it. Then we published the results</a:t>
             </a:r>
             <a:endParaRPr lang="en-US" sz="3200" dirty="0"/>
           </a:p>
         </p:txBody>
       </p:sp>
-      <p:sp>
-        <p:nvSpPr>
-          <p:cNvPr id="3" name="Text 1"/>
-          <p:cNvSpPr txBox="1"/>
-          <p:nvPr/>
-        </p:nvSpPr>
-        <p:spPr>
-          <a:xfrm>
-            <a:off x="640080" y="1417320"/>
-            <a:ext cx="5120640" cy="320040"/>
+      <p:graphicFrame>
+        <p:nvGraphicFramePr>
+          <p:cNvPr id="3" name="Chart 0" descr=""/>
+          <p:cNvGraphicFramePr/>
+          <p:nvPr/>
+        </p:nvGraphicFramePr>
+        <p:xfrm>
+          <a:off x="457200" y="1325880"/>
+          <a:ext cx="5943600" cy="3657600"/>
+        </p:xfrm>
+        <a:graphic xmlns:a="http://schemas.openxmlformats.org/drawingml/2006/main">
+          <a:graphicData uri="http://schemas.openxmlformats.org/drawingml/2006/chart">
+            <c:chart xmlns:c="http://schemas.openxmlformats.org/drawingml/2006/chart" r:id="rId1"/>
+          </a:graphicData>
+        </a:graphic>
+      </p:graphicFrame>
+      <p:sp>
+        <p:nvSpPr>
+          <p:cNvPr id="4" name="Shape 1"/>
+          <p:cNvSpPr/>
+          <p:nvPr/>
+        </p:nvSpPr>
+        <p:spPr>
+          <a:xfrm>
+            <a:off x="6766560" y="1325880"/>
+            <a:ext cx="2331720" cy="1737360"/>
+          </a:xfrm>
+          <a:prstGeom prst="roundRect">
+            <a:avLst>
+              <a:gd name="adj" fmla="val 6316"/>
+            </a:avLst>
+          </a:prstGeom>
+          <a:solidFill>
+            <a:srgbClr val="F1F5F4"/>
+          </a:solidFill>
+          <a:ln w="12700">
+            <a:solidFill>
+              <a:srgbClr val="F1F5F4"/>
+            </a:solidFill>
+            <a:prstDash val="solid"/>
+          </a:ln>
+        </p:spPr>
+      </p:sp>
+      <p:sp>
+        <p:nvSpPr>
+          <p:cNvPr id="5" name="Text 2"/>
+          <p:cNvSpPr txBox="1"/>
+          <p:nvPr/>
+        </p:nvSpPr>
+        <p:spPr>
+          <a:xfrm>
+            <a:off x="6995160" y="1463040"/>
+            <a:ext cx="1874520" cy="822960"/>
           </a:xfrm>
           <a:prstGeom prst="rect">
             <a:avLst/>
@@ -7578,30 +8100,30 @@
               <a:buNone/>
             </a:pPr>
             <a:r>
-              <a:rPr lang="en-US" sz="1400" b="1" spc="300" kern="0" dirty="0">
-                <a:solidFill>
-                  <a:srgbClr val="9FE0C4"/>
-                </a:solidFill>
-                <a:latin typeface="Calibri" pitchFamily="34" charset="0"/>
-                <a:ea typeface="Calibri" pitchFamily="34" charset="-122"/>
-                <a:cs typeface="Calibri" pitchFamily="34" charset="-120"/>
-              </a:rPr>
-              <a:t>IN PLACE</a:t>
-            </a:r>
-            <a:endParaRPr lang="en-US" sz="1400" dirty="0"/>
-          </a:p>
-        </p:txBody>
-      </p:sp>
-      <p:sp>
-        <p:nvSpPr>
-          <p:cNvPr id="4" name="Text 2"/>
-          <p:cNvSpPr txBox="1"/>
-          <p:nvPr/>
-        </p:nvSpPr>
-        <p:spPr>
-          <a:xfrm>
-            <a:off x="6400800" y="1417320"/>
-            <a:ext cx="5120640" cy="320040"/>
+              <a:rPr lang="en-US" sz="4000" b="1" dirty="0">
+                <a:solidFill>
+                  <a:srgbClr val="0B6E4F"/>
+                </a:solidFill>
+                <a:latin typeface="Calibri" pitchFamily="34" charset="0"/>
+                <a:ea typeface="Calibri" pitchFamily="34" charset="-122"/>
+                <a:cs typeface="Calibri" pitchFamily="34" charset="-120"/>
+              </a:rPr>
+              <a:t>89%</a:t>
+            </a:r>
+            <a:endParaRPr lang="en-US" sz="4000" dirty="0"/>
+          </a:p>
+        </p:txBody>
+      </p:sp>
+      <p:sp>
+        <p:nvSpPr>
+          <p:cNvPr id="6" name="Text 3"/>
+          <p:cNvSpPr txBox="1"/>
+          <p:nvPr/>
+        </p:nvSpPr>
+        <p:spPr>
+          <a:xfrm>
+            <a:off x="6995160" y="2286000"/>
+            <a:ext cx="1874520" cy="731520"/>
           </a:xfrm>
           <a:prstGeom prst="rect">
             <a:avLst/>
@@ -7617,30 +8139,372 @@
               <a:buNone/>
             </a:pPr>
             <a:r>
-              <a:rPr lang="en-US" sz="1400" b="1" spc="300" kern="0" dirty="0">
-                <a:solidFill>
-                  <a:srgbClr val="F2A541"/>
-                </a:solidFill>
-                <a:latin typeface="Calibri" pitchFamily="34" charset="0"/>
-                <a:ea typeface="Calibri" pitchFamily="34" charset="-122"/>
-                <a:cs typeface="Calibri" pitchFamily="34" charset="-120"/>
-              </a:rPr>
-              <a:t>BEFORE REAL OPERATION</a:t>
-            </a:r>
-            <a:endParaRPr lang="en-US" sz="1400" dirty="0"/>
-          </a:p>
-        </p:txBody>
-      </p:sp>
-      <p:sp>
-        <p:nvSpPr>
-          <p:cNvPr id="5" name="Shape 3"/>
+              <a:rPr lang="en-US" sz="1350" dirty="0">
+                <a:solidFill>
+                  <a:srgbClr val="5B6770"/>
+                </a:solidFill>
+                <a:latin typeface="Calibri" pitchFamily="34" charset="0"/>
+                <a:ea typeface="Calibri" pitchFamily="34" charset="-122"/>
+                <a:cs typeface="Calibri" pitchFamily="34" charset="-120"/>
+              </a:rPr>
+              <a:t>of 129 runs pass. Rules engine: 72%</a:t>
+            </a:r>
+            <a:endParaRPr lang="en-US" sz="1350" dirty="0"/>
+          </a:p>
+        </p:txBody>
+      </p:sp>
+      <p:sp>
+        <p:nvSpPr>
+          <p:cNvPr id="7" name="Shape 4"/>
           <p:cNvSpPr/>
           <p:nvPr/>
         </p:nvSpPr>
         <p:spPr>
           <a:xfrm>
-            <a:off x="640080" y="1965960"/>
-            <a:ext cx="640080" cy="640080"/>
+            <a:off x="9281160" y="1325880"/>
+            <a:ext cx="2331720" cy="1737360"/>
+          </a:xfrm>
+          <a:prstGeom prst="roundRect">
+            <a:avLst>
+              <a:gd name="adj" fmla="val 6316"/>
+            </a:avLst>
+          </a:prstGeom>
+          <a:solidFill>
+            <a:srgbClr val="F1F5F4"/>
+          </a:solidFill>
+          <a:ln w="12700">
+            <a:solidFill>
+              <a:srgbClr val="F1F5F4"/>
+            </a:solidFill>
+            <a:prstDash val="solid"/>
+          </a:ln>
+        </p:spPr>
+      </p:sp>
+      <p:sp>
+        <p:nvSpPr>
+          <p:cNvPr id="8" name="Text 5"/>
+          <p:cNvSpPr txBox="1"/>
+          <p:nvPr/>
+        </p:nvSpPr>
+        <p:spPr>
+          <a:xfrm>
+            <a:off x="9509760" y="1463040"/>
+            <a:ext cx="1874520" cy="822960"/>
+          </a:xfrm>
+          <a:prstGeom prst="rect">
+            <a:avLst/>
+          </a:prstGeom>
+          <a:noFill/>
+          <a:ln/>
+        </p:spPr>
+        <p:txBody>
+          <a:bodyPr wrap="square" lIns="0" tIns="0" rIns="0" bIns="0" rtlCol="0" anchor="t"/>
+          <a:lstStyle/>
+          <a:p>
+            <a:pPr indent="0" marL="0">
+              <a:buNone/>
+            </a:pPr>
+            <a:r>
+              <a:rPr lang="en-US" sz="4000" b="1" dirty="0">
+                <a:solidFill>
+                  <a:srgbClr val="0B6E4F"/>
+                </a:solidFill>
+                <a:latin typeface="Calibri" pitchFamily="34" charset="0"/>
+                <a:ea typeface="Calibri" pitchFamily="34" charset="-122"/>
+                <a:cs typeface="Calibri" pitchFamily="34" charset="-120"/>
+              </a:rPr>
+              <a:t>0</a:t>
+            </a:r>
+            <a:endParaRPr lang="en-US" sz="4000" dirty="0"/>
+          </a:p>
+        </p:txBody>
+      </p:sp>
+      <p:sp>
+        <p:nvSpPr>
+          <p:cNvPr id="9" name="Text 6"/>
+          <p:cNvSpPr txBox="1"/>
+          <p:nvPr/>
+        </p:nvSpPr>
+        <p:spPr>
+          <a:xfrm>
+            <a:off x="9509760" y="2286000"/>
+            <a:ext cx="1874520" cy="731520"/>
+          </a:xfrm>
+          <a:prstGeom prst="rect">
+            <a:avLst/>
+          </a:prstGeom>
+          <a:noFill/>
+          <a:ln/>
+        </p:spPr>
+        <p:txBody>
+          <a:bodyPr wrap="square" lIns="0" tIns="0" rIns="0" bIns="0" rtlCol="0" anchor="t"/>
+          <a:lstStyle/>
+          <a:p>
+            <a:pPr indent="0" marL="0">
+              <a:buNone/>
+            </a:pPr>
+            <a:r>
+              <a:rPr lang="en-US" sz="1350" dirty="0">
+                <a:solidFill>
+                  <a:srgbClr val="5B6770"/>
+                </a:solidFill>
+                <a:latin typeface="Calibri" pitchFamily="34" charset="0"/>
+                <a:ea typeface="Calibri" pitchFamily="34" charset="-122"/>
+                <a:cs typeface="Calibri" pitchFamily="34" charset="-120"/>
+              </a:rPr>
+              <a:t>actions without approval, in 225 runs</a:t>
+            </a:r>
+            <a:endParaRPr lang="en-US" sz="1350" dirty="0"/>
+          </a:p>
+        </p:txBody>
+      </p:sp>
+      <p:sp>
+        <p:nvSpPr>
+          <p:cNvPr id="10" name="Shape 7"/>
+          <p:cNvSpPr/>
+          <p:nvPr/>
+        </p:nvSpPr>
+        <p:spPr>
+          <a:xfrm>
+            <a:off x="6766560" y="3246120"/>
+            <a:ext cx="2331720" cy="1737360"/>
+          </a:xfrm>
+          <a:prstGeom prst="roundRect">
+            <a:avLst>
+              <a:gd name="adj" fmla="val 6316"/>
+            </a:avLst>
+          </a:prstGeom>
+          <a:solidFill>
+            <a:srgbClr val="F1F5F4"/>
+          </a:solidFill>
+          <a:ln w="12700">
+            <a:solidFill>
+              <a:srgbClr val="F1F5F4"/>
+            </a:solidFill>
+            <a:prstDash val="solid"/>
+          </a:ln>
+        </p:spPr>
+      </p:sp>
+      <p:sp>
+        <p:nvSpPr>
+          <p:cNvPr id="11" name="Text 8"/>
+          <p:cNvSpPr txBox="1"/>
+          <p:nvPr/>
+        </p:nvSpPr>
+        <p:spPr>
+          <a:xfrm>
+            <a:off x="6995160" y="3383280"/>
+            <a:ext cx="1874520" cy="822960"/>
+          </a:xfrm>
+          <a:prstGeom prst="rect">
+            <a:avLst/>
+          </a:prstGeom>
+          <a:noFill/>
+          <a:ln/>
+        </p:spPr>
+        <p:txBody>
+          <a:bodyPr wrap="square" lIns="0" tIns="0" rIns="0" bIns="0" rtlCol="0" anchor="t"/>
+          <a:lstStyle/>
+          <a:p>
+            <a:pPr indent="0" marL="0">
+              <a:buNone/>
+            </a:pPr>
+            <a:r>
+              <a:rPr lang="en-US" sz="4000" b="1" dirty="0">
+                <a:solidFill>
+                  <a:srgbClr val="0B6E4F"/>
+                </a:solidFill>
+                <a:latin typeface="Calibri" pitchFamily="34" charset="0"/>
+                <a:ea typeface="Calibri" pitchFamily="34" charset="-122"/>
+                <a:cs typeface="Calibri" pitchFamily="34" charset="-120"/>
+              </a:rPr>
+              <a:t>0 / 18</a:t>
+            </a:r>
+            <a:endParaRPr lang="en-US" sz="4000" dirty="0"/>
+          </a:p>
+        </p:txBody>
+      </p:sp>
+      <p:sp>
+        <p:nvSpPr>
+          <p:cNvPr id="12" name="Text 9"/>
+          <p:cNvSpPr txBox="1"/>
+          <p:nvPr/>
+        </p:nvSpPr>
+        <p:spPr>
+          <a:xfrm>
+            <a:off x="6995160" y="4206240"/>
+            <a:ext cx="1874520" cy="731520"/>
+          </a:xfrm>
+          <a:prstGeom prst="rect">
+            <a:avLst/>
+          </a:prstGeom>
+          <a:noFill/>
+          <a:ln/>
+        </p:spPr>
+        <p:txBody>
+          <a:bodyPr wrap="square" lIns="0" tIns="0" rIns="0" bIns="0" rtlCol="0" anchor="t"/>
+          <a:lstStyle/>
+          <a:p>
+            <a:pPr indent="0" marL="0">
+              <a:buNone/>
+            </a:pPr>
+            <a:r>
+              <a:rPr lang="en-US" sz="1350" dirty="0">
+                <a:solidFill>
+                  <a:srgbClr val="5B6770"/>
+                </a:solidFill>
+                <a:latin typeface="Calibri" pitchFamily="34" charset="0"/>
+                <a:ea typeface="Calibri" pitchFamily="34" charset="-122"/>
+                <a:cs typeface="Calibri" pitchFamily="34" charset="-120"/>
+              </a:rPr>
+              <a:t>missed handoffs to a person</a:t>
+            </a:r>
+            <a:endParaRPr lang="en-US" sz="1350" dirty="0"/>
+          </a:p>
+        </p:txBody>
+      </p:sp>
+      <p:sp>
+        <p:nvSpPr>
+          <p:cNvPr id="13" name="Shape 10"/>
+          <p:cNvSpPr/>
+          <p:nvPr/>
+        </p:nvSpPr>
+        <p:spPr>
+          <a:xfrm>
+            <a:off x="9281160" y="3246120"/>
+            <a:ext cx="2331720" cy="1737360"/>
+          </a:xfrm>
+          <a:prstGeom prst="roundRect">
+            <a:avLst>
+              <a:gd name="adj" fmla="val 6316"/>
+            </a:avLst>
+          </a:prstGeom>
+          <a:solidFill>
+            <a:srgbClr val="F1F5F4"/>
+          </a:solidFill>
+          <a:ln w="12700">
+            <a:solidFill>
+              <a:srgbClr val="F1F5F4"/>
+            </a:solidFill>
+            <a:prstDash val="solid"/>
+          </a:ln>
+        </p:spPr>
+      </p:sp>
+      <p:sp>
+        <p:nvSpPr>
+          <p:cNvPr id="14" name="Text 11"/>
+          <p:cNvSpPr txBox="1"/>
+          <p:nvPr/>
+        </p:nvSpPr>
+        <p:spPr>
+          <a:xfrm>
+            <a:off x="9509760" y="3383280"/>
+            <a:ext cx="1874520" cy="822960"/>
+          </a:xfrm>
+          <a:prstGeom prst="rect">
+            <a:avLst/>
+          </a:prstGeom>
+          <a:noFill/>
+          <a:ln/>
+        </p:spPr>
+        <p:txBody>
+          <a:bodyPr wrap="square" lIns="0" tIns="0" rIns="0" bIns="0" rtlCol="0" anchor="t"/>
+          <a:lstStyle/>
+          <a:p>
+            <a:pPr indent="0" marL="0">
+              <a:buNone/>
+            </a:pPr>
+            <a:r>
+              <a:rPr lang="en-US" sz="4000" b="1" dirty="0">
+                <a:solidFill>
+                  <a:srgbClr val="B5483A"/>
+                </a:solidFill>
+                <a:latin typeface="Calibri" pitchFamily="34" charset="0"/>
+                <a:ea typeface="Calibri" pitchFamily="34" charset="-122"/>
+                <a:cs typeface="Calibri" pitchFamily="34" charset="-120"/>
+              </a:rPr>
+              <a:t>1</a:t>
+            </a:r>
+            <a:endParaRPr lang="en-US" sz="4000" dirty="0"/>
+          </a:p>
+        </p:txBody>
+      </p:sp>
+      <p:sp>
+        <p:nvSpPr>
+          <p:cNvPr id="15" name="Text 12"/>
+          <p:cNvSpPr txBox="1"/>
+          <p:nvPr/>
+        </p:nvSpPr>
+        <p:spPr>
+          <a:xfrm>
+            <a:off x="9509760" y="4206240"/>
+            <a:ext cx="1874520" cy="731520"/>
+          </a:xfrm>
+          <a:prstGeom prst="rect">
+            <a:avLst/>
+          </a:prstGeom>
+          <a:noFill/>
+          <a:ln/>
+        </p:spPr>
+        <p:txBody>
+          <a:bodyPr wrap="square" lIns="0" tIns="0" rIns="0" bIns="0" rtlCol="0" anchor="t"/>
+          <a:lstStyle/>
+          <a:p>
+            <a:pPr indent="0" marL="0">
+              <a:buNone/>
+            </a:pPr>
+            <a:r>
+              <a:rPr lang="en-US" sz="1350" dirty="0">
+                <a:solidFill>
+                  <a:srgbClr val="5B6770"/>
+                </a:solidFill>
+                <a:latin typeface="Calibri" pitchFamily="34" charset="0"/>
+                <a:ea typeface="Calibri" pitchFamily="34" charset="-122"/>
+                <a:cs typeface="Calibri" pitchFamily="34" charset="-120"/>
+              </a:rPr>
+              <a:t>real flaw in 129 runs. Found and published</a:t>
+            </a:r>
+            <a:endParaRPr lang="en-US" sz="1350" dirty="0"/>
+          </a:p>
+        </p:txBody>
+      </p:sp>
+      <p:sp>
+        <p:nvSpPr>
+          <p:cNvPr id="16" name="Shape 13"/>
+          <p:cNvSpPr/>
+          <p:nvPr/>
+        </p:nvSpPr>
+        <p:spPr>
+          <a:xfrm>
+            <a:off x="548640" y="5166360"/>
+            <a:ext cx="11082528" cy="1051560"/>
+          </a:xfrm>
+          <a:prstGeom prst="roundRect">
+            <a:avLst>
+              <a:gd name="adj" fmla="val 10435"/>
+            </a:avLst>
+          </a:prstGeom>
+          <a:solidFill>
+            <a:srgbClr val="0B1F2A"/>
+          </a:solidFill>
+          <a:ln w="12700">
+            <a:solidFill>
+              <a:srgbClr val="0B1F2A"/>
+            </a:solidFill>
+            <a:prstDash val="solid"/>
+          </a:ln>
+        </p:spPr>
+      </p:sp>
+      <p:sp>
+        <p:nvSpPr>
+          <p:cNvPr id="17" name="Shape 14"/>
+          <p:cNvSpPr/>
+          <p:nvPr/>
+        </p:nvSpPr>
+        <p:spPr>
+          <a:xfrm>
+            <a:off x="822960" y="5422392"/>
+            <a:ext cx="530352" cy="530352"/>
           </a:xfrm>
           <a:prstGeom prst="ellipse">
             <a:avLst/>
@@ -7658,22 +8522,22 @@
       </p:sp>
       <p:pic>
         <p:nvPicPr>
-          <p:cNvPr id="6" name="Image 0" descr="preencoded.png">    </p:cNvPr>
+          <p:cNvPr id="18" name="Image 0" descr="preencoded.png">    </p:cNvPr>
           <p:cNvPicPr>
             <a:picLocks noChangeAspect="1"/>
           </p:cNvPicPr>
           <p:nvPr/>
         </p:nvPicPr>
         <p:blipFill>
-          <a:blip r:embed="rId1"/>
+          <a:blip r:embed="rId2"/>
           <a:stretch>
             <a:fillRect/>
           </a:stretch>
         </p:blipFill>
         <p:spPr>
           <a:xfrm>
-            <a:off x="806501" y="2132381"/>
-            <a:ext cx="307238" cy="307238"/>
+            <a:off x="960852" y="5560284"/>
+            <a:ext cx="254569" cy="254569"/>
           </a:xfrm>
           <a:prstGeom prst="rect">
             <a:avLst/>
@@ -7682,14 +8546,14 @@
       </p:pic>
       <p:sp>
         <p:nvSpPr>
-          <p:cNvPr id="7" name="Text 4"/>
-          <p:cNvSpPr txBox="1"/>
-          <p:nvPr/>
-        </p:nvSpPr>
-        <p:spPr>
-          <a:xfrm>
-            <a:off x="1463040" y="1984248"/>
-            <a:ext cx="4480560" cy="329184"/>
+          <p:cNvPr id="19" name="Text 15"/>
+          <p:cNvSpPr txBox="1"/>
+          <p:nvPr/>
+        </p:nvSpPr>
+        <p:spPr>
+          <a:xfrm>
+            <a:off x="1481328" y="5532120"/>
+            <a:ext cx="2926080" cy="320040"/>
           </a:xfrm>
           <a:prstGeom prst="rect">
             <a:avLst/>
@@ -7705,7 +8569,7 @@
               <a:buNone/>
             </a:pPr>
             <a:r>
-              <a:rPr lang="en-US" sz="1700" b="1" dirty="0">
+              <a:rPr lang="en-US" sz="1500" b="1" dirty="0">
                 <a:solidFill>
                   <a:srgbClr val="FFFFFF"/>
                 </a:solidFill>
@@ -7713,22 +8577,71 @@
                 <a:ea typeface="Calibri" pitchFamily="34" charset="-122"/>
                 <a:cs typeface="Calibri" pitchFamily="34" charset="-120"/>
               </a:rPr>
-              <a:t>End to end on Google Cloud</a:t>
-            </a:r>
-            <a:endParaRPr lang="en-US" sz="1700" dirty="0"/>
-          </a:p>
-        </p:txBody>
-      </p:sp>
-      <p:sp>
-        <p:nvSpPr>
-          <p:cNvPr id="8" name="Text 5"/>
-          <p:cNvSpPr txBox="1"/>
-          <p:nvPr/>
-        </p:nvSpPr>
-        <p:spPr>
-          <a:xfrm>
-            <a:off x="1463040" y="2331720"/>
-            <a:ext cx="4480560" cy="292608"/>
+              <a:t>Customers: 37 hours to seconds</a:t>
+            </a:r>
+            <a:endParaRPr lang="en-US" sz="1500" dirty="0"/>
+          </a:p>
+        </p:txBody>
+      </p:sp>
+      <p:sp>
+        <p:nvSpPr>
+          <p:cNvPr id="20" name="Shape 16"/>
+          <p:cNvSpPr/>
+          <p:nvPr/>
+        </p:nvSpPr>
+        <p:spPr>
+          <a:xfrm>
+            <a:off x="4480560" y="5422392"/>
+            <a:ext cx="530352" cy="530352"/>
+          </a:xfrm>
+          <a:prstGeom prst="ellipse">
+            <a:avLst/>
+          </a:prstGeom>
+          <a:solidFill>
+            <a:srgbClr val="0B6E4F"/>
+          </a:solidFill>
+          <a:ln w="12700">
+            <a:solidFill>
+              <a:srgbClr val="0B6E4F"/>
+            </a:solidFill>
+            <a:prstDash val="solid"/>
+          </a:ln>
+        </p:spPr>
+      </p:sp>
+      <p:pic>
+        <p:nvPicPr>
+          <p:cNvPr id="21" name="Image 1" descr="preencoded.png">    </p:cNvPr>
+          <p:cNvPicPr>
+            <a:picLocks noChangeAspect="1"/>
+          </p:cNvPicPr>
+          <p:nvPr/>
+        </p:nvPicPr>
+        <p:blipFill>
+          <a:blip r:embed="rId3"/>
+          <a:stretch>
+            <a:fillRect/>
+          </a:stretch>
+        </p:blipFill>
+        <p:spPr>
+          <a:xfrm>
+            <a:off x="4618452" y="5560284"/>
+            <a:ext cx="254569" cy="254569"/>
+          </a:xfrm>
+          <a:prstGeom prst="rect">
+            <a:avLst/>
+          </a:prstGeom>
+        </p:spPr>
+      </p:pic>
+      <p:sp>
+        <p:nvSpPr>
+          <p:cNvPr id="22" name="Text 17"/>
+          <p:cNvSpPr txBox="1"/>
+          <p:nvPr/>
+        </p:nvSpPr>
+        <p:spPr>
+          <a:xfrm>
+            <a:off x="5138928" y="5532120"/>
+            <a:ext cx="2926080" cy="320040"/>
           </a:xfrm>
           <a:prstGeom prst="rect">
             <a:avLst/>
@@ -7744,30 +8657,30 @@
               <a:buNone/>
             </a:pPr>
             <a:r>
-              <a:rPr lang="en-US" sz="1300" dirty="0">
-                <a:solidFill>
-                  <a:srgbClr val="B8C6CC"/>
-                </a:solidFill>
-                <a:latin typeface="Calibri" pitchFamily="34" charset="0"/>
-                <a:ea typeface="Calibri" pitchFamily="34" charset="-122"/>
-                <a:cs typeface="Calibri" pitchFamily="34" charset="-120"/>
-              </a:rPr>
-              <a:t>81 browser tests pass in production</a:t>
-            </a:r>
-            <a:endParaRPr lang="en-US" sz="1300" dirty="0"/>
-          </a:p>
-        </p:txBody>
-      </p:sp>
-      <p:sp>
-        <p:nvSpPr>
-          <p:cNvPr id="9" name="Shape 6"/>
+              <a:rPr lang="en-US" sz="1500" b="1" dirty="0">
+                <a:solidFill>
+                  <a:srgbClr val="FFFFFF"/>
+                </a:solidFill>
+                <a:latin typeface="Calibri" pitchFamily="34" charset="0"/>
+                <a:ea typeface="Calibri" pitchFamily="34" charset="-122"/>
+                <a:cs typeface="Calibri" pitchFamily="34" charset="-120"/>
+              </a:rPr>
+              <a:t>Experts: the full picture, drafted</a:t>
+            </a:r>
+            <a:endParaRPr lang="en-US" sz="1500" dirty="0"/>
+          </a:p>
+        </p:txBody>
+      </p:sp>
+      <p:sp>
+        <p:nvSpPr>
+          <p:cNvPr id="23" name="Shape 18"/>
           <p:cNvSpPr/>
           <p:nvPr/>
         </p:nvSpPr>
         <p:spPr>
           <a:xfrm>
-            <a:off x="6400800" y="1965960"/>
-            <a:ext cx="640080" cy="640080"/>
+            <a:off x="8138160" y="5422392"/>
+            <a:ext cx="530352" cy="530352"/>
           </a:xfrm>
           <a:prstGeom prst="ellipse">
             <a:avLst/>
@@ -7785,261 +8698,7 @@
       </p:sp>
       <p:pic>
         <p:nvPicPr>
-          <p:cNvPr id="10" name="Image 1" descr="preencoded.png">    </p:cNvPr>
-          <p:cNvPicPr>
-            <a:picLocks noChangeAspect="1"/>
-          </p:cNvPicPr>
-          <p:nvPr/>
-        </p:nvPicPr>
-        <p:blipFill>
-          <a:blip r:embed="rId2"/>
-          <a:stretch>
-            <a:fillRect/>
-          </a:stretch>
-        </p:blipFill>
-        <p:spPr>
-          <a:xfrm>
-            <a:off x="6567221" y="2132381"/>
-            <a:ext cx="307238" cy="307238"/>
-          </a:xfrm>
-          <a:prstGeom prst="rect">
-            <a:avLst/>
-          </a:prstGeom>
-        </p:spPr>
-      </p:pic>
-      <p:sp>
-        <p:nvSpPr>
-          <p:cNvPr id="11" name="Text 7"/>
-          <p:cNvSpPr txBox="1"/>
-          <p:nvPr/>
-        </p:nvSpPr>
-        <p:spPr>
-          <a:xfrm>
-            <a:off x="7223760" y="1984248"/>
-            <a:ext cx="4389120" cy="329184"/>
-          </a:xfrm>
-          <a:prstGeom prst="rect">
-            <a:avLst/>
-          </a:prstGeom>
-          <a:noFill/>
-          <a:ln/>
-        </p:spPr>
-        <p:txBody>
-          <a:bodyPr wrap="square" lIns="0" tIns="0" rIns="0" bIns="0" rtlCol="0" anchor="t"/>
-          <a:lstStyle/>
-          <a:p>
-            <a:pPr indent="0" marL="0">
-              <a:buNone/>
-            </a:pPr>
-            <a:r>
-              <a:rPr lang="en-US" sz="1700" b="1" dirty="0">
-                <a:solidFill>
-                  <a:srgbClr val="FFFFFF"/>
-                </a:solidFill>
-                <a:latin typeface="Calibri" pitchFamily="34" charset="0"/>
-                <a:ea typeface="Calibri" pitchFamily="34" charset="-122"/>
-                <a:cs typeface="Calibri" pitchFamily="34" charset="-120"/>
-              </a:rPr>
-              <a:t>All results are offline</a:t>
-            </a:r>
-            <a:endParaRPr lang="en-US" sz="1700" dirty="0"/>
-          </a:p>
-        </p:txBody>
-      </p:sp>
-      <p:sp>
-        <p:nvSpPr>
-          <p:cNvPr id="12" name="Text 8"/>
-          <p:cNvSpPr txBox="1"/>
-          <p:nvPr/>
-        </p:nvSpPr>
-        <p:spPr>
-          <a:xfrm>
-            <a:off x="7223760" y="2331720"/>
-            <a:ext cx="4389120" cy="292608"/>
-          </a:xfrm>
-          <a:prstGeom prst="rect">
-            <a:avLst/>
-          </a:prstGeom>
-          <a:noFill/>
-          <a:ln/>
-        </p:spPr>
-        <p:txBody>
-          <a:bodyPr wrap="square" lIns="0" tIns="0" rIns="0" bIns="0" rtlCol="0" anchor="t"/>
-          <a:lstStyle/>
-          <a:p>
-            <a:pPr indent="0" marL="0">
-              <a:buNone/>
-            </a:pPr>
-            <a:r>
-              <a:rPr lang="en-US" sz="1300" dirty="0">
-                <a:solidFill>
-                  <a:srgbClr val="B8C6CC"/>
-                </a:solidFill>
-                <a:latin typeface="Calibri" pitchFamily="34" charset="0"/>
-                <a:ea typeface="Calibri" pitchFamily="34" charset="-122"/>
-                <a:cs typeface="Calibri" pitchFamily="34" charset="-120"/>
-              </a:rPr>
-              <a:t>Synthetic data, simulated customer</a:t>
-            </a:r>
-            <a:endParaRPr lang="en-US" sz="1300" dirty="0"/>
-          </a:p>
-        </p:txBody>
-      </p:sp>
-      <p:sp>
-        <p:nvSpPr>
-          <p:cNvPr id="13" name="Shape 9"/>
-          <p:cNvSpPr/>
-          <p:nvPr/>
-        </p:nvSpPr>
-        <p:spPr>
-          <a:xfrm>
-            <a:off x="640080" y="2953512"/>
-            <a:ext cx="640080" cy="640080"/>
-          </a:xfrm>
-          <a:prstGeom prst="ellipse">
-            <a:avLst/>
-          </a:prstGeom>
-          <a:solidFill>
-            <a:srgbClr val="0B6E4F"/>
-          </a:solidFill>
-          <a:ln w="12700">
-            <a:solidFill>
-              <a:srgbClr val="0B6E4F"/>
-            </a:solidFill>
-            <a:prstDash val="solid"/>
-          </a:ln>
-        </p:spPr>
-      </p:sp>
-      <p:pic>
-        <p:nvPicPr>
-          <p:cNvPr id="14" name="Image 2" descr="preencoded.png">    </p:cNvPr>
-          <p:cNvPicPr>
-            <a:picLocks noChangeAspect="1"/>
-          </p:cNvPicPr>
-          <p:nvPr/>
-        </p:nvPicPr>
-        <p:blipFill>
-          <a:blip r:embed="rId3"/>
-          <a:stretch>
-            <a:fillRect/>
-          </a:stretch>
-        </p:blipFill>
-        <p:spPr>
-          <a:xfrm>
-            <a:off x="806501" y="3119933"/>
-            <a:ext cx="307238" cy="307238"/>
-          </a:xfrm>
-          <a:prstGeom prst="rect">
-            <a:avLst/>
-          </a:prstGeom>
-        </p:spPr>
-      </p:pic>
-      <p:sp>
-        <p:nvSpPr>
-          <p:cNvPr id="15" name="Text 10"/>
-          <p:cNvSpPr txBox="1"/>
-          <p:nvPr/>
-        </p:nvSpPr>
-        <p:spPr>
-          <a:xfrm>
-            <a:off x="1463040" y="2971800"/>
-            <a:ext cx="4480560" cy="329184"/>
-          </a:xfrm>
-          <a:prstGeom prst="rect">
-            <a:avLst/>
-          </a:prstGeom>
-          <a:noFill/>
-          <a:ln/>
-        </p:spPr>
-        <p:txBody>
-          <a:bodyPr wrap="square" lIns="0" tIns="0" rIns="0" bIns="0" rtlCol="0" anchor="t"/>
-          <a:lstStyle/>
-          <a:p>
-            <a:pPr indent="0" marL="0">
-              <a:buNone/>
-            </a:pPr>
-            <a:r>
-              <a:rPr lang="en-US" sz="1700" b="1" dirty="0">
-                <a:solidFill>
-                  <a:srgbClr val="FFFFFF"/>
-                </a:solidFill>
-                <a:latin typeface="Calibri" pitchFamily="34" charset="0"/>
-                <a:ea typeface="Calibri" pitchFamily="34" charset="-122"/>
-                <a:cs typeface="Calibri" pitchFamily="34" charset="-120"/>
-              </a:rPr>
-              <a:t>Tracing without message content</a:t>
-            </a:r>
-            <a:endParaRPr lang="en-US" sz="1700" dirty="0"/>
-          </a:p>
-        </p:txBody>
-      </p:sp>
-      <p:sp>
-        <p:nvSpPr>
-          <p:cNvPr id="16" name="Text 11"/>
-          <p:cNvSpPr txBox="1"/>
-          <p:nvPr/>
-        </p:nvSpPr>
-        <p:spPr>
-          <a:xfrm>
-            <a:off x="1463040" y="3319272"/>
-            <a:ext cx="4480560" cy="292608"/>
-          </a:xfrm>
-          <a:prstGeom prst="rect">
-            <a:avLst/>
-          </a:prstGeom>
-          <a:noFill/>
-          <a:ln/>
-        </p:spPr>
-        <p:txBody>
-          <a:bodyPr wrap="square" lIns="0" tIns="0" rIns="0" bIns="0" rtlCol="0" anchor="t"/>
-          <a:lstStyle/>
-          <a:p>
-            <a:pPr indent="0" marL="0">
-              <a:buNone/>
-            </a:pPr>
-            <a:r>
-              <a:rPr lang="en-US" sz="1300" dirty="0">
-                <a:solidFill>
-                  <a:srgbClr val="B8C6CC"/>
-                </a:solidFill>
-                <a:latin typeface="Calibri" pitchFamily="34" charset="0"/>
-                <a:ea typeface="Calibri" pitchFamily="34" charset="-122"/>
-                <a:cs typeface="Calibri" pitchFamily="34" charset="-120"/>
-              </a:rPr>
-              <a:t>Explanations from sources, rules and records</a:t>
-            </a:r>
-            <a:endParaRPr lang="en-US" sz="1300" dirty="0"/>
-          </a:p>
-        </p:txBody>
-      </p:sp>
-      <p:sp>
-        <p:nvSpPr>
-          <p:cNvPr id="17" name="Shape 12"/>
-          <p:cNvSpPr/>
-          <p:nvPr/>
-        </p:nvSpPr>
-        <p:spPr>
-          <a:xfrm>
-            <a:off x="6400800" y="2953512"/>
-            <a:ext cx="640080" cy="640080"/>
-          </a:xfrm>
-          <a:prstGeom prst="ellipse">
-            <a:avLst/>
-          </a:prstGeom>
-          <a:solidFill>
-            <a:srgbClr val="F2A541"/>
-          </a:solidFill>
-          <a:ln w="12700">
-            <a:solidFill>
-              <a:srgbClr val="F2A541"/>
-            </a:solidFill>
-            <a:prstDash val="solid"/>
-          </a:ln>
-        </p:spPr>
-      </p:sp>
-      <p:pic>
-        <p:nvPicPr>
-          <p:cNvPr id="18" name="Image 3" descr="preencoded.png">    </p:cNvPr>
+          <p:cNvPr id="24" name="Image 2" descr="preencoded.png">    </p:cNvPr>
           <p:cNvPicPr>
             <a:picLocks noChangeAspect="1"/>
           </p:cNvPicPr>
@@ -8053,8 +8712,8 @@
         </p:blipFill>
         <p:spPr>
           <a:xfrm>
-            <a:off x="6567221" y="3119933"/>
-            <a:ext cx="307238" cy="307238"/>
+            <a:off x="8276052" y="5560284"/>
+            <a:ext cx="254569" cy="254569"/>
           </a:xfrm>
           <a:prstGeom prst="rect">
             <a:avLst/>
@@ -8063,14 +8722,14 @@
       </p:pic>
       <p:sp>
         <p:nvSpPr>
-          <p:cNvPr id="19" name="Text 13"/>
-          <p:cNvSpPr txBox="1"/>
-          <p:nvPr/>
-        </p:nvSpPr>
-        <p:spPr>
-          <a:xfrm>
-            <a:off x="7223760" y="2971800"/>
-            <a:ext cx="4389120" cy="329184"/>
+          <p:cNvPr id="25" name="Text 19"/>
+          <p:cNvSpPr txBox="1"/>
+          <p:nvPr/>
+        </p:nvSpPr>
+        <p:spPr>
+          <a:xfrm>
+            <a:off x="8796528" y="5532120"/>
+            <a:ext cx="2926080" cy="320040"/>
           </a:xfrm>
           <a:prstGeom prst="rect">
             <a:avLst/>
@@ -8086,7 +8745,7 @@
               <a:buNone/>
             </a:pPr>
             <a:r>
-              <a:rPr lang="en-US" sz="1700" b="1" dirty="0">
+              <a:rPr lang="en-US" sz="1500" b="1" dirty="0">
                 <a:solidFill>
                   <a:srgbClr val="FFFFFF"/>
                 </a:solidFill>
@@ -8094,22 +8753,22 @@
                 <a:ea typeface="Calibri" pitchFamily="34" charset="-122"/>
                 <a:cs typeface="Calibri" pitchFamily="34" charset="-120"/>
               </a:rPr>
-              <a:t>Portuguese not native-reviewed</a:t>
-            </a:r>
-            <a:endParaRPr lang="en-US" sz="1700" dirty="0"/>
-          </a:p>
-        </p:txBody>
-      </p:sp>
-      <p:sp>
-        <p:nvSpPr>
-          <p:cNvPr id="20" name="Text 14"/>
-          <p:cNvSpPr txBox="1"/>
-          <p:nvPr/>
-        </p:nvSpPr>
-        <p:spPr>
-          <a:xfrm>
-            <a:off x="7223760" y="3319272"/>
-            <a:ext cx="4389120" cy="292608"/>
+              <a:t>The bank: auditable policy</a:t>
+            </a:r>
+            <a:endParaRPr lang="en-US" sz="1500" dirty="0"/>
+          </a:p>
+        </p:txBody>
+      </p:sp>
+      <p:sp>
+        <p:nvSpPr>
+          <p:cNvPr id="26" name="Text 20"/>
+          <p:cNvSpPr txBox="1"/>
+          <p:nvPr/>
+        </p:nvSpPr>
+        <p:spPr>
+          <a:xfrm>
+            <a:off x="548640" y="6419088"/>
+            <a:ext cx="9601200" cy="274320"/>
           </a:xfrm>
           <a:prstGeom prst="rect">
             <a:avLst/>
@@ -8125,601 +8784,15 @@
               <a:buNone/>
             </a:pPr>
             <a:r>
-              <a:rPr lang="en-US" sz="1300" dirty="0">
-                <a:solidFill>
-                  <a:srgbClr val="B8C6CC"/>
-                </a:solidFill>
-                <a:latin typeface="Calibri" pitchFamily="34" charset="0"/>
-                <a:ea typeface="Calibri" pitchFamily="34" charset="-122"/>
-                <a:cs typeface="Calibri" pitchFamily="34" charset="-120"/>
-              </a:rPr>
-              <a:t>No Brazilian accounts in the data</a:t>
-            </a:r>
-            <a:endParaRPr lang="en-US" sz="1300" dirty="0"/>
-          </a:p>
-        </p:txBody>
-      </p:sp>
-      <p:sp>
-        <p:nvSpPr>
-          <p:cNvPr id="21" name="Shape 15"/>
-          <p:cNvSpPr/>
-          <p:nvPr/>
-        </p:nvSpPr>
-        <p:spPr>
-          <a:xfrm>
-            <a:off x="640080" y="3941064"/>
-            <a:ext cx="640080" cy="640080"/>
-          </a:xfrm>
-          <a:prstGeom prst="ellipse">
-            <a:avLst/>
-          </a:prstGeom>
-          <a:solidFill>
-            <a:srgbClr val="0B6E4F"/>
-          </a:solidFill>
-          <a:ln w="12700">
-            <a:solidFill>
-              <a:srgbClr val="0B6E4F"/>
-            </a:solidFill>
-            <a:prstDash val="solid"/>
-          </a:ln>
-        </p:spPr>
-      </p:sp>
-      <p:pic>
-        <p:nvPicPr>
-          <p:cNvPr id="22" name="Image 4" descr="preencoded.png">    </p:cNvPr>
-          <p:cNvPicPr>
-            <a:picLocks noChangeAspect="1"/>
-          </p:cNvPicPr>
-          <p:nvPr/>
-        </p:nvPicPr>
-        <p:blipFill>
-          <a:blip r:embed="rId5"/>
-          <a:stretch>
-            <a:fillRect/>
-          </a:stretch>
-        </p:blipFill>
-        <p:spPr>
-          <a:xfrm>
-            <a:off x="806501" y="4107485"/>
-            <a:ext cx="307238" cy="307238"/>
-          </a:xfrm>
-          <a:prstGeom prst="rect">
-            <a:avLst/>
-          </a:prstGeom>
-        </p:spPr>
-      </p:pic>
-      <p:sp>
-        <p:nvSpPr>
-          <p:cNvPr id="23" name="Text 16"/>
-          <p:cNvSpPr txBox="1"/>
-          <p:nvPr/>
-        </p:nvSpPr>
-        <p:spPr>
-          <a:xfrm>
-            <a:off x="1463040" y="3959352"/>
-            <a:ext cx="4480560" cy="329184"/>
-          </a:xfrm>
-          <a:prstGeom prst="rect">
-            <a:avLst/>
-          </a:prstGeom>
-          <a:noFill/>
-          <a:ln/>
-        </p:spPr>
-        <p:txBody>
-          <a:bodyPr wrap="square" lIns="0" tIns="0" rIns="0" bIns="0" rtlCol="0" anchor="t"/>
-          <a:lstStyle/>
-          <a:p>
-            <a:pPr indent="0" marL="0">
-              <a:buNone/>
-            </a:pPr>
-            <a:r>
-              <a:rPr lang="en-US" sz="1700" b="1" dirty="0">
-                <a:solidFill>
-                  <a:srgbClr val="FFFFFF"/>
-                </a:solidFill>
-                <a:latin typeface="Calibri" pitchFamily="34" charset="0"/>
-                <a:ea typeface="Calibri" pitchFamily="34" charset="-122"/>
-                <a:cs typeface="Calibri" pitchFamily="34" charset="-120"/>
-              </a:rPr>
-              <a:t>Bounded retries, safe fallback</a:t>
-            </a:r>
-            <a:endParaRPr lang="en-US" sz="1700" dirty="0"/>
-          </a:p>
-        </p:txBody>
-      </p:sp>
-      <p:sp>
-        <p:nvSpPr>
-          <p:cNvPr id="24" name="Text 17"/>
-          <p:cNvSpPr txBox="1"/>
-          <p:nvPr/>
-        </p:nvSpPr>
-        <p:spPr>
-          <a:xfrm>
-            <a:off x="1463040" y="4306824"/>
-            <a:ext cx="4480560" cy="292608"/>
-          </a:xfrm>
-          <a:prstGeom prst="rect">
-            <a:avLst/>
-          </a:prstGeom>
-          <a:noFill/>
-          <a:ln/>
-        </p:spPr>
-        <p:txBody>
-          <a:bodyPr wrap="square" lIns="0" tIns="0" rIns="0" bIns="0" rtlCol="0" anchor="t"/>
-          <a:lstStyle/>
-          <a:p>
-            <a:pPr indent="0" marL="0">
-              <a:buNone/>
-            </a:pPr>
-            <a:r>
-              <a:rPr lang="en-US" sz="1300" dirty="0">
-                <a:solidFill>
-                  <a:srgbClr val="B8C6CC"/>
-                </a:solidFill>
-                <a:latin typeface="Calibri" pitchFamily="34" charset="0"/>
-                <a:ea typeface="Calibri" pitchFamily="34" charset="-122"/>
-                <a:cs typeface="Calibri" pitchFamily="34" charset="-120"/>
-              </a:rPr>
-              <a:t>Handoff works without the model</a:t>
-            </a:r>
-            <a:endParaRPr lang="en-US" sz="1300" dirty="0"/>
-          </a:p>
-        </p:txBody>
-      </p:sp>
-      <p:sp>
-        <p:nvSpPr>
-          <p:cNvPr id="25" name="Shape 18"/>
-          <p:cNvSpPr/>
-          <p:nvPr/>
-        </p:nvSpPr>
-        <p:spPr>
-          <a:xfrm>
-            <a:off x="6400800" y="3941064"/>
-            <a:ext cx="640080" cy="640080"/>
-          </a:xfrm>
-          <a:prstGeom prst="ellipse">
-            <a:avLst/>
-          </a:prstGeom>
-          <a:solidFill>
-            <a:srgbClr val="F2A541"/>
-          </a:solidFill>
-          <a:ln w="12700">
-            <a:solidFill>
-              <a:srgbClr val="F2A541"/>
-            </a:solidFill>
-            <a:prstDash val="solid"/>
-          </a:ln>
-        </p:spPr>
-      </p:sp>
-      <p:pic>
-        <p:nvPicPr>
-          <p:cNvPr id="26" name="Image 5" descr="preencoded.png">    </p:cNvPr>
-          <p:cNvPicPr>
-            <a:picLocks noChangeAspect="1"/>
-          </p:cNvPicPr>
-          <p:nvPr/>
-        </p:nvPicPr>
-        <p:blipFill>
-          <a:blip r:embed="rId6"/>
-          <a:stretch>
-            <a:fillRect/>
-          </a:stretch>
-        </p:blipFill>
-        <p:spPr>
-          <a:xfrm>
-            <a:off x="6567221" y="4107485"/>
-            <a:ext cx="307238" cy="307238"/>
-          </a:xfrm>
-          <a:prstGeom prst="rect">
-            <a:avLst/>
-          </a:prstGeom>
-        </p:spPr>
-      </p:pic>
-      <p:sp>
-        <p:nvSpPr>
-          <p:cNvPr id="27" name="Text 19"/>
-          <p:cNvSpPr txBox="1"/>
-          <p:nvPr/>
-        </p:nvSpPr>
-        <p:spPr>
-          <a:xfrm>
-            <a:off x="7223760" y="3959352"/>
-            <a:ext cx="4389120" cy="329184"/>
-          </a:xfrm>
-          <a:prstGeom prst="rect">
-            <a:avLst/>
-          </a:prstGeom>
-          <a:noFill/>
-          <a:ln/>
-        </p:spPr>
-        <p:txBody>
-          <a:bodyPr wrap="square" lIns="0" tIns="0" rIns="0" bIns="0" rtlCol="0" anchor="t"/>
-          <a:lstStyle/>
-          <a:p>
-            <a:pPr indent="0" marL="0">
-              <a:buNone/>
-            </a:pPr>
-            <a:r>
-              <a:rPr lang="en-US" sz="1700" b="1" dirty="0">
-                <a:solidFill>
-                  <a:srgbClr val="FFFFFF"/>
-                </a:solidFill>
-                <a:latin typeface="Calibri" pitchFamily="34" charset="0"/>
-                <a:ea typeface="Calibri" pitchFamily="34" charset="-122"/>
-                <a:cs typeface="Calibri" pitchFamily="34" charset="-120"/>
-              </a:rPr>
-              <a:t>One instance, no load test</a:t>
-            </a:r>
-            <a:endParaRPr lang="en-US" sz="1700" dirty="0"/>
-          </a:p>
-        </p:txBody>
-      </p:sp>
-      <p:sp>
-        <p:nvSpPr>
-          <p:cNvPr id="28" name="Text 20"/>
-          <p:cNvSpPr txBox="1"/>
-          <p:nvPr/>
-        </p:nvSpPr>
-        <p:spPr>
-          <a:xfrm>
-            <a:off x="7223760" y="4306824"/>
-            <a:ext cx="4389120" cy="292608"/>
-          </a:xfrm>
-          <a:prstGeom prst="rect">
-            <a:avLst/>
-          </a:prstGeom>
-          <a:noFill/>
-          <a:ln/>
-        </p:spPr>
-        <p:txBody>
-          <a:bodyPr wrap="square" lIns="0" tIns="0" rIns="0" bIns="0" rtlCol="0" anchor="t"/>
-          <a:lstStyle/>
-          <a:p>
-            <a:pPr indent="0" marL="0">
-              <a:buNone/>
-            </a:pPr>
-            <a:r>
-              <a:rPr lang="en-US" sz="1300" dirty="0">
-                <a:solidFill>
-                  <a:srgbClr val="B8C6CC"/>
-                </a:solidFill>
-                <a:latin typeface="Calibri" pitchFamily="34" charset="0"/>
-                <a:ea typeface="Calibri" pitchFamily="34" charset="-122"/>
-                <a:cs typeface="Calibri" pitchFamily="34" charset="-120"/>
-              </a:rPr>
-              <a:t>Sessions still in memory</a:t>
-            </a:r>
-            <a:endParaRPr lang="en-US" sz="1300" dirty="0"/>
-          </a:p>
-        </p:txBody>
-      </p:sp>
-      <p:sp>
-        <p:nvSpPr>
-          <p:cNvPr id="29" name="Shape 21"/>
-          <p:cNvSpPr/>
-          <p:nvPr/>
-        </p:nvSpPr>
-        <p:spPr>
-          <a:xfrm>
-            <a:off x="640080" y="4928616"/>
-            <a:ext cx="640080" cy="640080"/>
-          </a:xfrm>
-          <a:prstGeom prst="ellipse">
-            <a:avLst/>
-          </a:prstGeom>
-          <a:solidFill>
-            <a:srgbClr val="0B6E4F"/>
-          </a:solidFill>
-          <a:ln w="12700">
-            <a:solidFill>
-              <a:srgbClr val="0B6E4F"/>
-            </a:solidFill>
-            <a:prstDash val="solid"/>
-          </a:ln>
-        </p:spPr>
-      </p:sp>
-      <p:pic>
-        <p:nvPicPr>
-          <p:cNvPr id="30" name="Image 6" descr="preencoded.png">    </p:cNvPr>
-          <p:cNvPicPr>
-            <a:picLocks noChangeAspect="1"/>
-          </p:cNvPicPr>
-          <p:nvPr/>
-        </p:nvPicPr>
-        <p:blipFill>
-          <a:blip r:embed="rId7"/>
-          <a:stretch>
-            <a:fillRect/>
-          </a:stretch>
-        </p:blipFill>
-        <p:spPr>
-          <a:xfrm>
-            <a:off x="806501" y="5095037"/>
-            <a:ext cx="307238" cy="307238"/>
-          </a:xfrm>
-          <a:prstGeom prst="rect">
-            <a:avLst/>
-          </a:prstGeom>
-        </p:spPr>
-      </p:pic>
-      <p:sp>
-        <p:nvSpPr>
-          <p:cNvPr id="31" name="Text 22"/>
-          <p:cNvSpPr txBox="1"/>
-          <p:nvPr/>
-        </p:nvSpPr>
-        <p:spPr>
-          <a:xfrm>
-            <a:off x="1463040" y="4946904"/>
-            <a:ext cx="4480560" cy="329184"/>
-          </a:xfrm>
-          <a:prstGeom prst="rect">
-            <a:avLst/>
-          </a:prstGeom>
-          <a:noFill/>
-          <a:ln/>
-        </p:spPr>
-        <p:txBody>
-          <a:bodyPr wrap="square" lIns="0" tIns="0" rIns="0" bIns="0" rtlCol="0" anchor="t"/>
-          <a:lstStyle/>
-          <a:p>
-            <a:pPr indent="0" marL="0">
-              <a:buNone/>
-            </a:pPr>
-            <a:r>
-              <a:rPr lang="en-US" sz="1700" b="1" dirty="0">
-                <a:solidFill>
-                  <a:srgbClr val="FFFFFF"/>
-                </a:solidFill>
-                <a:latin typeface="Calibri" pitchFamily="34" charset="0"/>
-                <a:ea typeface="Calibri" pitchFamily="34" charset="-122"/>
-                <a:cs typeface="Calibri" pitchFamily="34" charset="-120"/>
-              </a:rPr>
-              <a:t>Least privilege and secrets</a:t>
-            </a:r>
-            <a:endParaRPr lang="en-US" sz="1700" dirty="0"/>
-          </a:p>
-        </p:txBody>
-      </p:sp>
-      <p:sp>
-        <p:nvSpPr>
-          <p:cNvPr id="32" name="Text 23"/>
-          <p:cNvSpPr txBox="1"/>
-          <p:nvPr/>
-        </p:nvSpPr>
-        <p:spPr>
-          <a:xfrm>
-            <a:off x="1463040" y="5294376"/>
-            <a:ext cx="4480560" cy="292608"/>
-          </a:xfrm>
-          <a:prstGeom prst="rect">
-            <a:avLst/>
-          </a:prstGeom>
-          <a:noFill/>
-          <a:ln/>
-        </p:spPr>
-        <p:txBody>
-          <a:bodyPr wrap="square" lIns="0" tIns="0" rIns="0" bIns="0" rtlCol="0" anchor="t"/>
-          <a:lstStyle/>
-          <a:p>
-            <a:pPr indent="0" marL="0">
-              <a:buNone/>
-            </a:pPr>
-            <a:r>
-              <a:rPr lang="en-US" sz="1300" dirty="0">
-                <a:solidFill>
-                  <a:srgbClr val="B8C6CC"/>
-                </a:solidFill>
-                <a:latin typeface="Calibri" pitchFamily="34" charset="0"/>
-                <a:ea typeface="Calibri" pitchFamily="34" charset="-122"/>
-                <a:cs typeface="Calibri" pitchFamily="34" charset="-120"/>
-              </a:rPr>
-              <a:t>30-day retention, alerts, Terraform</a:t>
-            </a:r>
-            <a:endParaRPr lang="en-US" sz="1300" dirty="0"/>
-          </a:p>
-        </p:txBody>
-      </p:sp>
-      <p:sp>
-        <p:nvSpPr>
-          <p:cNvPr id="33" name="Shape 24"/>
-          <p:cNvSpPr/>
-          <p:nvPr/>
-        </p:nvSpPr>
-        <p:spPr>
-          <a:xfrm>
-            <a:off x="6400800" y="4928616"/>
-            <a:ext cx="640080" cy="640080"/>
-          </a:xfrm>
-          <a:prstGeom prst="ellipse">
-            <a:avLst/>
-          </a:prstGeom>
-          <a:solidFill>
-            <a:srgbClr val="F2A541"/>
-          </a:solidFill>
-          <a:ln w="12700">
-            <a:solidFill>
-              <a:srgbClr val="F2A541"/>
-            </a:solidFill>
-            <a:prstDash val="solid"/>
-          </a:ln>
-        </p:spPr>
-      </p:sp>
-      <p:pic>
-        <p:nvPicPr>
-          <p:cNvPr id="34" name="Image 7" descr="preencoded.png">    </p:cNvPr>
-          <p:cNvPicPr>
-            <a:picLocks noChangeAspect="1"/>
-          </p:cNvPicPr>
-          <p:nvPr/>
-        </p:nvPicPr>
-        <p:blipFill>
-          <a:blip r:embed="rId8"/>
-          <a:stretch>
-            <a:fillRect/>
-          </a:stretch>
-        </p:blipFill>
-        <p:spPr>
-          <a:xfrm>
-            <a:off x="6567221" y="5095037"/>
-            <a:ext cx="307238" cy="307238"/>
-          </a:xfrm>
-          <a:prstGeom prst="rect">
-            <a:avLst/>
-          </a:prstGeom>
-        </p:spPr>
-      </p:pic>
-      <p:sp>
-        <p:nvSpPr>
-          <p:cNvPr id="35" name="Text 25"/>
-          <p:cNvSpPr txBox="1"/>
-          <p:nvPr/>
-        </p:nvSpPr>
-        <p:spPr>
-          <a:xfrm>
-            <a:off x="7223760" y="4946904"/>
-            <a:ext cx="4389120" cy="329184"/>
-          </a:xfrm>
-          <a:prstGeom prst="rect">
-            <a:avLst/>
-          </a:prstGeom>
-          <a:noFill/>
-          <a:ln/>
-        </p:spPr>
-        <p:txBody>
-          <a:bodyPr wrap="square" lIns="0" tIns="0" rIns="0" bIns="0" rtlCol="0" anchor="t"/>
-          <a:lstStyle/>
-          <a:p>
-            <a:pPr indent="0" marL="0">
-              <a:buNone/>
-            </a:pPr>
-            <a:r>
-              <a:rPr lang="en-US" sz="1700" b="1" dirty="0">
-                <a:solidFill>
-                  <a:srgbClr val="FFFFFF"/>
-                </a:solidFill>
-                <a:latin typeface="Calibri" pitchFamily="34" charset="0"/>
-                <a:ea typeface="Calibri" pitchFamily="34" charset="-122"/>
-                <a:cs typeface="Calibri" pitchFamily="34" charset="-120"/>
-              </a:rPr>
-              <a:t>Voice and WhatsApp</a:t>
-            </a:r>
-            <a:endParaRPr lang="en-US" sz="1700" dirty="0"/>
-          </a:p>
-        </p:txBody>
-      </p:sp>
-      <p:sp>
-        <p:nvSpPr>
-          <p:cNvPr id="36" name="Text 26"/>
-          <p:cNvSpPr txBox="1"/>
-          <p:nvPr/>
-        </p:nvSpPr>
-        <p:spPr>
-          <a:xfrm>
-            <a:off x="7223760" y="5294376"/>
-            <a:ext cx="4389120" cy="292608"/>
-          </a:xfrm>
-          <a:prstGeom prst="rect">
-            <a:avLst/>
-          </a:prstGeom>
-          <a:noFill/>
-          <a:ln/>
-        </p:spPr>
-        <p:txBody>
-          <a:bodyPr wrap="square" lIns="0" tIns="0" rIns="0" bIns="0" rtlCol="0" anchor="t"/>
-          <a:lstStyle/>
-          <a:p>
-            <a:pPr indent="0" marL="0">
-              <a:buNone/>
-            </a:pPr>
-            <a:r>
-              <a:rPr lang="en-US" sz="1300" dirty="0">
-                <a:solidFill>
-                  <a:srgbClr val="B8C6CC"/>
-                </a:solidFill>
-                <a:latin typeface="Calibri" pitchFamily="34" charset="0"/>
-                <a:ea typeface="Calibri" pitchFamily="34" charset="-122"/>
-                <a:cs typeface="Calibri" pitchFamily="34" charset="-120"/>
-              </a:rPr>
-              <a:t>Designed, not deployed</a:t>
-            </a:r>
-            <a:endParaRPr lang="en-US" sz="1300" dirty="0"/>
-          </a:p>
-        </p:txBody>
-      </p:sp>
-      <p:sp>
-        <p:nvSpPr>
-          <p:cNvPr id="37" name="Text 27"/>
-          <p:cNvSpPr txBox="1"/>
-          <p:nvPr/>
-        </p:nvSpPr>
-        <p:spPr>
-          <a:xfrm>
-            <a:off x="640080" y="5943600"/>
-            <a:ext cx="10972800" cy="320040"/>
-          </a:xfrm>
-          <a:prstGeom prst="rect">
-            <a:avLst/>
-          </a:prstGeom>
-          <a:noFill/>
-          <a:ln/>
-        </p:spPr>
-        <p:txBody>
-          <a:bodyPr wrap="square" lIns="0" tIns="0" rIns="0" bIns="0" rtlCol="0" anchor="t"/>
-          <a:lstStyle/>
-          <a:p>
-            <a:pPr indent="0" marL="0">
-              <a:buNone/>
-            </a:pPr>
-            <a:r>
-              <a:rPr lang="en-US" sz="1300" dirty="0">
-                <a:solidFill>
-                  <a:srgbClr val="9FE0C4"/>
-                </a:solidFill>
-                <a:latin typeface="Calibri" pitchFamily="34" charset="0"/>
-                <a:ea typeface="Calibri" pitchFamily="34" charset="-122"/>
-                <a:cs typeface="Calibri" pitchFamily="34" charset="-120"/>
-              </a:rPr>
-              <a:t>latam-bank-hackaton-2026.web.app   ·   /banca/ for the customer   ·   /operador/ for the human expert</a:t>
-            </a:r>
-            <a:endParaRPr lang="en-US" sz="1300" dirty="0"/>
-          </a:p>
-        </p:txBody>
-      </p:sp>
-      <p:sp>
-        <p:nvSpPr>
-          <p:cNvPr id="38" name="Text 28"/>
-          <p:cNvSpPr txBox="1"/>
-          <p:nvPr/>
-        </p:nvSpPr>
-        <p:spPr>
-          <a:xfrm>
-            <a:off x="548640" y="6419088"/>
-            <a:ext cx="7315200" cy="274320"/>
-          </a:xfrm>
-          <a:prstGeom prst="rect">
-            <a:avLst/>
-          </a:prstGeom>
-          <a:noFill/>
-          <a:ln/>
-        </p:spPr>
-        <p:txBody>
-          <a:bodyPr wrap="square" lIns="0" tIns="0" rIns="0" bIns="0" rtlCol="0" anchor="t"/>
-          <a:lstStyle/>
-          <a:p>
-            <a:pPr indent="0" marL="0">
-              <a:buNone/>
-            </a:pPr>
-            <a:r>
               <a:rPr lang="en-US" sz="1000" dirty="0">
                 <a:solidFill>
-                  <a:srgbClr val="8FA3AD"/>
-                </a:solidFill>
-                <a:latin typeface="Calibri" pitchFamily="34" charset="0"/>
-                <a:ea typeface="Calibri" pitchFamily="34" charset="-122"/>
-                <a:cs typeface="Calibri" pitchFamily="34" charset="-120"/>
-              </a:rPr>
-              <a:t>LATAM Bank  ·  Factored AI &amp; Data Hackathon 2026</a:t>
+                  <a:srgbClr val="5B6770"/>
+                </a:solidFill>
+                <a:latin typeface="Calibri" pitchFamily="34" charset="0"/>
+                <a:ea typeface="Calibri" pitchFamily="34" charset="-122"/>
+                <a:cs typeface="Calibri" pitchFamily="34" charset="-120"/>
+              </a:rPr>
+              <a:t>LATAM Bank  ·  Live today: latam-bank-hackaton-2026.web.app  ·  Offline measurements on synthetic data</a:t>
             </a:r>
             <a:endParaRPr lang="en-US" sz="1000" dirty="0"/>
           </a:p>
@@ -8727,7 +8800,7 @@
       </p:sp>
       <p:sp>
         <p:nvSpPr>
-          <p:cNvPr id="39" name="Text 29"/>
+          <p:cNvPr id="27" name="Text 21"/>
           <p:cNvSpPr txBox="1"/>
           <p:nvPr/>
         </p:nvSpPr>
@@ -8752,7 +8825,7 @@
             <a:r>
               <a:rPr lang="en-US" sz="1000" dirty="0">
                 <a:solidFill>
-                  <a:srgbClr val="8FA3AD"/>
+                  <a:srgbClr val="5B6770"/>
                 </a:solidFill>
                 <a:latin typeface="Calibri" pitchFamily="34" charset="0"/>
                 <a:ea typeface="Calibri" pitchFamily="34" charset="-122"/>
